--- a/SLIDE_FIREBASE_CLOUD_DMS.pptx
+++ b/SLIDE_FIREBASE_CLOUD_DMS.pptx
@@ -4,6 +4,9 @@
   <p:sldMasterIdLst>
     <p:sldMasterId id="2147483648" r:id="rId1"/>
   </p:sldMasterIdLst>
+  <p:notesMasterIdLst>
+    <p:notesMasterId r:id="rId20"/>
+  </p:notesMasterIdLst>
   <p:sldIdLst>
     <p:sldId id="256" r:id="rId2"/>
     <p:sldId id="257" r:id="rId3"/>
@@ -24,9 +27,6 @@
     <p:sldId id="272" r:id="rId18"/>
     <p:sldId id="273" r:id="rId19"/>
   </p:sldIdLst>
-  <p:notesMasterIdLst>
-    <p:notesMasterId r:id="rId20"/>
-  </p:notesMasterIdLst>
   <p:sldSz cx="12192000" cy="6858000"/>
   <p:notesSz cx="6858000" cy="12192000"/>
   <p:defaultTextStyle>
@@ -124,7 +124,7 @@
   <p:extLst>
     <p:ext uri="{521415D9-36F7-43E2-AB2F-B90AF26B5E84}">
       <p14:sectionLst xmlns:p14="http://schemas.microsoft.com/office/powerpoint/2010/main">
-        <p14:section name="01 | Bài toán và quyết định" id="{20993204-f65c-416b-8a45-1239e607f9b7}">
+        <p14:section name="01 | Bài toán và quyết định" id="{20993204-F65C-416B-8A45-1239E607F9B7}">
           <p14:sldIdLst>
             <p14:sldId id="256"/>
             <p14:sldId id="257"/>
@@ -132,7 +132,7 @@
             <p14:sldId id="259"/>
           </p14:sldIdLst>
         </p14:section>
-        <p14:section name="02 | Thiết kế tích hợp" id="{15d2a489-0237-3ddf-2ba1-7ec7af836723}">
+        <p14:section name="02 | Thiết kế tích hợp" id="{15D2A489-0237-3DDF-2BA1-7EC7AF836723}">
           <p14:sldIdLst>
             <p14:sldId id="260"/>
             <p14:sldId id="261"/>
@@ -142,14 +142,14 @@
             <p14:sldId id="265"/>
           </p14:sldIdLst>
         </p14:section>
-        <p14:section name="03 | Bảo mật, chi phí, hiệu năng" id="{715bb337-8ca9-1560-3c54-53eb7c662ce7}">
+        <p14:section name="03 | Bảo mật, chi phí, hiệu năng" id="{715BB337-8CA9-1560-3C54-53EB7C662CE7}">
           <p14:sldIdLst>
             <p14:sldId id="266"/>
             <p14:sldId id="267"/>
             <p14:sldId id="268"/>
           </p14:sldIdLst>
         </p14:section>
-        <p14:section name="04 | Thiết lập và nghiệm thu" id="{0bee69c7-e774-90ff-2829-46ffb9bd0106}">
+        <p14:section name="04 | Thiết lập và nghiệm thu" id="{0BEE69C7-E774-90FF-2829-46FFB9BD0106}">
           <p14:sldIdLst>
             <p14:sldId id="269"/>
             <p14:sldId id="270"/>
@@ -157,7 +157,7 @@
             <p14:sldId id="272"/>
           </p14:sldIdLst>
         </p14:section>
-        <p14:section name="05 | Tài liệu đối chiếu" id="{4a450d18-4eb9-bb90-2aae-24e99ce0f3fb}">
+        <p14:section name="05 | Tài liệu đối chiếu" id="{4A450D18-4EB9-BB90-2AAE-24E99CE0F3FB}">
           <p14:sldIdLst>
             <p14:sldId id="273"/>
           </p14:sldIdLst>
@@ -193,234 +193,10 @@
           <a:chExt cx="0" cy="0"/>
         </a:xfrm>
       </p:grpSpPr>
-      <p:sp>
-        <p:nvSpPr>
-          <p:cNvPr id="2" name="Header Placeholder 1"/>
-          <p:cNvSpPr>
-            <a:spLocks noGrp="1"/>
-          </p:cNvSpPr>
-          <p:nvPr>
-            <p:ph type="hdr" sz="quarter"/>
-          </p:nvPr>
-        </p:nvSpPr>
-        <p:spPr>
-          <a:xfrm>
-            <a:off x="0" y="0"/>
-            <a:ext cx="2971800" cy="458788"/>
-          </a:xfrm>
-          <a:prstGeom prst="rect">
-            <a:avLst/>
-          </a:prstGeom>
-        </p:spPr>
-        <p:txBody>
-          <a:bodyPr vert="horz" lIns="91440" tIns="45720" rIns="91440" bIns="45720" rtlCol="0"/>
-          <a:lstStyle>
-            <a:lvl1pPr algn="l">
-              <a:defRPr sz="1200"/>
-            </a:lvl1pPr>
-          </a:lstStyle>
-          <a:p>
-            <a:endParaRPr lang="en-US"/>
-          </a:p>
-        </p:txBody>
-      </p:sp>
-      <p:sp>
-        <p:nvSpPr>
-          <p:cNvPr id="3" name="Date Placeholder 2"/>
-          <p:cNvSpPr>
-            <a:spLocks noGrp="1"/>
-          </p:cNvSpPr>
-          <p:nvPr>
-            <p:ph type="dt" idx="1"/>
-          </p:nvPr>
-        </p:nvSpPr>
-        <p:spPr>
-          <a:xfrm>
-            <a:off x="3884613" y="0"/>
-            <a:ext cx="2971800" cy="458788"/>
-          </a:xfrm>
-          <a:prstGeom prst="rect">
-            <a:avLst/>
-          </a:prstGeom>
-        </p:spPr>
-        <p:txBody>
-          <a:bodyPr vert="horz" lIns="91440" tIns="45720" rIns="91440" bIns="45720" rtlCol="0"/>
-          <a:lstStyle>
-            <a:lvl1pPr algn="r">
-              <a:defRPr sz="1200"/>
-            </a:lvl1pPr>
-          </a:lstStyle>
-          <a:p>
-            <a:fld id="{5282F153-3F37-0F45-9E97-73ACFA13230C}" type="datetimeFigureOut">
-              <a:rPr lang="en-US"/>
-              <a:t>7/23/19</a:t>
-            </a:fld>
-            <a:endParaRPr lang="en-US"/>
-          </a:p>
-        </p:txBody>
-      </p:sp>
-      <p:sp>
-        <p:nvSpPr>
-          <p:cNvPr id="4" name="Slide Image Placeholder 3"/>
-          <p:cNvSpPr>
-            <a:spLocks noGrp="1" noRot="1" noChangeAspect="1"/>
-          </p:cNvSpPr>
-          <p:nvPr>
-            <p:ph type="sldImg" idx="2"/>
-          </p:nvPr>
-        </p:nvSpPr>
-        <p:spPr>
-          <a:xfrm>
-            <a:off x="685800" y="1143000"/>
-            <a:ext cx="5486400" cy="3086100"/>
-          </a:xfrm>
-          <a:prstGeom prst="rect">
-            <a:avLst/>
-          </a:prstGeom>
-          <a:noFill/>
-          <a:ln w="12700">
-            <a:solidFill>
-              <a:prstClr val="black"/>
-            </a:solidFill>
-          </a:ln>
-        </p:spPr>
-        <p:txBody>
-          <a:bodyPr vert="horz" lIns="91440" tIns="45720" rIns="91440" bIns="45720" rtlCol="0" anchor="ctr"/>
-          <a:lstStyle/>
-          <a:p>
-            <a:endParaRPr lang="en-US"/>
-          </a:p>
-        </p:txBody>
-      </p:sp>
-      <p:sp>
-        <p:nvSpPr>
-          <p:cNvPr id="5" name="Notes Placeholder 4"/>
-          <p:cNvSpPr>
-            <a:spLocks noGrp="1"/>
-          </p:cNvSpPr>
-          <p:nvPr>
-            <p:ph type="body" sz="quarter" idx="3"/>
-          </p:nvPr>
-        </p:nvSpPr>
-        <p:spPr>
-          <a:xfrm>
-            <a:off x="685800" y="4400550"/>
-            <a:ext cx="5486400" cy="3600450"/>
-          </a:xfrm>
-          <a:prstGeom prst="rect">
-            <a:avLst/>
-          </a:prstGeom>
-        </p:spPr>
-        <p:txBody>
-          <a:bodyPr vert="horz" lIns="91440" tIns="45720" rIns="91440" bIns="45720" rtlCol="0"/>
-          <a:lstStyle/>
-          <a:p>
-            <a:pPr lvl="0"/>
-            <a:r>
-              <a:rPr lang="en-US"/>
-              <a:t>Click to edit Master text styles</a:t>
-            </a:r>
-          </a:p>
-          <a:p>
-            <a:pPr lvl="1"/>
-            <a:r>
-              <a:rPr lang="en-US"/>
-              <a:t>Second level</a:t>
-            </a:r>
-          </a:p>
-          <a:p>
-            <a:pPr lvl="2"/>
-            <a:r>
-              <a:rPr lang="en-US"/>
-              <a:t>Third level</a:t>
-            </a:r>
-          </a:p>
-          <a:p>
-            <a:pPr lvl="3"/>
-            <a:r>
-              <a:rPr lang="en-US"/>
-              <a:t>Fourth level</a:t>
-            </a:r>
-          </a:p>
-          <a:p>
-            <a:pPr lvl="4"/>
-            <a:r>
-              <a:rPr lang="en-US"/>
-              <a:t>Fifth level</a:t>
-            </a:r>
-          </a:p>
-        </p:txBody>
-      </p:sp>
-      <p:sp>
-        <p:nvSpPr>
-          <p:cNvPr id="6" name="Footer Placeholder 5"/>
-          <p:cNvSpPr>
-            <a:spLocks noGrp="1"/>
-          </p:cNvSpPr>
-          <p:nvPr>
-            <p:ph type="ftr" sz="quarter" idx="4"/>
-          </p:nvPr>
-        </p:nvSpPr>
-        <p:spPr>
-          <a:xfrm>
-            <a:off x="0" y="8685213"/>
-            <a:ext cx="2971800" cy="458787"/>
-          </a:xfrm>
-          <a:prstGeom prst="rect">
-            <a:avLst/>
-          </a:prstGeom>
-        </p:spPr>
-        <p:txBody>
-          <a:bodyPr vert="horz" lIns="91440" tIns="45720" rIns="91440" bIns="45720" rtlCol="0" anchor="b"/>
-          <a:lstStyle>
-            <a:lvl1pPr algn="l">
-              <a:defRPr sz="1200"/>
-            </a:lvl1pPr>
-          </a:lstStyle>
-          <a:p>
-            <a:endParaRPr lang="en-US"/>
-          </a:p>
-        </p:txBody>
-      </p:sp>
-      <p:sp>
-        <p:nvSpPr>
-          <p:cNvPr id="7" name="Slide Number Placeholder 6"/>
-          <p:cNvSpPr>
-            <a:spLocks noGrp="1"/>
-          </p:cNvSpPr>
-          <p:nvPr>
-            <p:ph type="sldNum" sz="quarter" idx="5"/>
-          </p:nvPr>
-        </p:nvSpPr>
-        <p:spPr>
-          <a:xfrm>
-            <a:off x="3884613" y="8685213"/>
-            <a:ext cx="2971800" cy="458787"/>
-          </a:xfrm>
-          <a:prstGeom prst="rect">
-            <a:avLst/>
-          </a:prstGeom>
-        </p:spPr>
-        <p:txBody>
-          <a:bodyPr vert="horz" lIns="91440" tIns="45720" rIns="91440" bIns="45720" rtlCol="0" anchor="b"/>
-          <a:lstStyle>
-            <a:lvl1pPr algn="r">
-              <a:defRPr sz="1200"/>
-            </a:lvl1pPr>
-          </a:lstStyle>
-          <a:p>
-            <a:fld id="{CE5E9CC1-C706-0F49-92D6-E571CC5EEA8F}" type="slidenum">
-              <a:rPr lang="en-US"/>
-              <a:t>‹#›</a:t>
-            </a:fld>
-            <a:endParaRPr lang="en-US"/>
-          </a:p>
-        </p:txBody>
-      </p:sp>
     </p:spTree>
     <p:extLst>
       <p:ext uri="{BB962C8B-B14F-4D97-AF65-F5344CB8AC3E}">
-        <p14:creationId xmlns:p14="http://schemas.microsoft.com/office/powerpoint/2010/main" val="1024086991"/>
+        <p14:creationId xmlns:p14="http://schemas.microsoft.com/office/powerpoint/2010/main" val="2856301813"/>
       </p:ext>
     </p:extLst>
   </p:cSld>
@@ -572,7 +348,6 @@
 F2: Flutter Google Auth | https://firebase.google.com/docs/auth/flutter/federated-auth
 Đối chiếu mã nguồn: lib/cloud/cloudDocumentService.dart; lib/cloud/cloudDocument.dart; lib/cloud/firebaseBootstrap.dart; firestore.rules; storage.rules. Không sử dụng đề xuất AWS trong báo cáo cũ làm căn cứ kiến trúc.</a:t>
             </a:r>
-            <a:endParaRPr lang="en-US" dirty="0"/>
           </a:p>
         </p:txBody>
       </p:sp>
@@ -662,7 +437,6 @@
 Firestore lưu document trong users/{uid}/documents/{documentId}. Chín trường đúng với code là ownerId, title, subject, note, fileName, contentType, size, storagePath và createdAt. createdAt được ghi bằng serverTimestamp, Rules yêu cầu bằng thời gian request khi tạo. Storage object luôn ở users/{uid}/documents/{documentId}/file. documentId do Firestore cấp, tên tệp gốc nằm ở metadata. Rules chỉ cho chỉnh title và note; ownerId, path và thông tin tệp không được thay đổi bằng update. Cặp schema này không liên kết với subjects trong SQLite và không tạo cơ chế đồng bộ.
 Đối chiếu mã nguồn: lib/cloud/cloudDocumentService.dart; lib/cloud/cloudDocument.dart; lib/cloud/firebaseBootstrap.dart; firestore.rules; storage.rules. Không sử dụng đề xuất AWS trong báo cáo cũ làm căn cứ kiến trúc.</a:t>
             </a:r>
-            <a:endParaRPr lang="en-US" dirty="0"/>
           </a:p>
         </p:txBody>
       </p:sp>
@@ -754,7 +528,6 @@
 F5: Storage Rules | https://firebase.google.com/docs/storage/security
 Đối chiếu mã nguồn: lib/cloud/cloudDocumentService.dart; lib/cloud/cloudDocument.dart; lib/cloud/firebaseBootstrap.dart; firestore.rules; storage.rules. Không sử dụng đề xuất AWS trong báo cáo cũ làm căn cứ kiến trúc.</a:t>
             </a:r>
-            <a:endParaRPr lang="en-US" dirty="0"/>
           </a:p>
         </p:txBody>
       </p:sp>
@@ -846,7 +619,6 @@
 F7: Pricing and budget alerts | https://firebase.google.com/pricing | https://firebase.google.com/docs/projects/billing/avoid-surprise-bills
 Đối chiếu mã nguồn: lib/cloud/cloudDocumentService.dart; lib/cloud/cloudDocument.dart; lib/cloud/firebaseBootstrap.dart; firestore.rules; storage.rules. Không sử dụng đề xuất AWS trong báo cáo cũ làm căn cứ kiến trúc.</a:t>
             </a:r>
-            <a:endParaRPr lang="en-US" dirty="0"/>
           </a:p>
         </p:txBody>
       </p:sp>
@@ -938,7 +710,6 @@
 F7: Pricing and budget alerts | https://firebase.google.com/pricing | https://firebase.google.com/docs/projects/billing/avoid-surprise-bills
 Đối chiếu mã nguồn: lib/cloud/cloudDocumentService.dart; lib/cloud/cloudDocument.dart; lib/cloud/firebaseBootstrap.dart; firestore.rules; storage.rules. Không sử dụng đề xuất AWS trong báo cáo cũ làm căn cứ kiến trúc.</a:t>
             </a:r>
-            <a:endParaRPr lang="en-US" dirty="0"/>
           </a:p>
         </p:txBody>
       </p:sp>
@@ -1031,7 +802,6 @@
 F6: Blaze and Storage changes | https://firebase.google.com/docs/storage/faqs-storage-changes-announced-sept-2024
 Đối chiếu mã nguồn: lib/cloud/cloudDocumentService.dart; lib/cloud/cloudDocument.dart; lib/cloud/firebaseBootstrap.dart; firestore.rules; storage.rules. Không sử dụng đề xuất AWS trong báo cáo cũ làm căn cứ kiến trúc.</a:t>
             </a:r>
-            <a:endParaRPr lang="en-US" dirty="0"/>
           </a:p>
         </p:txBody>
       </p:sp>
@@ -1122,7 +892,6 @@
 Nguồn tham khảo: F4: Storage download: Flutter / Web | https://firebase.google.com/docs/storage/flutter/download-files | https://firebase.google.com/docs/storage/web/download-files
 Đối chiếu mã nguồn: lib/cloud/cloudDocumentService.dart; lib/cloud/cloudDocument.dart; lib/cloud/firebaseBootstrap.dart; firestore.rules; storage.rules. Không sử dụng đề xuất AWS trong báo cáo cũ làm căn cứ kiến trúc.</a:t>
             </a:r>
-            <a:endParaRPr lang="en-US" dirty="0"/>
           </a:p>
         </p:txBody>
       </p:sp>
@@ -1212,7 +981,6 @@
 Demo khoảng một phút với dữ liệu nhỏ và thời gian dự phòng. Trước khi chạy, xác nhận không có banner Emulator và app trỏ đúng project thật; Google popup hoặc Google sign-in Android phải là luồng thật. Thu bằng chứng Auth Console với provider Google và UID, che thông tin cá nhân khi nộp. Tài khoản thứ nhất trên thiết bị thứ nhất upload một tệp hợp lệ; ghi lại tiến trình và kết quả, đối chiếu Firestore metadata và object Storage cùng documentId, path, size và MIME. Trên thiết bị thứ hai đăng nhập cùng tài khoản và tải đủ tệp, mở kiểm tra nội dung hoặc so sánh hash với tệp gốc. Dùng tài khoản Google thứ hai để chứng minh kho riêng; không chỉ thấy danh sách rỗng mà thử đọc trực tiếp đường dẫn của tài khoản một bằng SDK và nhận permission-denied hoặc unauthorized. Kiểm tra file quá 10 MiB hoặc định dạng không cho phép; kiểm tra xóa và thử lại khi metadata chưa xóa trong môi trường test có kiểm soát. Emulator giúp kiểm thử Rules và nhánh lỗi, nhưng tài khoản giả trong Emulator không chứng minh Google OAuth, bucket thật, billing hay tải Cloud. Nhóm cần ảnh hoặc video thật kèm thời điểm và các bước, không chụp token, mật khẩu hay service-account key.
 Đối chiếu mã nguồn: lib/cloud/cloudDocumentService.dart; lib/cloud/cloudDocument.dart; lib/cloud/firebaseBootstrap.dart; firestore.rules; storage.rules. Không sử dụng đề xuất AWS trong báo cáo cũ làm căn cứ kiến trúc.</a:t>
             </a:r>
-            <a:endParaRPr lang="en-US" dirty="0"/>
           </a:p>
         </p:txBody>
       </p:sp>
@@ -1302,7 +1070,6 @@
 Kết luận: Firebase Public Cloud đáp ứng lựa chọn nền tảng của bài tập, trong khi SQLite vẫn độc lập để giữ quản lý tài liệu local offline. Thư viện Cloud có Auth Google, metadata theo UID, Storage binary và tải qua SDK xác thực, tối đa 10 MiB. Chưa có tự đồng bộ SQLite với Firestore, cache file Cloud offline, RBAC, chia sẻ nhóm, OCR, backup hoặc versioning; những khả năng đó chỉ nằm trong lộ trình cần thiết kế và kiểm thử riêng. Không coi độ bền của nhà cung cấp là backup ứng dụng đã triển khai. Điều kiện nghiệm thu là nhóm tạo dự án thật, bật Google, deploy Rules, cấu hình billing và CORS đúng, rồi hoàn thành bằng chứng hai thiết bị và hai tài khoản. Không thể thay điều kiện này bằng demo Emulator.
 Đối chiếu mã nguồn: lib/cloud/cloudDocumentService.dart; lib/cloud/cloudDocument.dart; lib/cloud/firebaseBootstrap.dart; firestore.rules; storage.rules. Không sử dụng đề xuất AWS trong báo cáo cũ làm căn cứ kiến trúc.</a:t>
             </a:r>
-            <a:endParaRPr lang="en-US" dirty="0"/>
           </a:p>
         </p:txBody>
       </p:sp>
@@ -1401,7 +1168,6 @@
 Nguồn nội bộ: lib/cloud/cloudDocumentService.dart; lib/cloud/cloudDocument.dart; lib/cloud/firebaseBootstrap.dart; firestore.rules; storage.rules; storage.cors.json; scripts/configure_firebase.ps1; lib/struct/documentService.dart; lib/database/appDatabase.dart; lib/database/tables.dart. Ngày đối chiếu nội dung: 08/10/2026. Đơn giá và yêu cầu cấu hình cần kiểm tra lại tại thời điểm triển khai thật.
 Đối chiếu mã nguồn: lib/cloud/cloudDocumentService.dart; lib/cloud/cloudDocument.dart; lib/cloud/firebaseBootstrap.dart; firestore.rules; storage.rules. Không sử dụng đề xuất AWS trong báo cáo cũ làm căn cứ kiến trúc.</a:t>
             </a:r>
-            <a:endParaRPr lang="en-US" dirty="0"/>
           </a:p>
         </p:txBody>
       </p:sp>
@@ -1491,7 +1257,6 @@
 Bốn thành phần hiện tại được đối chiếu với mã nguồn. Giao diện Flutter gồm trang danh sách, biểu mẫu, chi tiết và quản lý môn học. DocumentService thực hiện kiểm tra dữ liệu và thống kê; DatabaseGlobal cùng AppDatabase làm lớp truy cập dữ liệu, không có REST backend độc lập. SQLite có các bảng subjects và documents, lưu metadata như tiêu đề, môn học, deadline, yêu thích và fileUrl. Phần tệp cũ chỉ lưu đường dẫn hoặc URL do người dùng nhập; không có BLOB binary trong bảng SQLite và không phải một object store. Nguồn nội bộ: lib/main.dart; lib/pages; lib/widgets; lib/struct/documentService.dart; lib/database/appDatabase.dart; lib/database/tables.dart.
 Đối chiếu mã nguồn: lib/cloud/cloudDocumentService.dart; lib/cloud/cloudDocument.dart; lib/cloud/firebaseBootstrap.dart; firestore.rules; storage.rules. Không sử dụng đề xuất AWS trong báo cáo cũ làm căn cứ kiến trúc.</a:t>
             </a:r>
-            <a:endParaRPr lang="en-US" dirty="0"/>
           </a:p>
         </p:txBody>
       </p:sp>
@@ -1581,7 +1346,6 @@
 Điểm nghẽn chính là dữ liệu gắn với từng thiết bị, đường dẫn cục bộ không có ý nghĩa trên thiết bị khác, và việc lưu metadata không chứng minh rằng ứng dụng đã lưu hay sao lưu tệp thật. SQLite vẫn có lợi thế sử dụng offline. Không đưa ra số mili giây, số người dùng tối đa hoặc khẳng định dữ liệu mất 100 phần trăm khi chưa đo và chưa kiểm chứng. Phạm vi bài tập xử lý một phần bài toán bằng thư viện Cloud riêng tư, không triển khai cộng tác nhóm hoặc tự đồng bộ SQLite.
 Đối chiếu mã nguồn: lib/cloud/cloudDocumentService.dart; lib/cloud/cloudDocument.dart; lib/cloud/firebaseBootstrap.dart; firestore.rules; storage.rules. Không sử dụng đề xuất AWS trong báo cáo cũ làm căn cứ kiến trúc.</a:t>
             </a:r>
-            <a:endParaRPr lang="en-US" dirty="0"/>
           </a:p>
         </p:txBody>
       </p:sp>
@@ -1671,7 +1435,6 @@
 So sánh bốn khía cạnh. Phần local trước đây không có danh tính Cloud; phần mới dùng Google Auth và UID. Metadata cloud ở Firestore và metadata SQLite vẫn riêng biệt. Tệp mới được upload binary vào Cloud Storage thay vì chỉ giữ đường dẫn. Cùng tài khoản có thể truy cập thư viện Cloud trên Web hoặc Android khi có mạng. Local vẫn offline; thư viện Cloud không có cache file offline và không tự nhập dữ liệu vào SQLite. Bảng này mô tả khả năng trong mã, không chứng nhận triển khai Cloud thật, không hứa đồng bộ hai chiều, chia sẻ nhóm hoặc sao lưu tự động.
 Đối chiếu mã nguồn: lib/cloud/cloudDocumentService.dart; lib/cloud/cloudDocument.dart; lib/cloud/firebaseBootstrap.dart; firestore.rules; storage.rules. Không sử dụng đề xuất AWS trong báo cáo cũ làm căn cứ kiến trúc.</a:t>
             </a:r>
-            <a:endParaRPr lang="en-US" dirty="0"/>
           </a:p>
         </p:txBody>
       </p:sp>
@@ -1762,7 +1525,6 @@
 Nguồn tham khảo: F8: NIST: Hybrid cloud | https://csrc.nist.gov/glossary/term/hybrid_cloud
 Đối chiếu mã nguồn: lib/cloud/cloudDocumentService.dart; lib/cloud/cloudDocument.dart; lib/cloud/firebaseBootstrap.dart; firestore.rules; storage.rules. Không sử dụng đề xuất AWS trong báo cáo cũ làm căn cứ kiến trúc.</a:t>
             </a:r>
-            <a:endParaRPr lang="en-US" dirty="0"/>
           </a:p>
         </p:txBody>
       </p:sp>
@@ -1856,7 +1618,6 @@
 F5: Storage Rules | https://firebase.google.com/docs/storage/security
 Đối chiếu mã nguồn: lib/cloud/cloudDocumentService.dart; lib/cloud/cloudDocument.dart; lib/cloud/firebaseBootstrap.dart; firestore.rules; storage.rules. Không sử dụng đề xuất AWS trong báo cáo cũ làm căn cứ kiến trúc.</a:t>
             </a:r>
-            <a:endParaRPr lang="en-US" dirty="0"/>
           </a:p>
         </p:txBody>
       </p:sp>
@@ -1950,7 +1711,6 @@
 F5: Storage Rules | https://firebase.google.com/docs/storage/security
 Đối chiếu mã nguồn: lib/cloud/cloudDocumentService.dart; lib/cloud/cloudDocument.dart; lib/cloud/firebaseBootstrap.dart; firestore.rules; storage.rules. Không sử dụng đề xuất AWS trong báo cáo cũ làm căn cứ kiến trúc.</a:t>
             </a:r>
-            <a:endParaRPr lang="en-US" dirty="0"/>
           </a:p>
         </p:txBody>
       </p:sp>
@@ -2042,7 +1802,6 @@
 F4: Storage download: Flutter / Web | https://firebase.google.com/docs/storage/flutter/download-files | https://firebase.google.com/docs/storage/web/download-files
 Đối chiếu mã nguồn: lib/cloud/cloudDocumentService.dart; lib/cloud/cloudDocument.dart; lib/cloud/firebaseBootstrap.dart; firestore.rules; storage.rules. Không sử dụng đề xuất AWS trong báo cáo cũ làm căn cứ kiến trúc.</a:t>
             </a:r>
-            <a:endParaRPr lang="en-US" dirty="0"/>
           </a:p>
         </p:txBody>
       </p:sp>
@@ -2132,7 +1891,6 @@
 Upload trước tiên hoàn tất object Storage, sau đó ghi metadata Firestore. Nếu ghi metadata thất bại, code cố xóa object để bù trừ. Nếu cleanup cũng thất bại, thông báo trả đường dẫn tệp mồ côi để xử lý trong Console; không hứa rollback hoàn hảo. Xóa thực hiện Storage trước, Firestore sau. Nếu object đã mất, code bỏ qua object-not-found để cho phép người dùng thử xóa lại metadata. Nếu xóa metadata lỗi, việc retry thao tác xóa là an toàn đối với object đã xóa; đây là khả năng thử lại, không phải hàng đợi retry tự động. Nhóm cần demo đường thành công và kiểm tra lỗi trong môi trường test phù hợp.
 Đối chiếu mã nguồn: lib/cloud/cloudDocumentService.dart; lib/cloud/cloudDocument.dart; lib/cloud/firebaseBootstrap.dart; firestore.rules; storage.rules. Không sử dụng đề xuất AWS trong báo cáo cũ làm căn cứ kiến trúc.</a:t>
             </a:r>
-            <a:endParaRPr lang="en-US" dirty="0"/>
           </a:p>
         </p:txBody>
       </p:sp>
@@ -2210,6 +1968,7 @@
         <a:solidFill>
           <a:schemeClr val="tx1"/>
         </a:solidFill>
+        <a:effectLst/>
       </p:bgPr>
     </p:bg>
     <p:spTree>
@@ -2229,9 +1988,11 @@
       <p:sp>
         <p:nvSpPr>
           <p:cNvPr id="2" name="Text 0"/>
-          <p:cNvSpPr/>
+          <p:cNvSpPr>
+            <a:spLocks noGrp="1"/>
+          </p:cNvSpPr>
           <p:nvPr>
-            <p:ph idx="100" type="title" hasCustomPrompt="1"/>
+            <p:ph type="title" idx="100" hasCustomPrompt="1"/>
           </p:nvPr>
         </p:nvSpPr>
         <p:spPr>
@@ -2248,7 +2009,7 @@
         <p:txBody>
           <a:bodyPr wrap="square" rtlCol="0"/>
           <a:lstStyle>
-            <a:lvl1pPr indent="0" marL="0">
+            <a:lvl1pPr marL="0" indent="0">
               <a:buNone/>
               <a:defRPr lang="en-US" sz="4200" b="1" dirty="0">
                 <a:solidFill>
@@ -2261,7 +2022,7 @@
             </a:lvl1pPr>
           </a:lstStyle>
           <a:p>
-            <a:pPr indent="0" marL="0">
+            <a:pPr marL="0" indent="0">
               <a:buNone/>
             </a:pPr>
             <a:endParaRPr lang="en-US" sz="4200" dirty="0"/>
@@ -2271,9 +2032,11 @@
       <p:sp>
         <p:nvSpPr>
           <p:cNvPr id="3" name="Text 0"/>
-          <p:cNvSpPr/>
+          <p:cNvSpPr>
+            <a:spLocks noGrp="1"/>
+          </p:cNvSpPr>
           <p:nvPr>
-            <p:ph idx="101" type="body" hasCustomPrompt="1"/>
+            <p:ph type="body" idx="101" hasCustomPrompt="1"/>
           </p:nvPr>
         </p:nvSpPr>
         <p:spPr>
@@ -2290,7 +2053,7 @@
         <p:txBody>
           <a:bodyPr wrap="square" rtlCol="0"/>
           <a:lstStyle>
-            <a:lvl1pPr indent="0" marL="0">
+            <a:lvl1pPr marL="0" indent="0">
               <a:buNone/>
               <a:defRPr lang="en-US" sz="1200" b="1" dirty="0">
                 <a:solidFill>
@@ -2300,7 +2063,7 @@
             </a:lvl1pPr>
           </a:lstStyle>
           <a:p>
-            <a:pPr indent="0" marL="0">
+            <a:pPr marL="0" indent="0">
               <a:buNone/>
             </a:pPr>
             <a:endParaRPr lang="en-US" sz="1200" dirty="0"/>
@@ -2310,9 +2073,11 @@
       <p:sp>
         <p:nvSpPr>
           <p:cNvPr id="4" name="Text 0"/>
-          <p:cNvSpPr/>
+          <p:cNvSpPr>
+            <a:spLocks noGrp="1"/>
+          </p:cNvSpPr>
           <p:nvPr>
-            <p:ph idx="102" type="body" hasCustomPrompt="1"/>
+            <p:ph type="body" idx="102" hasCustomPrompt="1"/>
           </p:nvPr>
         </p:nvSpPr>
         <p:spPr>
@@ -2329,7 +2094,7 @@
         <p:txBody>
           <a:bodyPr wrap="square" rtlCol="0"/>
           <a:lstStyle>
-            <a:lvl1pPr indent="0" marL="0">
+            <a:lvl1pPr marL="0" indent="0">
               <a:buNone/>
               <a:defRPr lang="en-US" sz="2200" dirty="0">
                 <a:solidFill>
@@ -2339,7 +2104,7 @@
             </a:lvl1pPr>
           </a:lstStyle>
           <a:p>
-            <a:pPr indent="0" marL="0">
+            <a:pPr marL="0" indent="0">
               <a:buNone/>
             </a:pPr>
             <a:endParaRPr lang="en-US" sz="2200" dirty="0"/>
@@ -2367,7 +2132,7 @@
           <a:bodyPr wrap="square" lIns="0" tIns="0" rIns="0" bIns="0" rtlCol="0" anchor="ctr"/>
           <a:lstStyle/>
           <a:p>
-            <a:pPr indent="0" marL="0">
+            <a:pPr marL="0" indent="0">
               <a:buNone/>
             </a:pPr>
             <a:r>
@@ -2402,7 +2167,7 @@
           </a:prstGeom>
           <a:extLst>
             <a:ext uri="{C572A759-6A51-4108-AA02-DFA0A04FC94B}">
-              <ma14:wrappingTextBoxFlag xmlns:ma14="http://schemas.microsoft.com/office/mac/drawingml/2011/main" val="0"/>
+              <ma14:wrappingTextBoxFlag xmlns:ma14="http://schemas.microsoft.com/office/mac/drawingml/2011/main" xmlns="" val="0"/>
             </a:ext>
           </a:extLst>
         </p:spPr>
@@ -2420,8 +2185,8 @@
           <a:p>
             <a:pPr algn="r"/>
             <a:fld id="{F7021451-1387-4CA6-816F-3879F97B5CBC}" type="slidenum">
-              <a:rPr b="0" lang="en-US"/>
-              <a:t>1002</a:t>
+              <a:rPr lang="en-US" b="0"/>
+              <a:t>‹#›</a:t>
             </a:fld>
             <a:endParaRPr lang="en-US"/>
           </a:p>
@@ -2443,6 +2208,7 @@
         <a:solidFill>
           <a:schemeClr val="bg1"/>
         </a:solidFill>
+        <a:effectLst/>
       </p:bgPr>
     </p:bg>
     <p:spTree>
@@ -2462,9 +2228,11 @@
       <p:sp>
         <p:nvSpPr>
           <p:cNvPr id="2" name="Text 0"/>
-          <p:cNvSpPr/>
+          <p:cNvSpPr>
+            <a:spLocks noGrp="1"/>
+          </p:cNvSpPr>
           <p:nvPr>
-            <p:ph idx="100" type="title" hasCustomPrompt="1"/>
+            <p:ph type="title" idx="100" hasCustomPrompt="1"/>
           </p:nvPr>
         </p:nvSpPr>
         <p:spPr>
@@ -2481,7 +2249,7 @@
         <p:txBody>
           <a:bodyPr wrap="square" rtlCol="0"/>
           <a:lstStyle>
-            <a:lvl1pPr indent="0" marL="0">
+            <a:lvl1pPr marL="0" indent="0">
               <a:buNone/>
               <a:defRPr lang="en-US" sz="3600" b="1" dirty="0">
                 <a:solidFill>
@@ -2494,7 +2262,7 @@
             </a:lvl1pPr>
           </a:lstStyle>
           <a:p>
-            <a:pPr indent="0" marL="0">
+            <a:pPr marL="0" indent="0">
               <a:buNone/>
             </a:pPr>
             <a:endParaRPr lang="en-US" sz="3600" dirty="0"/>
@@ -2504,9 +2272,11 @@
       <p:sp>
         <p:nvSpPr>
           <p:cNvPr id="3" name="Text 0"/>
-          <p:cNvSpPr/>
+          <p:cNvSpPr>
+            <a:spLocks noGrp="1"/>
+          </p:cNvSpPr>
           <p:nvPr>
-            <p:ph idx="101" type="body" hasCustomPrompt="1"/>
+            <p:ph type="body" idx="101" hasCustomPrompt="1"/>
           </p:nvPr>
         </p:nvSpPr>
         <p:spPr>
@@ -2523,7 +2293,7 @@
         <p:txBody>
           <a:bodyPr wrap="square" rtlCol="0"/>
           <a:lstStyle>
-            <a:lvl1pPr indent="0" marL="0">
+            <a:lvl1pPr marL="0" indent="0">
               <a:buNone/>
               <a:defRPr lang="en-US" sz="1200" b="1" dirty="0">
                 <a:solidFill>
@@ -2533,7 +2303,7 @@
             </a:lvl1pPr>
           </a:lstStyle>
           <a:p>
-            <a:pPr indent="0" marL="0">
+            <a:pPr marL="0" indent="0">
               <a:buNone/>
             </a:pPr>
             <a:endParaRPr lang="en-US" sz="1200" dirty="0"/>
@@ -2543,9 +2313,11 @@
       <p:sp>
         <p:nvSpPr>
           <p:cNvPr id="4" name="Text 0"/>
-          <p:cNvSpPr/>
+          <p:cNvSpPr>
+            <a:spLocks noGrp="1"/>
+          </p:cNvSpPr>
           <p:nvPr>
-            <p:ph idx="102" type="body" hasCustomPrompt="1"/>
+            <p:ph type="body" idx="102" hasCustomPrompt="1"/>
           </p:nvPr>
         </p:nvSpPr>
         <p:spPr>
@@ -2562,7 +2334,7 @@
         <p:txBody>
           <a:bodyPr wrap="square" rtlCol="0"/>
           <a:lstStyle>
-            <a:lvl1pPr indent="0" marL="0">
+            <a:lvl1pPr marL="0" indent="0">
               <a:buNone/>
               <a:defRPr lang="en-US" sz="1800" dirty="0">
                 <a:solidFill>
@@ -2572,7 +2344,7 @@
             </a:lvl1pPr>
           </a:lstStyle>
           <a:p>
-            <a:pPr indent="0" marL="0">
+            <a:pPr marL="0" indent="0">
               <a:buNone/>
             </a:pPr>
             <a:endParaRPr lang="en-US" sz="1800" dirty="0"/>
@@ -2600,7 +2372,7 @@
           <a:bodyPr wrap="square" lIns="0" tIns="0" rIns="0" bIns="0" rtlCol="0" anchor="ctr"/>
           <a:lstStyle/>
           <a:p>
-            <a:pPr indent="0" marL="0">
+            <a:pPr marL="0" indent="0">
               <a:buNone/>
             </a:pPr>
             <a:r>
@@ -2635,7 +2407,7 @@
           </a:prstGeom>
           <a:extLst>
             <a:ext uri="{C572A759-6A51-4108-AA02-DFA0A04FC94B}">
-              <ma14:wrappingTextBoxFlag xmlns:ma14="http://schemas.microsoft.com/office/mac/drawingml/2011/main" val="0"/>
+              <ma14:wrappingTextBoxFlag xmlns:ma14="http://schemas.microsoft.com/office/mac/drawingml/2011/main" xmlns="" val="0"/>
             </a:ext>
           </a:extLst>
         </p:spPr>
@@ -2653,8 +2425,8 @@
           <a:p>
             <a:pPr algn="r"/>
             <a:fld id="{F7021451-1387-4CA6-816F-3879F97B5CBC}" type="slidenum">
-              <a:rPr b="0" lang="en-US"/>
-              <a:t>1003</a:t>
+              <a:rPr lang="en-US" b="0"/>
+              <a:t>‹#›</a:t>
             </a:fld>
             <a:endParaRPr lang="en-US"/>
           </a:p>
@@ -2676,6 +2448,7 @@
         <a:solidFill>
           <a:schemeClr val="bg1"/>
         </a:solidFill>
+        <a:effectLst/>
       </p:bgPr>
     </p:bg>
     <p:spTree>
@@ -2695,9 +2468,11 @@
       <p:sp>
         <p:nvSpPr>
           <p:cNvPr id="2" name="Text 0"/>
-          <p:cNvSpPr/>
+          <p:cNvSpPr>
+            <a:spLocks noGrp="1"/>
+          </p:cNvSpPr>
           <p:nvPr>
-            <p:ph idx="100" type="title" hasCustomPrompt="1"/>
+            <p:ph type="title" idx="100" hasCustomPrompt="1"/>
           </p:nvPr>
         </p:nvSpPr>
         <p:spPr>
@@ -2714,7 +2489,7 @@
         <p:txBody>
           <a:bodyPr wrap="square" rtlCol="0"/>
           <a:lstStyle>
-            <a:lvl1pPr indent="0" marL="0">
+            <a:lvl1pPr marL="0" indent="0">
               <a:buNone/>
               <a:defRPr lang="en-US" sz="3600" b="1" dirty="0">
                 <a:solidFill>
@@ -2727,7 +2502,7 @@
             </a:lvl1pPr>
           </a:lstStyle>
           <a:p>
-            <a:pPr indent="0" marL="0">
+            <a:pPr marL="0" indent="0">
               <a:buNone/>
             </a:pPr>
             <a:endParaRPr lang="en-US" sz="3600" dirty="0"/>
@@ -2737,9 +2512,11 @@
       <p:sp>
         <p:nvSpPr>
           <p:cNvPr id="3" name="Text 0"/>
-          <p:cNvSpPr/>
+          <p:cNvSpPr>
+            <a:spLocks noGrp="1"/>
+          </p:cNvSpPr>
           <p:nvPr>
-            <p:ph idx="101" type="body" hasCustomPrompt="1"/>
+            <p:ph type="body" idx="101" hasCustomPrompt="1"/>
           </p:nvPr>
         </p:nvSpPr>
         <p:spPr>
@@ -2756,7 +2533,7 @@
         <p:txBody>
           <a:bodyPr wrap="square" rtlCol="0"/>
           <a:lstStyle>
-            <a:lvl1pPr indent="0" marL="0">
+            <a:lvl1pPr marL="0" indent="0">
               <a:buNone/>
               <a:defRPr lang="en-US" sz="1200" b="1" dirty="0">
                 <a:solidFill>
@@ -2766,7 +2543,7 @@
             </a:lvl1pPr>
           </a:lstStyle>
           <a:p>
-            <a:pPr indent="0" marL="0">
+            <a:pPr marL="0" indent="0">
               <a:buNone/>
             </a:pPr>
             <a:endParaRPr lang="en-US" sz="1200" dirty="0"/>
@@ -2776,9 +2553,11 @@
       <p:sp>
         <p:nvSpPr>
           <p:cNvPr id="4" name="Text 0"/>
-          <p:cNvSpPr/>
+          <p:cNvSpPr>
+            <a:spLocks noGrp="1"/>
+          </p:cNvSpPr>
           <p:nvPr>
-            <p:ph idx="102" type="body" hasCustomPrompt="1"/>
+            <p:ph type="body" idx="102" hasCustomPrompt="1"/>
           </p:nvPr>
         </p:nvSpPr>
         <p:spPr>
@@ -2795,7 +2574,7 @@
         <p:txBody>
           <a:bodyPr wrap="square" rtlCol="0"/>
           <a:lstStyle>
-            <a:lvl1pPr indent="0" marL="0">
+            <a:lvl1pPr marL="0" indent="0">
               <a:buNone/>
               <a:defRPr lang="en-US" sz="1800" dirty="0">
                 <a:solidFill>
@@ -2805,7 +2584,7 @@
             </a:lvl1pPr>
           </a:lstStyle>
           <a:p>
-            <a:pPr indent="0" marL="0">
+            <a:pPr marL="0" indent="0">
               <a:buNone/>
             </a:pPr>
             <a:endParaRPr lang="en-US" sz="1800" dirty="0"/>
@@ -2833,7 +2612,7 @@
           <a:bodyPr wrap="square" lIns="0" tIns="0" rIns="0" bIns="0" rtlCol="0" anchor="ctr"/>
           <a:lstStyle/>
           <a:p>
-            <a:pPr indent="0" marL="0">
+            <a:pPr marL="0" indent="0">
               <a:buNone/>
             </a:pPr>
             <a:r>
@@ -2868,7 +2647,7 @@
           </a:prstGeom>
           <a:extLst>
             <a:ext uri="{C572A759-6A51-4108-AA02-DFA0A04FC94B}">
-              <ma14:wrappingTextBoxFlag xmlns:ma14="http://schemas.microsoft.com/office/mac/drawingml/2011/main" val="0"/>
+              <ma14:wrappingTextBoxFlag xmlns:ma14="http://schemas.microsoft.com/office/mac/drawingml/2011/main" xmlns="" val="0"/>
             </a:ext>
           </a:extLst>
         </p:spPr>
@@ -2886,8 +2665,8 @@
           <a:p>
             <a:pPr algn="r"/>
             <a:fld id="{F7021451-1387-4CA6-816F-3879F97B5CBC}" type="slidenum">
-              <a:rPr b="0" lang="en-US"/>
-              <a:t>1004</a:t>
+              <a:rPr lang="en-US" b="0"/>
+              <a:t>‹#›</a:t>
             </a:fld>
             <a:endParaRPr lang="en-US"/>
           </a:p>
@@ -2909,6 +2688,7 @@
         <a:solidFill>
           <a:schemeClr val="bg1"/>
         </a:solidFill>
+        <a:effectLst/>
       </p:bgPr>
     </p:bg>
     <p:spTree>
@@ -2928,9 +2708,11 @@
       <p:sp>
         <p:nvSpPr>
           <p:cNvPr id="2" name="Text 0"/>
-          <p:cNvSpPr/>
+          <p:cNvSpPr>
+            <a:spLocks noGrp="1"/>
+          </p:cNvSpPr>
           <p:nvPr>
-            <p:ph idx="100" type="title" hasCustomPrompt="1"/>
+            <p:ph type="title" idx="100" hasCustomPrompt="1"/>
           </p:nvPr>
         </p:nvSpPr>
         <p:spPr>
@@ -2947,7 +2729,7 @@
         <p:txBody>
           <a:bodyPr wrap="square" rtlCol="0"/>
           <a:lstStyle>
-            <a:lvl1pPr indent="0" marL="0">
+            <a:lvl1pPr marL="0" indent="0">
               <a:buNone/>
               <a:defRPr lang="en-US" sz="3600" b="1" dirty="0">
                 <a:solidFill>
@@ -2960,7 +2742,7 @@
             </a:lvl1pPr>
           </a:lstStyle>
           <a:p>
-            <a:pPr indent="0" marL="0">
+            <a:pPr marL="0" indent="0">
               <a:buNone/>
             </a:pPr>
             <a:endParaRPr lang="en-US" sz="3600" dirty="0"/>
@@ -2970,9 +2752,11 @@
       <p:sp>
         <p:nvSpPr>
           <p:cNvPr id="3" name="Text 0"/>
-          <p:cNvSpPr/>
+          <p:cNvSpPr>
+            <a:spLocks noGrp="1"/>
+          </p:cNvSpPr>
           <p:nvPr>
-            <p:ph idx="101" type="body" hasCustomPrompt="1"/>
+            <p:ph type="body" idx="101" hasCustomPrompt="1"/>
           </p:nvPr>
         </p:nvSpPr>
         <p:spPr>
@@ -2989,7 +2773,7 @@
         <p:txBody>
           <a:bodyPr wrap="square" rtlCol="0"/>
           <a:lstStyle>
-            <a:lvl1pPr indent="0" marL="0">
+            <a:lvl1pPr marL="0" indent="0">
               <a:buNone/>
               <a:defRPr lang="en-US" sz="1200" b="1" dirty="0">
                 <a:solidFill>
@@ -2999,7 +2783,7 @@
             </a:lvl1pPr>
           </a:lstStyle>
           <a:p>
-            <a:pPr indent="0" marL="0">
+            <a:pPr marL="0" indent="0">
               <a:buNone/>
             </a:pPr>
             <a:endParaRPr lang="en-US" sz="1200" dirty="0"/>
@@ -3009,9 +2793,11 @@
       <p:sp>
         <p:nvSpPr>
           <p:cNvPr id="4" name="Text 0"/>
-          <p:cNvSpPr/>
+          <p:cNvSpPr>
+            <a:spLocks noGrp="1"/>
+          </p:cNvSpPr>
           <p:nvPr>
-            <p:ph idx="102" type="body" hasCustomPrompt="1"/>
+            <p:ph type="body" idx="102" hasCustomPrompt="1"/>
           </p:nvPr>
         </p:nvSpPr>
         <p:spPr>
@@ -3028,7 +2814,7 @@
         <p:txBody>
           <a:bodyPr wrap="square" rtlCol="0"/>
           <a:lstStyle>
-            <a:lvl1pPr indent="0" marL="0">
+            <a:lvl1pPr marL="0" indent="0">
               <a:buNone/>
               <a:defRPr lang="en-US" sz="1800" dirty="0">
                 <a:solidFill>
@@ -3038,7 +2824,7 @@
             </a:lvl1pPr>
           </a:lstStyle>
           <a:p>
-            <a:pPr indent="0" marL="0">
+            <a:pPr marL="0" indent="0">
               <a:buNone/>
             </a:pPr>
             <a:endParaRPr lang="en-US" sz="1800" dirty="0"/>
@@ -3066,7 +2852,7 @@
           <a:bodyPr wrap="square" lIns="0" tIns="0" rIns="0" bIns="0" rtlCol="0" anchor="ctr"/>
           <a:lstStyle/>
           <a:p>
-            <a:pPr indent="0" marL="0">
+            <a:pPr marL="0" indent="0">
               <a:buNone/>
             </a:pPr>
             <a:r>
@@ -3101,7 +2887,7 @@
           </a:prstGeom>
           <a:extLst>
             <a:ext uri="{C572A759-6A51-4108-AA02-DFA0A04FC94B}">
-              <ma14:wrappingTextBoxFlag xmlns:ma14="http://schemas.microsoft.com/office/mac/drawingml/2011/main" val="0"/>
+              <ma14:wrappingTextBoxFlag xmlns:ma14="http://schemas.microsoft.com/office/mac/drawingml/2011/main" xmlns="" val="0"/>
             </a:ext>
           </a:extLst>
         </p:spPr>
@@ -3119,8 +2905,8 @@
           <a:p>
             <a:pPr algn="r"/>
             <a:fld id="{F7021451-1387-4CA6-816F-3879F97B5CBC}" type="slidenum">
-              <a:rPr b="0" lang="en-US"/>
-              <a:t>1005</a:t>
+              <a:rPr lang="en-US" b="0"/>
+              <a:t>‹#›</a:t>
             </a:fld>
             <a:endParaRPr lang="en-US"/>
           </a:p>
@@ -3142,6 +2928,7 @@
         <a:solidFill>
           <a:schemeClr val="bg1"/>
         </a:solidFill>
+        <a:effectLst/>
       </p:bgPr>
     </p:bg>
     <p:spTree>
@@ -3161,9 +2948,11 @@
       <p:sp>
         <p:nvSpPr>
           <p:cNvPr id="2" name="Text 0"/>
-          <p:cNvSpPr/>
+          <p:cNvSpPr>
+            <a:spLocks noGrp="1"/>
+          </p:cNvSpPr>
           <p:nvPr>
-            <p:ph idx="100" type="title" hasCustomPrompt="1"/>
+            <p:ph type="title" idx="100" hasCustomPrompt="1"/>
           </p:nvPr>
         </p:nvSpPr>
         <p:spPr>
@@ -3180,7 +2969,7 @@
         <p:txBody>
           <a:bodyPr wrap="square" rtlCol="0"/>
           <a:lstStyle>
-            <a:lvl1pPr indent="0" marL="0">
+            <a:lvl1pPr marL="0" indent="0">
               <a:buNone/>
               <a:defRPr lang="en-US" sz="3600" b="1" dirty="0">
                 <a:solidFill>
@@ -3193,7 +2982,7 @@
             </a:lvl1pPr>
           </a:lstStyle>
           <a:p>
-            <a:pPr indent="0" marL="0">
+            <a:pPr marL="0" indent="0">
               <a:buNone/>
             </a:pPr>
             <a:endParaRPr lang="en-US" sz="3600" dirty="0"/>
@@ -3203,9 +2992,11 @@
       <p:sp>
         <p:nvSpPr>
           <p:cNvPr id="3" name="Text 0"/>
-          <p:cNvSpPr/>
+          <p:cNvSpPr>
+            <a:spLocks noGrp="1"/>
+          </p:cNvSpPr>
           <p:nvPr>
-            <p:ph idx="101" type="body" hasCustomPrompt="1"/>
+            <p:ph type="body" idx="101" hasCustomPrompt="1"/>
           </p:nvPr>
         </p:nvSpPr>
         <p:spPr>
@@ -3222,7 +3013,7 @@
         <p:txBody>
           <a:bodyPr wrap="square" rtlCol="0"/>
           <a:lstStyle>
-            <a:lvl1pPr indent="0" marL="0">
+            <a:lvl1pPr marL="0" indent="0">
               <a:buNone/>
               <a:defRPr lang="en-US" sz="1200" b="1" dirty="0">
                 <a:solidFill>
@@ -3232,7 +3023,7 @@
             </a:lvl1pPr>
           </a:lstStyle>
           <a:p>
-            <a:pPr indent="0" marL="0">
+            <a:pPr marL="0" indent="0">
               <a:buNone/>
             </a:pPr>
             <a:endParaRPr lang="en-US" sz="1200" dirty="0"/>
@@ -3242,9 +3033,11 @@
       <p:sp>
         <p:nvSpPr>
           <p:cNvPr id="4" name="Text 0"/>
-          <p:cNvSpPr/>
+          <p:cNvSpPr>
+            <a:spLocks noGrp="1"/>
+          </p:cNvSpPr>
           <p:nvPr>
-            <p:ph idx="102" type="body" hasCustomPrompt="1"/>
+            <p:ph type="body" idx="102" hasCustomPrompt="1"/>
           </p:nvPr>
         </p:nvSpPr>
         <p:spPr>
@@ -3261,7 +3054,7 @@
         <p:txBody>
           <a:bodyPr wrap="square" rtlCol="0"/>
           <a:lstStyle>
-            <a:lvl1pPr indent="0" marL="0">
+            <a:lvl1pPr marL="0" indent="0">
               <a:buNone/>
               <a:defRPr lang="en-US" sz="1800" dirty="0">
                 <a:solidFill>
@@ -3271,7 +3064,7 @@
             </a:lvl1pPr>
           </a:lstStyle>
           <a:p>
-            <a:pPr indent="0" marL="0">
+            <a:pPr marL="0" indent="0">
               <a:buNone/>
             </a:pPr>
             <a:endParaRPr lang="en-US" sz="1800" dirty="0"/>
@@ -3299,7 +3092,7 @@
           <a:bodyPr wrap="square" lIns="0" tIns="0" rIns="0" bIns="0" rtlCol="0" anchor="ctr"/>
           <a:lstStyle/>
           <a:p>
-            <a:pPr indent="0" marL="0">
+            <a:pPr marL="0" indent="0">
               <a:buNone/>
             </a:pPr>
             <a:r>
@@ -3334,7 +3127,7 @@
           </a:prstGeom>
           <a:extLst>
             <a:ext uri="{C572A759-6A51-4108-AA02-DFA0A04FC94B}">
-              <ma14:wrappingTextBoxFlag xmlns:ma14="http://schemas.microsoft.com/office/mac/drawingml/2011/main" val="0"/>
+              <ma14:wrappingTextBoxFlag xmlns:ma14="http://schemas.microsoft.com/office/mac/drawingml/2011/main" xmlns="" val="0"/>
             </a:ext>
           </a:extLst>
         </p:spPr>
@@ -3352,8 +3145,8 @@
           <a:p>
             <a:pPr algn="r"/>
             <a:fld id="{F7021451-1387-4CA6-816F-3879F97B5CBC}" type="slidenum">
-              <a:rPr b="0" lang="en-US"/>
-              <a:t>1006</a:t>
+              <a:rPr lang="en-US" b="0"/>
+              <a:t>‹#›</a:t>
             </a:fld>
             <a:endParaRPr lang="en-US"/>
           </a:p>
@@ -3375,6 +3168,7 @@
         <a:solidFill>
           <a:schemeClr val="tx1"/>
         </a:solidFill>
+        <a:effectLst/>
       </p:bgPr>
     </p:bg>
     <p:spTree>
@@ -3394,9 +3188,11 @@
       <p:sp>
         <p:nvSpPr>
           <p:cNvPr id="2" name="Text 0"/>
-          <p:cNvSpPr/>
+          <p:cNvSpPr>
+            <a:spLocks noGrp="1"/>
+          </p:cNvSpPr>
           <p:nvPr>
-            <p:ph idx="100" type="title" hasCustomPrompt="1"/>
+            <p:ph type="title" idx="100" hasCustomPrompt="1"/>
           </p:nvPr>
         </p:nvSpPr>
         <p:spPr>
@@ -3413,7 +3209,7 @@
         <p:txBody>
           <a:bodyPr wrap="square" rtlCol="0"/>
           <a:lstStyle>
-            <a:lvl1pPr indent="0" marL="0">
+            <a:lvl1pPr marL="0" indent="0">
               <a:buNone/>
               <a:defRPr lang="en-US" sz="3600" b="1" dirty="0">
                 <a:solidFill>
@@ -3426,7 +3222,7 @@
             </a:lvl1pPr>
           </a:lstStyle>
           <a:p>
-            <a:pPr indent="0" marL="0">
+            <a:pPr marL="0" indent="0">
               <a:buNone/>
             </a:pPr>
             <a:endParaRPr lang="en-US" sz="3600" dirty="0"/>
@@ -3436,9 +3232,11 @@
       <p:sp>
         <p:nvSpPr>
           <p:cNvPr id="3" name="Text 0"/>
-          <p:cNvSpPr/>
+          <p:cNvSpPr>
+            <a:spLocks noGrp="1"/>
+          </p:cNvSpPr>
           <p:nvPr>
-            <p:ph idx="101" type="body" hasCustomPrompt="1"/>
+            <p:ph type="body" idx="101" hasCustomPrompt="1"/>
           </p:nvPr>
         </p:nvSpPr>
         <p:spPr>
@@ -3455,7 +3253,7 @@
         <p:txBody>
           <a:bodyPr wrap="square" rtlCol="0"/>
           <a:lstStyle>
-            <a:lvl1pPr indent="0" marL="0">
+            <a:lvl1pPr marL="0" indent="0">
               <a:buNone/>
               <a:defRPr lang="en-US" sz="1200" b="1" dirty="0">
                 <a:solidFill>
@@ -3465,7 +3263,7 @@
             </a:lvl1pPr>
           </a:lstStyle>
           <a:p>
-            <a:pPr indent="0" marL="0">
+            <a:pPr marL="0" indent="0">
               <a:buNone/>
             </a:pPr>
             <a:endParaRPr lang="en-US" sz="1200" dirty="0"/>
@@ -3475,9 +3273,11 @@
       <p:sp>
         <p:nvSpPr>
           <p:cNvPr id="4" name="Text 0"/>
-          <p:cNvSpPr/>
+          <p:cNvSpPr>
+            <a:spLocks noGrp="1"/>
+          </p:cNvSpPr>
           <p:nvPr>
-            <p:ph idx="102" type="body" hasCustomPrompt="1"/>
+            <p:ph type="body" idx="102" hasCustomPrompt="1"/>
           </p:nvPr>
         </p:nvSpPr>
         <p:spPr>
@@ -3494,7 +3294,7 @@
         <p:txBody>
           <a:bodyPr wrap="square" rtlCol="0"/>
           <a:lstStyle>
-            <a:lvl1pPr indent="0" marL="0">
+            <a:lvl1pPr marL="0" indent="0">
               <a:buNone/>
               <a:defRPr lang="en-US" sz="1800" dirty="0">
                 <a:solidFill>
@@ -3504,7 +3304,7 @@
             </a:lvl1pPr>
           </a:lstStyle>
           <a:p>
-            <a:pPr indent="0" marL="0">
+            <a:pPr marL="0" indent="0">
               <a:buNone/>
             </a:pPr>
             <a:endParaRPr lang="en-US" sz="1800" dirty="0"/>
@@ -3532,7 +3332,7 @@
           <a:bodyPr wrap="square" lIns="0" tIns="0" rIns="0" bIns="0" rtlCol="0" anchor="ctr"/>
           <a:lstStyle/>
           <a:p>
-            <a:pPr indent="0" marL="0">
+            <a:pPr marL="0" indent="0">
               <a:buNone/>
             </a:pPr>
             <a:r>
@@ -3567,7 +3367,7 @@
           </a:prstGeom>
           <a:extLst>
             <a:ext uri="{C572A759-6A51-4108-AA02-DFA0A04FC94B}">
-              <ma14:wrappingTextBoxFlag xmlns:ma14="http://schemas.microsoft.com/office/mac/drawingml/2011/main" val="0"/>
+              <ma14:wrappingTextBoxFlag xmlns:ma14="http://schemas.microsoft.com/office/mac/drawingml/2011/main" xmlns="" val="0"/>
             </a:ext>
           </a:extLst>
         </p:spPr>
@@ -3585,8 +3385,8 @@
           <a:p>
             <a:pPr algn="r"/>
             <a:fld id="{F7021451-1387-4CA6-816F-3879F97B5CBC}" type="slidenum">
-              <a:rPr b="0" lang="en-US"/>
-              <a:t>1007</a:t>
+              <a:rPr lang="en-US" b="0"/>
+              <a:t>‹#›</a:t>
             </a:fld>
             <a:endParaRPr lang="en-US"/>
           </a:p>
@@ -3603,6 +3403,11 @@
 <file path=ppt/slideMasters/slideMaster1.xml><?xml version="1.0" encoding="utf-8"?>
 <p:sldMaster xmlns:a="http://schemas.openxmlformats.org/drawingml/2006/main" xmlns:r="http://schemas.openxmlformats.org/officeDocument/2006/relationships" xmlns:p="http://schemas.openxmlformats.org/presentationml/2006/main">
   <p:cSld>
+    <p:bg>
+      <p:bgRef idx="1001">
+        <a:schemeClr val="bg1"/>
+      </p:bgRef>
+    </p:bg>
     <p:spTree>
       <p:nvGrpSpPr>
         <p:cNvPr id="1" name=""/>
@@ -3637,7 +3442,7 @@
           </a:prstGeom>
           <a:extLst>
             <a:ext uri="{C572A759-6A51-4108-AA02-DFA0A04FC94B}">
-              <ma14:wrappingTextBoxFlag xmlns:ma14="http://schemas.microsoft.com/office/mac/drawingml/2011/main" val="0"/>
+              <ma14:wrappingTextBoxFlag xmlns:ma14="http://schemas.microsoft.com/office/mac/drawingml/2011/main" xmlns="" val="0"/>
             </a:ext>
           </a:extLst>
         </p:spPr>
@@ -3655,8 +3460,8 @@
           <a:p>
             <a:pPr algn="r"/>
             <a:fld id="{F7021451-1387-4CA6-816F-3879F97B5CBC}" type="slidenum">
-              <a:rPr b="0" lang="en-US"/>
-              <a:t>null</a:t>
+              <a:rPr lang="en-US" b="0"/>
+              <a:t>‹#›</a:t>
             </a:fld>
             <a:endParaRPr lang="en-US"/>
           </a:p>
@@ -3948,9 +3753,11 @@
       <p:sp>
         <p:nvSpPr>
           <p:cNvPr id="2" name="Text 0"/>
-          <p:cNvSpPr/>
+          <p:cNvSpPr>
+            <a:spLocks noGrp="1"/>
+          </p:cNvSpPr>
           <p:nvPr>
-            <p:ph idx="100" type="title" hasCustomPrompt="1"/>
+            <p:ph type="title" idx="100" hasCustomPrompt="1"/>
           </p:nvPr>
         </p:nvSpPr>
         <p:spPr>
@@ -3968,7 +3775,7 @@
           <a:bodyPr wrap="square" lIns="0" tIns="0" rIns="0" bIns="0" rtlCol="0" anchor="ctr"/>
           <a:lstStyle/>
           <a:p>
-            <a:pPr indent="0" marL="0">
+            <a:pPr marL="0" indent="0">
               <a:buNone/>
             </a:pPr>
             <a:r>
@@ -3985,7 +3792,7 @@
             <a:endParaRPr lang="en-US" sz="4200" dirty="0"/>
           </a:p>
           <a:p>
-            <a:pPr indent="0" marL="0">
+            <a:pPr marL="0" indent="0">
               <a:buNone/>
             </a:pPr>
             <a:r>
@@ -4006,9 +3813,11 @@
       <p:sp>
         <p:nvSpPr>
           <p:cNvPr id="3" name="Text 0"/>
-          <p:cNvSpPr/>
+          <p:cNvSpPr>
+            <a:spLocks noGrp="1"/>
+          </p:cNvSpPr>
           <p:nvPr>
-            <p:ph idx="101" type="body" hasCustomPrompt="1"/>
+            <p:ph type="body" idx="101" hasCustomPrompt="1"/>
           </p:nvPr>
         </p:nvSpPr>
         <p:spPr>
@@ -4026,7 +3835,7 @@
           <a:bodyPr wrap="square" lIns="0" tIns="0" rIns="0" bIns="0" rtlCol="0" anchor="ctr"/>
           <a:lstStyle/>
           <a:p>
-            <a:pPr indent="0" marL="0">
+            <a:pPr marL="0" indent="0">
               <a:buNone/>
             </a:pPr>
             <a:r>
@@ -4044,9 +3853,11 @@
       <p:sp>
         <p:nvSpPr>
           <p:cNvPr id="4" name="Text 0"/>
-          <p:cNvSpPr/>
+          <p:cNvSpPr>
+            <a:spLocks noGrp="1"/>
+          </p:cNvSpPr>
           <p:nvPr>
-            <p:ph idx="102" type="body" hasCustomPrompt="1"/>
+            <p:ph type="body" idx="102" hasCustomPrompt="1"/>
           </p:nvPr>
         </p:nvSpPr>
         <p:spPr>
@@ -4064,7 +3875,7 @@
           <a:bodyPr wrap="square" lIns="0" tIns="0" rIns="0" bIns="0" rtlCol="0" anchor="ctr"/>
           <a:lstStyle/>
           <a:p>
-            <a:pPr indent="0" marL="0">
+            <a:pPr marL="0" indent="0">
               <a:buNone/>
             </a:pPr>
             <a:r>
@@ -4078,7 +3889,7 @@
             <a:endParaRPr lang="en-US" sz="2200" dirty="0"/>
           </a:p>
           <a:p>
-            <a:pPr indent="0" marL="0">
+            <a:pPr marL="0" indent="0">
               <a:buNone/>
             </a:pPr>
             <a:r>
@@ -4090,48 +3901,6 @@
               <a:t>Bổ sung thư viện Cloud riêng tư trên Web / Android.</a:t>
             </a:r>
             <a:endParaRPr lang="en-US" sz="2200" dirty="0"/>
-          </a:p>
-        </p:txBody>
-      </p:sp>
-      <p:sp>
-        <p:nvSpPr>
-          <p:cNvPr id="5" name="Text 1: Nguồn: F1 · F2 | URL đầy đủ trong ghi chú và slide 18"/>
-          <p:cNvSpPr txBox="1"/>
-          <p:nvPr/>
-        </p:nvSpPr>
-        <p:spPr>
-          <a:xfrm>
-            <a:off x="571500" y="5886450"/>
-            <a:ext cx="11087100" cy="228600"/>
-          </a:xfrm>
-          <a:prstGeom prst="rect">
-            <a:avLst/>
-          </a:prstGeom>
-          <a:noFill/>
-          <a:ln/>
-        </p:spPr>
-        <p:txBody>
-          <a:bodyPr wrap="square" lIns="0" tIns="0" rIns="0" bIns="0" rtlCol="0" anchor="t"/>
-          <a:lstStyle/>
-          <a:p>
-            <a:pPr indent="0" marL="0">
-              <a:lnSpc>
-                <a:spcPct val="106000"/>
-              </a:lnSpc>
-              <a:buNone/>
-            </a:pPr>
-            <a:r>
-              <a:rPr lang="en-US" sz="1200" dirty="0">
-                <a:solidFill>
-                  <a:schemeClr val="accent6"/>
-                </a:solidFill>
-                <a:latin typeface="+mn-lt" pitchFamily="34" charset="0"/>
-                <a:ea typeface="+mn-lt" pitchFamily="34" charset="-122"/>
-                <a:cs typeface="+mn-lt" pitchFamily="34" charset="-120"/>
-              </a:rPr>
-              <a:t>Nguồn: F1 · F2 | URL đầy đủ trong ghi chú và slide 18</a:t>
-            </a:r>
-            <a:endParaRPr lang="en-US" sz="1200" dirty="0"/>
           </a:p>
         </p:txBody>
       </p:sp>
@@ -4183,7 +3952,7 @@
           <a:bodyPr wrap="square" lIns="0" tIns="0" rIns="0" bIns="0" rtlCol="0" anchor="ctr"/>
           <a:lstStyle/>
           <a:p>
-            <a:pPr algn="ctr" indent="0" marL="0">
+            <a:pPr marL="0" indent="0" algn="ctr">
               <a:lnSpc>
                 <a:spcPct val="106000"/>
               </a:lnSpc>
@@ -4252,7 +4021,7 @@
           <a:bodyPr wrap="square" lIns="0" tIns="0" rIns="0" bIns="0" rtlCol="0" anchor="ctr"/>
           <a:lstStyle/>
           <a:p>
-            <a:pPr algn="ctr" indent="0" marL="0">
+            <a:pPr marL="0" indent="0" algn="ctr">
               <a:lnSpc>
                 <a:spcPct val="106000"/>
               </a:lnSpc>
@@ -4321,7 +4090,7 @@
           <a:bodyPr wrap="square" lIns="0" tIns="0" rIns="0" bIns="0" rtlCol="0" anchor="ctr"/>
           <a:lstStyle/>
           <a:p>
-            <a:pPr algn="ctr" indent="0" marL="0">
+            <a:pPr marL="0" indent="0" algn="ctr">
               <a:lnSpc>
                 <a:spcPct val="106000"/>
               </a:lnSpc>
@@ -4390,7 +4159,7 @@
           <a:bodyPr wrap="square" lIns="0" tIns="0" rIns="0" bIns="0" rtlCol="0" anchor="ctr"/>
           <a:lstStyle/>
           <a:p>
-            <a:pPr algn="ctr" indent="0" marL="0">
+            <a:pPr marL="0" indent="0" algn="ctr">
               <a:lnSpc>
                 <a:spcPct val="106000"/>
               </a:lnSpc>
@@ -4459,7 +4228,7 @@
           <a:bodyPr wrap="square" lIns="0" tIns="0" rIns="0" bIns="0" rtlCol="0" anchor="t"/>
           <a:lstStyle/>
           <a:p>
-            <a:pPr indent="0" marL="0">
+            <a:pPr marL="0" indent="0">
               <a:lnSpc>
                 <a:spcPct val="106000"/>
               </a:lnSpc>
@@ -4501,7 +4270,7 @@
           <a:bodyPr wrap="square" lIns="0" tIns="0" rIns="0" bIns="0" rtlCol="0" anchor="t"/>
           <a:lstStyle/>
           <a:p>
-            <a:pPr indent="0" marL="0">
+            <a:pPr marL="0" indent="0">
               <a:lnSpc>
                 <a:spcPct val="106000"/>
               </a:lnSpc>
@@ -4543,7 +4312,7 @@
           <a:bodyPr wrap="square" lIns="0" tIns="0" rIns="0" bIns="0" rtlCol="0" anchor="t"/>
           <a:lstStyle/>
           <a:p>
-            <a:pPr indent="0" marL="0">
+            <a:pPr marL="0" indent="0">
               <a:lnSpc>
                 <a:spcPct val="106000"/>
               </a:lnSpc>
@@ -4612,7 +4381,7 @@
           <a:bodyPr wrap="square" lIns="0" tIns="0" rIns="0" bIns="0" rtlCol="0" anchor="t"/>
           <a:lstStyle/>
           <a:p>
-            <a:pPr indent="0" marL="0">
+            <a:pPr marL="0" indent="0">
               <a:lnSpc>
                 <a:spcPct val="106000"/>
               </a:lnSpc>
@@ -4654,7 +4423,7 @@
           <a:bodyPr wrap="square" lIns="0" tIns="0" rIns="0" bIns="0" rtlCol="0" anchor="t"/>
           <a:lstStyle/>
           <a:p>
-            <a:pPr indent="0" marL="0">
+            <a:pPr marL="0" indent="0">
               <a:lnSpc>
                 <a:spcPct val="106000"/>
               </a:lnSpc>
@@ -4696,7 +4465,7 @@
           <a:bodyPr wrap="square" lIns="0" tIns="0" rIns="0" bIns="0" rtlCol="0" anchor="t"/>
           <a:lstStyle/>
           <a:p>
-            <a:pPr indent="0" marL="0">
+            <a:pPr marL="0" indent="0">
               <a:lnSpc>
                 <a:spcPct val="106000"/>
               </a:lnSpc>
@@ -4737,7 +4506,7 @@
           </a:prstGeom>
           <a:extLst>
             <a:ext uri="{C572A759-6A51-4108-AA02-DFA0A04FC94B}">
-              <ma14:wrappingTextBoxFlag xmlns:ma14="http://schemas.microsoft.com/office/mac/drawingml/2011/main" val="0"/>
+              <ma14:wrappingTextBoxFlag xmlns:ma14="http://schemas.microsoft.com/office/mac/drawingml/2011/main" xmlns="" val="0"/>
             </a:ext>
           </a:extLst>
         </p:spPr>
@@ -4755,7 +4524,7 @@
           <a:p>
             <a:pPr algn="r"/>
             <a:fld id="{F7021451-1387-4CA6-816F-3879F97B5CBC}" type="slidenum">
-              <a:rPr b="0" lang="en-US"/>
+              <a:rPr lang="en-US" b="0"/>
               <a:t>1</a:t>
             </a:fld>
             <a:endParaRPr lang="en-US"/>
@@ -4790,9 +4559,11 @@
       <p:sp>
         <p:nvSpPr>
           <p:cNvPr id="2" name="Text 0"/>
-          <p:cNvSpPr/>
+          <p:cNvSpPr>
+            <a:spLocks noGrp="1"/>
+          </p:cNvSpPr>
           <p:nvPr>
-            <p:ph idx="100" type="title" hasCustomPrompt="1"/>
+            <p:ph type="title" idx="100" hasCustomPrompt="1"/>
           </p:nvPr>
         </p:nvSpPr>
         <p:spPr>
@@ -4810,7 +4581,7 @@
           <a:bodyPr wrap="square" lIns="0" tIns="0" rIns="0" bIns="0" rtlCol="0" anchor="ctr"/>
           <a:lstStyle/>
           <a:p>
-            <a:pPr indent="0" marL="0">
+            <a:pPr marL="0" indent="0">
               <a:buNone/>
             </a:pPr>
             <a:r>
@@ -4831,9 +4602,11 @@
       <p:sp>
         <p:nvSpPr>
           <p:cNvPr id="3" name="Text 0"/>
-          <p:cNvSpPr/>
+          <p:cNvSpPr>
+            <a:spLocks noGrp="1"/>
+          </p:cNvSpPr>
           <p:nvPr>
-            <p:ph idx="101" type="body" hasCustomPrompt="1"/>
+            <p:ph type="body" idx="101" hasCustomPrompt="1"/>
           </p:nvPr>
         </p:nvSpPr>
         <p:spPr>
@@ -4851,7 +4624,7 @@
           <a:bodyPr wrap="square" lIns="0" tIns="0" rIns="0" bIns="0" rtlCol="0" anchor="ctr"/>
           <a:lstStyle/>
           <a:p>
-            <a:pPr indent="0" marL="0">
+            <a:pPr marL="0" indent="0">
               <a:buNone/>
             </a:pPr>
             <a:r>
@@ -4869,9 +4642,11 @@
       <p:sp>
         <p:nvSpPr>
           <p:cNvPr id="4" name="Text 0"/>
-          <p:cNvSpPr/>
+          <p:cNvSpPr>
+            <a:spLocks noGrp="1"/>
+          </p:cNvSpPr>
           <p:nvPr>
-            <p:ph idx="102" type="body" hasCustomPrompt="1"/>
+            <p:ph type="body" idx="102" hasCustomPrompt="1"/>
           </p:nvPr>
         </p:nvSpPr>
         <p:spPr>
@@ -4889,7 +4664,7 @@
           <a:bodyPr wrap="square" lIns="0" tIns="0" rIns="0" bIns="0" rtlCol="0" anchor="ctr"/>
           <a:lstStyle/>
           <a:p>
-            <a:pPr indent="0" marL="0">
+            <a:pPr marL="0" indent="0">
               <a:buNone/>
             </a:pPr>
             <a:r>
@@ -4979,7 +4754,7 @@
           <a:bodyPr wrap="square" lIns="0" tIns="0" rIns="0" bIns="0" rtlCol="0" anchor="t"/>
           <a:lstStyle/>
           <a:p>
-            <a:pPr indent="0" marL="0">
+            <a:pPr marL="0" indent="0">
               <a:lnSpc>
                 <a:spcPct val="106000"/>
               </a:lnSpc>
@@ -5021,7 +4796,7 @@
           <a:bodyPr wrap="square" lIns="0" tIns="0" rIns="0" bIns="0" rtlCol="0" anchor="t"/>
           <a:lstStyle/>
           <a:p>
-            <a:pPr indent="0" marL="0">
+            <a:pPr marL="0" indent="0">
               <a:lnSpc>
                 <a:spcPct val="106000"/>
               </a:lnSpc>
@@ -5063,7 +4838,7 @@
           <a:bodyPr wrap="square" lIns="0" tIns="0" rIns="0" bIns="0" rtlCol="0" anchor="t"/>
           <a:lstStyle/>
           <a:p>
-            <a:pPr indent="0" marL="0">
+            <a:pPr marL="0" indent="0">
               <a:lnSpc>
                 <a:spcPct val="106000"/>
               </a:lnSpc>
@@ -5083,7 +4858,7 @@
             <a:endParaRPr lang="en-US" sz="2000" dirty="0"/>
           </a:p>
           <a:p>
-            <a:pPr indent="0" marL="0">
+            <a:pPr marL="0" indent="0">
               <a:lnSpc>
                 <a:spcPct val="106000"/>
               </a:lnSpc>
@@ -5103,7 +4878,7 @@
             <a:endParaRPr lang="en-US" sz="2000" dirty="0"/>
           </a:p>
           <a:p>
-            <a:pPr indent="0" marL="0">
+            <a:pPr marL="0" indent="0">
               <a:lnSpc>
                 <a:spcPct val="106000"/>
               </a:lnSpc>
@@ -5145,7 +4920,7 @@
           <a:bodyPr wrap="square" lIns="0" tIns="0" rIns="0" bIns="0" rtlCol="0" anchor="t"/>
           <a:lstStyle/>
           <a:p>
-            <a:pPr indent="0" marL="0">
+            <a:pPr marL="0" indent="0">
               <a:lnSpc>
                 <a:spcPct val="106000"/>
               </a:lnSpc>
@@ -5187,7 +4962,7 @@
           <a:bodyPr wrap="square" lIns="0" tIns="0" rIns="0" bIns="0" rtlCol="0" anchor="t"/>
           <a:lstStyle/>
           <a:p>
-            <a:pPr indent="0" marL="0">
+            <a:pPr marL="0" indent="0">
               <a:lnSpc>
                 <a:spcPct val="106000"/>
               </a:lnSpc>
@@ -5207,7 +4982,7 @@
             <a:endParaRPr lang="en-US" sz="1800" dirty="0"/>
           </a:p>
           <a:p>
-            <a:pPr indent="0" marL="0">
+            <a:pPr marL="0" indent="0">
               <a:lnSpc>
                 <a:spcPct val="106000"/>
               </a:lnSpc>
@@ -5249,7 +5024,7 @@
           <a:bodyPr wrap="square" lIns="0" tIns="0" rIns="0" bIns="0" rtlCol="0" anchor="t"/>
           <a:lstStyle/>
           <a:p>
-            <a:pPr indent="0" marL="0">
+            <a:pPr marL="0" indent="0">
               <a:lnSpc>
                 <a:spcPct val="106000"/>
               </a:lnSpc>
@@ -5269,7 +5044,7 @@
             <a:endParaRPr lang="en-US" sz="2000" dirty="0"/>
           </a:p>
           <a:p>
-            <a:pPr indent="0" marL="0">
+            <a:pPr marL="0" indent="0">
               <a:lnSpc>
                 <a:spcPct val="106000"/>
               </a:lnSpc>
@@ -5311,7 +5086,7 @@
           <a:bodyPr wrap="square" lIns="0" tIns="0" rIns="0" bIns="0" rtlCol="0" anchor="t"/>
           <a:lstStyle/>
           <a:p>
-            <a:pPr indent="0" marL="0">
+            <a:pPr marL="0" indent="0">
               <a:lnSpc>
                 <a:spcPct val="106000"/>
               </a:lnSpc>
@@ -5352,7 +5127,7 @@
           </a:prstGeom>
           <a:extLst>
             <a:ext uri="{C572A759-6A51-4108-AA02-DFA0A04FC94B}">
-              <ma14:wrappingTextBoxFlag xmlns:ma14="http://schemas.microsoft.com/office/mac/drawingml/2011/main" val="0"/>
+              <ma14:wrappingTextBoxFlag xmlns:ma14="http://schemas.microsoft.com/office/mac/drawingml/2011/main" xmlns="" val="0"/>
             </a:ext>
           </a:extLst>
         </p:spPr>
@@ -5370,7 +5145,7 @@
           <a:p>
             <a:pPr algn="r"/>
             <a:fld id="{F7021451-1387-4CA6-816F-3879F97B5CBC}" type="slidenum">
-              <a:rPr b="0" lang="en-US"/>
+              <a:rPr lang="en-US" b="0"/>
               <a:t>10</a:t>
             </a:fld>
             <a:endParaRPr lang="en-US"/>
@@ -5405,9 +5180,11 @@
       <p:sp>
         <p:nvSpPr>
           <p:cNvPr id="2" name="Text 0"/>
-          <p:cNvSpPr/>
+          <p:cNvSpPr>
+            <a:spLocks noGrp="1"/>
+          </p:cNvSpPr>
           <p:nvPr>
-            <p:ph idx="100" type="title" hasCustomPrompt="1"/>
+            <p:ph type="title" idx="100" hasCustomPrompt="1"/>
           </p:nvPr>
         </p:nvSpPr>
         <p:spPr>
@@ -5425,7 +5202,7 @@
           <a:bodyPr wrap="square" lIns="0" tIns="0" rIns="0" bIns="0" rtlCol="0" anchor="ctr"/>
           <a:lstStyle/>
           <a:p>
-            <a:pPr indent="0" marL="0">
+            <a:pPr marL="0" indent="0">
               <a:buNone/>
             </a:pPr>
             <a:r>
@@ -5446,9 +5223,11 @@
       <p:sp>
         <p:nvSpPr>
           <p:cNvPr id="3" name="Text 0"/>
-          <p:cNvSpPr/>
+          <p:cNvSpPr>
+            <a:spLocks noGrp="1"/>
+          </p:cNvSpPr>
           <p:nvPr>
-            <p:ph idx="101" type="body" hasCustomPrompt="1"/>
+            <p:ph type="body" idx="101" hasCustomPrompt="1"/>
           </p:nvPr>
         </p:nvSpPr>
         <p:spPr>
@@ -5466,7 +5245,7 @@
           <a:bodyPr wrap="square" lIns="0" tIns="0" rIns="0" bIns="0" rtlCol="0" anchor="ctr"/>
           <a:lstStyle/>
           <a:p>
-            <a:pPr indent="0" marL="0">
+            <a:pPr marL="0" indent="0">
               <a:buNone/>
             </a:pPr>
             <a:r>
@@ -5484,9 +5263,11 @@
       <p:sp>
         <p:nvSpPr>
           <p:cNvPr id="4" name="Text 0"/>
-          <p:cNvSpPr/>
+          <p:cNvSpPr>
+            <a:spLocks noGrp="1"/>
+          </p:cNvSpPr>
           <p:nvPr>
-            <p:ph idx="102" type="body" hasCustomPrompt="1"/>
+            <p:ph type="body" idx="102" hasCustomPrompt="1"/>
           </p:nvPr>
         </p:nvSpPr>
         <p:spPr>
@@ -5504,7 +5285,7 @@
           <a:bodyPr wrap="square" lIns="0" tIns="0" rIns="0" bIns="0" rtlCol="0" anchor="ctr"/>
           <a:lstStyle/>
           <a:p>
-            <a:pPr indent="0" marL="0">
+            <a:pPr marL="0" indent="0">
               <a:buNone/>
             </a:pPr>
             <a:r>
@@ -5516,48 +5297,6 @@
               <a:t>Thư viện theo chủ sở hữu; không có RBAC hoặc chia sẻ tài liệu giữa nhóm người dùng</a:t>
             </a:r>
             <a:endParaRPr lang="en-US" sz="1800" dirty="0"/>
-          </a:p>
-        </p:txBody>
-      </p:sp>
-      <p:sp>
-        <p:nvSpPr>
-          <p:cNvPr id="5" name="Text 209: Nguồn: F3 · F5 | URL đầy đủ trong ghi chú và slide 18"/>
-          <p:cNvSpPr txBox="1"/>
-          <p:nvPr/>
-        </p:nvSpPr>
-        <p:spPr>
-          <a:xfrm>
-            <a:off x="571500" y="5886450"/>
-            <a:ext cx="11087100" cy="228600"/>
-          </a:xfrm>
-          <a:prstGeom prst="rect">
-            <a:avLst/>
-          </a:prstGeom>
-          <a:noFill/>
-          <a:ln/>
-        </p:spPr>
-        <p:txBody>
-          <a:bodyPr wrap="square" lIns="0" tIns="0" rIns="0" bIns="0" rtlCol="0" anchor="t"/>
-          <a:lstStyle/>
-          <a:p>
-            <a:pPr indent="0" marL="0">
-              <a:lnSpc>
-                <a:spcPct val="106000"/>
-              </a:lnSpc>
-              <a:buNone/>
-            </a:pPr>
-            <a:r>
-              <a:rPr lang="en-US" sz="1200" dirty="0">
-                <a:solidFill>
-                  <a:schemeClr val="tx2"/>
-                </a:solidFill>
-                <a:latin typeface="+mn-lt" pitchFamily="34" charset="0"/>
-                <a:ea typeface="+mn-lt" pitchFamily="34" charset="-122"/>
-                <a:cs typeface="+mn-lt" pitchFamily="34" charset="-120"/>
-              </a:rPr>
-              <a:t>Nguồn: F3 · F5 | URL đầy đủ trong ghi chú và slide 18</a:t>
-            </a:r>
-            <a:endParaRPr lang="en-US" sz="1200" dirty="0"/>
           </a:p>
         </p:txBody>
       </p:sp>
@@ -5609,7 +5348,7 @@
           <a:bodyPr wrap="square" lIns="0" tIns="0" rIns="0" bIns="0" rtlCol="0" anchor="t"/>
           <a:lstStyle/>
           <a:p>
-            <a:pPr indent="0" marL="0">
+            <a:pPr marL="0" indent="0">
               <a:lnSpc>
                 <a:spcPct val="106000"/>
               </a:lnSpc>
@@ -5651,7 +5390,7 @@
           <a:bodyPr wrap="square" lIns="0" tIns="0" rIns="0" bIns="0" rtlCol="0" anchor="t"/>
           <a:lstStyle/>
           <a:p>
-            <a:pPr indent="0" marL="0">
+            <a:pPr marL="0" indent="0">
               <a:lnSpc>
                 <a:spcPct val="106000"/>
               </a:lnSpc>
@@ -5671,7 +5410,7 @@
             <a:endParaRPr lang="en-US" sz="2200" dirty="0"/>
           </a:p>
           <a:p>
-            <a:pPr indent="0" marL="0">
+            <a:pPr marL="0" indent="0">
               <a:lnSpc>
                 <a:spcPct val="106000"/>
               </a:lnSpc>
@@ -5713,7 +5452,7 @@
           <a:bodyPr wrap="square" lIns="0" tIns="0" rIns="0" bIns="0" rtlCol="0" anchor="t"/>
           <a:lstStyle/>
           <a:p>
-            <a:pPr indent="0" marL="0">
+            <a:pPr marL="0" indent="0">
               <a:lnSpc>
                 <a:spcPct val="106000"/>
               </a:lnSpc>
@@ -5733,7 +5472,7 @@
             <a:endParaRPr lang="en-US" sz="1800" dirty="0"/>
           </a:p>
           <a:p>
-            <a:pPr indent="0" marL="0">
+            <a:pPr marL="0" indent="0">
               <a:lnSpc>
                 <a:spcPct val="106000"/>
               </a:lnSpc>
@@ -5753,7 +5492,7 @@
             <a:endParaRPr lang="en-US" sz="1800" dirty="0"/>
           </a:p>
           <a:p>
-            <a:pPr indent="0" marL="0">
+            <a:pPr marL="0" indent="0">
               <a:lnSpc>
                 <a:spcPct val="106000"/>
               </a:lnSpc>
@@ -5822,7 +5561,7 @@
           <a:bodyPr wrap="square" lIns="0" tIns="0" rIns="0" bIns="0" rtlCol="0" anchor="t"/>
           <a:lstStyle/>
           <a:p>
-            <a:pPr indent="0" marL="0">
+            <a:pPr marL="0" indent="0">
               <a:lnSpc>
                 <a:spcPct val="106000"/>
               </a:lnSpc>
@@ -5864,7 +5603,7 @@
           <a:bodyPr wrap="square" lIns="0" tIns="0" rIns="0" bIns="0" rtlCol="0" anchor="t"/>
           <a:lstStyle/>
           <a:p>
-            <a:pPr indent="0" marL="0">
+            <a:pPr marL="0" indent="0">
               <a:lnSpc>
                 <a:spcPct val="106000"/>
               </a:lnSpc>
@@ -5933,7 +5672,7 @@
           <a:bodyPr wrap="square" lIns="0" tIns="0" rIns="0" bIns="0" rtlCol="0" anchor="t"/>
           <a:lstStyle/>
           <a:p>
-            <a:pPr indent="0" marL="0">
+            <a:pPr marL="0" indent="0">
               <a:lnSpc>
                 <a:spcPct val="106000"/>
               </a:lnSpc>
@@ -5975,7 +5714,7 @@
           <a:bodyPr wrap="square" lIns="0" tIns="0" rIns="0" bIns="0" rtlCol="0" anchor="t"/>
           <a:lstStyle/>
           <a:p>
-            <a:pPr indent="0" marL="0">
+            <a:pPr marL="0" indent="0">
               <a:lnSpc>
                 <a:spcPct val="106000"/>
               </a:lnSpc>
@@ -6044,7 +5783,7 @@
           <a:bodyPr wrap="square" lIns="0" tIns="0" rIns="0" bIns="0" rtlCol="0" anchor="t"/>
           <a:lstStyle/>
           <a:p>
-            <a:pPr indent="0" marL="0">
+            <a:pPr marL="0" indent="0">
               <a:lnSpc>
                 <a:spcPct val="106000"/>
               </a:lnSpc>
@@ -6086,7 +5825,7 @@
           <a:bodyPr wrap="square" lIns="0" tIns="0" rIns="0" bIns="0" rtlCol="0" anchor="t"/>
           <a:lstStyle/>
           <a:p>
-            <a:pPr indent="0" marL="0">
+            <a:pPr marL="0" indent="0">
               <a:lnSpc>
                 <a:spcPct val="106000"/>
               </a:lnSpc>
@@ -6155,7 +5894,7 @@
           <a:bodyPr wrap="square" lIns="0" tIns="0" rIns="0" bIns="0" rtlCol="0" anchor="ctr"/>
           <a:lstStyle/>
           <a:p>
-            <a:pPr indent="0" marL="0">
+            <a:pPr marL="0" indent="0">
               <a:lnSpc>
                 <a:spcPct val="106000"/>
               </a:lnSpc>
@@ -6196,7 +5935,7 @@
           </a:prstGeom>
           <a:extLst>
             <a:ext uri="{C572A759-6A51-4108-AA02-DFA0A04FC94B}">
-              <ma14:wrappingTextBoxFlag xmlns:ma14="http://schemas.microsoft.com/office/mac/drawingml/2011/main" val="0"/>
+              <ma14:wrappingTextBoxFlag xmlns:ma14="http://schemas.microsoft.com/office/mac/drawingml/2011/main" xmlns="" val="0"/>
             </a:ext>
           </a:extLst>
         </p:spPr>
@@ -6214,7 +5953,7 @@
           <a:p>
             <a:pPr algn="r"/>
             <a:fld id="{F7021451-1387-4CA6-816F-3879F97B5CBC}" type="slidenum">
-              <a:rPr b="0" lang="en-US"/>
+              <a:rPr lang="en-US" b="0"/>
               <a:t>11</a:t>
             </a:fld>
             <a:endParaRPr lang="en-US"/>
@@ -6249,9 +5988,11 @@
       <p:sp>
         <p:nvSpPr>
           <p:cNvPr id="2" name="Text 0"/>
-          <p:cNvSpPr/>
+          <p:cNvSpPr>
+            <a:spLocks noGrp="1"/>
+          </p:cNvSpPr>
           <p:nvPr>
-            <p:ph idx="100" type="title" hasCustomPrompt="1"/>
+            <p:ph type="title" idx="100" hasCustomPrompt="1"/>
           </p:nvPr>
         </p:nvSpPr>
         <p:spPr>
@@ -6269,7 +6010,7 @@
           <a:bodyPr wrap="square" lIns="0" tIns="0" rIns="0" bIns="0" rtlCol="0" anchor="ctr"/>
           <a:lstStyle/>
           <a:p>
-            <a:pPr indent="0" marL="0">
+            <a:pPr marL="0" indent="0">
               <a:buNone/>
             </a:pPr>
             <a:r>
@@ -6290,9 +6031,11 @@
       <p:sp>
         <p:nvSpPr>
           <p:cNvPr id="3" name="Text 0"/>
-          <p:cNvSpPr/>
+          <p:cNvSpPr>
+            <a:spLocks noGrp="1"/>
+          </p:cNvSpPr>
           <p:nvPr>
-            <p:ph idx="101" type="body" hasCustomPrompt="1"/>
+            <p:ph type="body" idx="101" hasCustomPrompt="1"/>
           </p:nvPr>
         </p:nvSpPr>
         <p:spPr>
@@ -6310,7 +6053,7 @@
           <a:bodyPr wrap="square" lIns="0" tIns="0" rIns="0" bIns="0" rtlCol="0" anchor="ctr"/>
           <a:lstStyle/>
           <a:p>
-            <a:pPr indent="0" marL="0">
+            <a:pPr marL="0" indent="0">
               <a:buNone/>
             </a:pPr>
             <a:r>
@@ -6328,9 +6071,11 @@
       <p:sp>
         <p:nvSpPr>
           <p:cNvPr id="4" name="Text 0"/>
-          <p:cNvSpPr/>
+          <p:cNvSpPr>
+            <a:spLocks noGrp="1"/>
+          </p:cNvSpPr>
           <p:nvPr>
-            <p:ph idx="102" type="body" hasCustomPrompt="1"/>
+            <p:ph type="body" idx="102" hasCustomPrompt="1"/>
           </p:nvPr>
         </p:nvSpPr>
         <p:spPr>
@@ -6348,7 +6093,7 @@
           <a:bodyPr wrap="square" lIns="0" tIns="0" rIns="0" bIns="0" rtlCol="0" anchor="ctr"/>
           <a:lstStyle/>
           <a:p>
-            <a:pPr indent="0" marL="0">
+            <a:pPr marL="0" indent="0">
               <a:buNone/>
             </a:pPr>
             <a:r>
@@ -6360,48 +6105,6 @@
               <a:t>Không cam kết “miễn phí $0”; phải kiểm tra giá theo vùng và loại tài nguyên thực tế</a:t>
             </a:r>
             <a:endParaRPr lang="en-US" sz="1800" dirty="0"/>
-          </a:p>
-        </p:txBody>
-      </p:sp>
-      <p:sp>
-        <p:nvSpPr>
-          <p:cNvPr id="5" name="Text 225: Nguồn: F6 · F7 | URL đầy đủ trong ghi chú và slide 18"/>
-          <p:cNvSpPr txBox="1"/>
-          <p:nvPr/>
-        </p:nvSpPr>
-        <p:spPr>
-          <a:xfrm>
-            <a:off x="571500" y="5886450"/>
-            <a:ext cx="11087100" cy="228600"/>
-          </a:xfrm>
-          <a:prstGeom prst="rect">
-            <a:avLst/>
-          </a:prstGeom>
-          <a:noFill/>
-          <a:ln/>
-        </p:spPr>
-        <p:txBody>
-          <a:bodyPr wrap="square" lIns="0" tIns="0" rIns="0" bIns="0" rtlCol="0" anchor="t"/>
-          <a:lstStyle/>
-          <a:p>
-            <a:pPr indent="0" marL="0">
-              <a:lnSpc>
-                <a:spcPct val="106000"/>
-              </a:lnSpc>
-              <a:buNone/>
-            </a:pPr>
-            <a:r>
-              <a:rPr lang="en-US" sz="1200" dirty="0">
-                <a:solidFill>
-                  <a:schemeClr val="tx2"/>
-                </a:solidFill>
-                <a:latin typeface="+mn-lt" pitchFamily="34" charset="0"/>
-                <a:ea typeface="+mn-lt" pitchFamily="34" charset="-122"/>
-                <a:cs typeface="+mn-lt" pitchFamily="34" charset="-120"/>
-              </a:rPr>
-              <a:t>Nguồn: F6 · F7 | URL đầy đủ trong ghi chú và slide 18</a:t>
-            </a:r>
-            <a:endParaRPr lang="en-US" sz="1200" dirty="0"/>
           </a:p>
         </p:txBody>
       </p:sp>
@@ -6453,7 +6156,7 @@
           <a:bodyPr wrap="square" lIns="0" tIns="0" rIns="0" bIns="0" rtlCol="0" anchor="t"/>
           <a:lstStyle/>
           <a:p>
-            <a:pPr indent="0" marL="0">
+            <a:pPr marL="0" indent="0">
               <a:lnSpc>
                 <a:spcPct val="106000"/>
               </a:lnSpc>
@@ -6495,7 +6198,7 @@
           <a:bodyPr wrap="square" lIns="0" tIns="0" rIns="0" bIns="0" rtlCol="0" anchor="t"/>
           <a:lstStyle/>
           <a:p>
-            <a:pPr indent="0" marL="0">
+            <a:pPr marL="0" indent="0">
               <a:lnSpc>
                 <a:spcPct val="106000"/>
               </a:lnSpc>
@@ -6537,7 +6240,7 @@
           <a:bodyPr wrap="square" lIns="0" tIns="0" rIns="0" bIns="0" rtlCol="0" anchor="t"/>
           <a:lstStyle/>
           <a:p>
-            <a:pPr indent="0" marL="0">
+            <a:pPr marL="0" indent="0">
               <a:lnSpc>
                 <a:spcPct val="106000"/>
               </a:lnSpc>
@@ -6579,7 +6282,7 @@
           <a:bodyPr wrap="square" lIns="0" tIns="0" rIns="0" bIns="0" rtlCol="0" anchor="t"/>
           <a:lstStyle/>
           <a:p>
-            <a:pPr indent="0" marL="0">
+            <a:pPr marL="0" indent="0">
               <a:lnSpc>
                 <a:spcPct val="106000"/>
               </a:lnSpc>
@@ -6599,7 +6302,7 @@
             <a:endParaRPr lang="en-US" sz="1800" dirty="0"/>
           </a:p>
           <a:p>
-            <a:pPr indent="0" marL="0">
+            <a:pPr marL="0" indent="0">
               <a:lnSpc>
                 <a:spcPct val="106000"/>
               </a:lnSpc>
@@ -6641,7 +6344,7 @@
           <a:bodyPr wrap="square" lIns="0" tIns="0" rIns="0" bIns="0" rtlCol="0" anchor="t"/>
           <a:lstStyle/>
           <a:p>
-            <a:pPr indent="0" marL="0">
+            <a:pPr marL="0" indent="0">
               <a:lnSpc>
                 <a:spcPct val="106000"/>
               </a:lnSpc>
@@ -6683,7 +6386,7 @@
           <a:bodyPr wrap="square" lIns="0" tIns="0" rIns="0" bIns="0" rtlCol="0" anchor="t"/>
           <a:lstStyle/>
           <a:p>
-            <a:pPr indent="0" marL="0">
+            <a:pPr marL="0" indent="0">
               <a:lnSpc>
                 <a:spcPct val="106000"/>
               </a:lnSpc>
@@ -6703,7 +6406,7 @@
             <a:endParaRPr lang="en-US" sz="2000" dirty="0"/>
           </a:p>
           <a:p>
-            <a:pPr indent="0" marL="0">
+            <a:pPr marL="0" indent="0">
               <a:lnSpc>
                 <a:spcPct val="106000"/>
               </a:lnSpc>
@@ -6723,7 +6426,7 @@
             <a:endParaRPr lang="en-US" sz="2000" dirty="0"/>
           </a:p>
           <a:p>
-            <a:pPr indent="0" marL="0">
+            <a:pPr marL="0" indent="0">
               <a:lnSpc>
                 <a:spcPct val="106000"/>
               </a:lnSpc>
@@ -6792,7 +6495,7 @@
           <a:bodyPr wrap="square" lIns="0" tIns="0" rIns="0" bIns="0" rtlCol="0" anchor="t"/>
           <a:lstStyle/>
           <a:p>
-            <a:pPr indent="0" marL="0">
+            <a:pPr marL="0" indent="0">
               <a:lnSpc>
                 <a:spcPct val="106000"/>
               </a:lnSpc>
@@ -6834,7 +6537,7 @@
           <a:bodyPr wrap="square" lIns="0" tIns="0" rIns="0" bIns="0" rtlCol="0" anchor="t"/>
           <a:lstStyle/>
           <a:p>
-            <a:pPr indent="0" marL="0">
+            <a:pPr marL="0" indent="0">
               <a:lnSpc>
                 <a:spcPct val="106000"/>
               </a:lnSpc>
@@ -6875,7 +6578,7 @@
           </a:prstGeom>
           <a:extLst>
             <a:ext uri="{C572A759-6A51-4108-AA02-DFA0A04FC94B}">
-              <ma14:wrappingTextBoxFlag xmlns:ma14="http://schemas.microsoft.com/office/mac/drawingml/2011/main" val="0"/>
+              <ma14:wrappingTextBoxFlag xmlns:ma14="http://schemas.microsoft.com/office/mac/drawingml/2011/main" xmlns="" val="0"/>
             </a:ext>
           </a:extLst>
         </p:spPr>
@@ -6893,7 +6596,7 @@
           <a:p>
             <a:pPr algn="r"/>
             <a:fld id="{F7021451-1387-4CA6-816F-3879F97B5CBC}" type="slidenum">
-              <a:rPr b="0" lang="en-US"/>
+              <a:rPr lang="en-US" b="0"/>
               <a:t>12</a:t>
             </a:fld>
             <a:endParaRPr lang="en-US"/>
@@ -6928,9 +6631,11 @@
       <p:sp>
         <p:nvSpPr>
           <p:cNvPr id="2" name="Text 0"/>
-          <p:cNvSpPr/>
+          <p:cNvSpPr>
+            <a:spLocks noGrp="1"/>
+          </p:cNvSpPr>
           <p:nvPr>
-            <p:ph idx="100" type="title" hasCustomPrompt="1"/>
+            <p:ph type="title" idx="100" hasCustomPrompt="1"/>
           </p:nvPr>
         </p:nvSpPr>
         <p:spPr>
@@ -6948,7 +6653,7 @@
           <a:bodyPr wrap="square" lIns="0" tIns="0" rIns="0" bIns="0" rtlCol="0" anchor="ctr"/>
           <a:lstStyle/>
           <a:p>
-            <a:pPr indent="0" marL="0">
+            <a:pPr marL="0" indent="0">
               <a:buNone/>
             </a:pPr>
             <a:r>
@@ -6969,9 +6674,11 @@
       <p:sp>
         <p:nvSpPr>
           <p:cNvPr id="3" name="Text 0"/>
-          <p:cNvSpPr/>
+          <p:cNvSpPr>
+            <a:spLocks noGrp="1"/>
+          </p:cNvSpPr>
           <p:nvPr>
-            <p:ph idx="101" type="body" hasCustomPrompt="1"/>
+            <p:ph type="body" idx="101" hasCustomPrompt="1"/>
           </p:nvPr>
         </p:nvSpPr>
         <p:spPr>
@@ -6989,7 +6696,7 @@
           <a:bodyPr wrap="square" lIns="0" tIns="0" rIns="0" bIns="0" rtlCol="0" anchor="ctr"/>
           <a:lstStyle/>
           <a:p>
-            <a:pPr indent="0" marL="0">
+            <a:pPr marL="0" indent="0">
               <a:buNone/>
             </a:pPr>
             <a:r>
@@ -7007,9 +6714,11 @@
       <p:sp>
         <p:nvSpPr>
           <p:cNvPr id="4" name="Text 0"/>
-          <p:cNvSpPr/>
+          <p:cNvSpPr>
+            <a:spLocks noGrp="1"/>
+          </p:cNvSpPr>
           <p:nvPr>
-            <p:ph idx="102" type="body" hasCustomPrompt="1"/>
+            <p:ph type="body" idx="102" hasCustomPrompt="1"/>
           </p:nvPr>
         </p:nvSpPr>
         <p:spPr>
@@ -7027,7 +6736,7 @@
           <a:bodyPr wrap="square" lIns="0" tIns="0" rIns="0" bIns="0" rtlCol="0" anchor="ctr"/>
           <a:lstStyle/>
           <a:p>
-            <a:pPr indent="0" marL="0">
+            <a:pPr marL="0" indent="0">
               <a:buNone/>
             </a:pPr>
             <a:r>
@@ -7039,48 +6748,6 @@
               <a:t>Ví dụ khối lượng cho một kỳ đánh giá, không phải kết quả benchmark hay dự toán giá</a:t>
             </a:r>
             <a:endParaRPr lang="en-US" sz="1800" dirty="0"/>
-          </a:p>
-        </p:txBody>
-      </p:sp>
-      <p:sp>
-        <p:nvSpPr>
-          <p:cNvPr id="5" name="Text 236: Nguồn: F4 · F7 | URL đầy đủ trong ghi chú và slide 18"/>
-          <p:cNvSpPr txBox="1"/>
-          <p:nvPr/>
-        </p:nvSpPr>
-        <p:spPr>
-          <a:xfrm>
-            <a:off x="571500" y="5886450"/>
-            <a:ext cx="11087100" cy="228600"/>
-          </a:xfrm>
-          <a:prstGeom prst="rect">
-            <a:avLst/>
-          </a:prstGeom>
-          <a:noFill/>
-          <a:ln/>
-        </p:spPr>
-        <p:txBody>
-          <a:bodyPr wrap="square" lIns="0" tIns="0" rIns="0" bIns="0" rtlCol="0" anchor="t"/>
-          <a:lstStyle/>
-          <a:p>
-            <a:pPr indent="0" marL="0">
-              <a:lnSpc>
-                <a:spcPct val="106000"/>
-              </a:lnSpc>
-              <a:buNone/>
-            </a:pPr>
-            <a:r>
-              <a:rPr lang="en-US" sz="1200" dirty="0">
-                <a:solidFill>
-                  <a:schemeClr val="tx2"/>
-                </a:solidFill>
-                <a:latin typeface="+mn-lt" pitchFamily="34" charset="0"/>
-                <a:ea typeface="+mn-lt" pitchFamily="34" charset="-122"/>
-                <a:cs typeface="+mn-lt" pitchFamily="34" charset="-120"/>
-              </a:rPr>
-              <a:t>Nguồn: F4 · F7 | URL đầy đủ trong ghi chú và slide 18</a:t>
-            </a:r>
-            <a:endParaRPr lang="en-US" sz="1200" dirty="0"/>
           </a:p>
         </p:txBody>
       </p:sp>
@@ -7159,7 +6826,7 @@
           <a:bodyPr wrap="square" lIns="0" tIns="0" rIns="0" bIns="0" rtlCol="0" anchor="t"/>
           <a:lstStyle/>
           <a:p>
-            <a:pPr indent="0" marL="0">
+            <a:pPr marL="0" indent="0">
               <a:lnSpc>
                 <a:spcPct val="106000"/>
               </a:lnSpc>
@@ -7201,7 +6868,7 @@
           <a:bodyPr wrap="square" lIns="0" tIns="0" rIns="0" bIns="0" rtlCol="0" anchor="t"/>
           <a:lstStyle/>
           <a:p>
-            <a:pPr indent="0" marL="0">
+            <a:pPr marL="0" indent="0">
               <a:lnSpc>
                 <a:spcPct val="106000"/>
               </a:lnSpc>
@@ -7243,7 +6910,7 @@
           <a:bodyPr wrap="square" lIns="0" tIns="0" rIns="0" bIns="0" rtlCol="0" anchor="t"/>
           <a:lstStyle/>
           <a:p>
-            <a:pPr indent="0" marL="0">
+            <a:pPr marL="0" indent="0">
               <a:lnSpc>
                 <a:spcPct val="106000"/>
               </a:lnSpc>
@@ -7285,7 +6952,7 @@
           <a:bodyPr wrap="square" lIns="0" tIns="0" rIns="0" bIns="0" rtlCol="0" anchor="t"/>
           <a:lstStyle/>
           <a:p>
-            <a:pPr indent="0" marL="0">
+            <a:pPr marL="0" indent="0">
               <a:lnSpc>
                 <a:spcPct val="106000"/>
               </a:lnSpc>
@@ -7327,7 +6994,7 @@
           <a:bodyPr wrap="square" lIns="0" tIns="0" rIns="0" bIns="0" rtlCol="0" anchor="t"/>
           <a:lstStyle/>
           <a:p>
-            <a:pPr indent="0" marL="0">
+            <a:pPr marL="0" indent="0">
               <a:lnSpc>
                 <a:spcPct val="106000"/>
               </a:lnSpc>
@@ -7369,7 +7036,7 @@
           <a:bodyPr wrap="square" lIns="0" tIns="0" rIns="0" bIns="0" rtlCol="0" anchor="t"/>
           <a:lstStyle/>
           <a:p>
-            <a:pPr indent="0" marL="0">
+            <a:pPr marL="0" indent="0">
               <a:lnSpc>
                 <a:spcPct val="106000"/>
               </a:lnSpc>
@@ -7438,7 +7105,7 @@
           <a:bodyPr wrap="square" lIns="0" tIns="0" rIns="0" bIns="0" rtlCol="0" anchor="t"/>
           <a:lstStyle/>
           <a:p>
-            <a:pPr indent="0" marL="0">
+            <a:pPr marL="0" indent="0">
               <a:lnSpc>
                 <a:spcPct val="106000"/>
               </a:lnSpc>
@@ -7480,7 +7147,7 @@
           <a:bodyPr wrap="square" lIns="0" tIns="0" rIns="0" bIns="0" rtlCol="0" anchor="t"/>
           <a:lstStyle/>
           <a:p>
-            <a:pPr indent="0" marL="0">
+            <a:pPr marL="0" indent="0">
               <a:lnSpc>
                 <a:spcPct val="106000"/>
               </a:lnSpc>
@@ -7500,7 +7167,7 @@
             <a:endParaRPr lang="en-US" sz="1800" dirty="0"/>
           </a:p>
           <a:p>
-            <a:pPr indent="0" marL="0">
+            <a:pPr marL="0" indent="0">
               <a:lnSpc>
                 <a:spcPct val="106000"/>
               </a:lnSpc>
@@ -7541,7 +7208,7 @@
           </a:prstGeom>
           <a:extLst>
             <a:ext uri="{C572A759-6A51-4108-AA02-DFA0A04FC94B}">
-              <ma14:wrappingTextBoxFlag xmlns:ma14="http://schemas.microsoft.com/office/mac/drawingml/2011/main" val="0"/>
+              <ma14:wrappingTextBoxFlag xmlns:ma14="http://schemas.microsoft.com/office/mac/drawingml/2011/main" xmlns="" val="0"/>
             </a:ext>
           </a:extLst>
         </p:spPr>
@@ -7559,7 +7226,7 @@
           <a:p>
             <a:pPr algn="r"/>
             <a:fld id="{F7021451-1387-4CA6-816F-3879F97B5CBC}" type="slidenum">
-              <a:rPr b="0" lang="en-US"/>
+              <a:rPr lang="en-US" b="0"/>
               <a:t>13</a:t>
             </a:fld>
             <a:endParaRPr lang="en-US"/>
@@ -7594,9 +7261,11 @@
       <p:sp>
         <p:nvSpPr>
           <p:cNvPr id="2" name="Text 0"/>
-          <p:cNvSpPr/>
+          <p:cNvSpPr>
+            <a:spLocks noGrp="1"/>
+          </p:cNvSpPr>
           <p:nvPr>
-            <p:ph idx="100" type="title" hasCustomPrompt="1"/>
+            <p:ph type="title" idx="100" hasCustomPrompt="1"/>
           </p:nvPr>
         </p:nvSpPr>
         <p:spPr>
@@ -7614,7 +7283,7 @@
           <a:bodyPr wrap="square" lIns="0" tIns="0" rIns="0" bIns="0" rtlCol="0" anchor="ctr"/>
           <a:lstStyle/>
           <a:p>
-            <a:pPr indent="0" marL="0">
+            <a:pPr marL="0" indent="0">
               <a:buNone/>
             </a:pPr>
             <a:r>
@@ -7635,9 +7304,11 @@
       <p:sp>
         <p:nvSpPr>
           <p:cNvPr id="3" name="Text 0"/>
-          <p:cNvSpPr/>
+          <p:cNvSpPr>
+            <a:spLocks noGrp="1"/>
+          </p:cNvSpPr>
           <p:nvPr>
-            <p:ph idx="101" type="body" hasCustomPrompt="1"/>
+            <p:ph type="body" idx="101" hasCustomPrompt="1"/>
           </p:nvPr>
         </p:nvSpPr>
         <p:spPr>
@@ -7655,7 +7326,7 @@
           <a:bodyPr wrap="square" lIns="0" tIns="0" rIns="0" bIns="0" rtlCol="0" anchor="ctr"/>
           <a:lstStyle/>
           <a:p>
-            <a:pPr indent="0" marL="0">
+            <a:pPr marL="0" indent="0">
               <a:buNone/>
             </a:pPr>
             <a:r>
@@ -7673,9 +7344,11 @@
       <p:sp>
         <p:nvSpPr>
           <p:cNvPr id="4" name="Text 0"/>
-          <p:cNvSpPr/>
+          <p:cNvSpPr>
+            <a:spLocks noGrp="1"/>
+          </p:cNvSpPr>
           <p:nvPr>
-            <p:ph idx="102" type="body" hasCustomPrompt="1"/>
+            <p:ph type="body" idx="102" hasCustomPrompt="1"/>
           </p:nvPr>
         </p:nvSpPr>
         <p:spPr>
@@ -7693,7 +7366,7 @@
           <a:bodyPr wrap="square" lIns="0" tIns="0" rIns="0" bIns="0" rtlCol="0" anchor="ctr"/>
           <a:lstStyle/>
           <a:p>
-            <a:pPr indent="0" marL="0">
+            <a:pPr marL="0" indent="0">
               <a:buNone/>
             </a:pPr>
             <a:r>
@@ -7705,48 +7378,6 @@
               <a:t>Dùng thông tin thật do nhóm tạo; không bịa tên nhóm, project ID hoặc ảnh Console</a:t>
             </a:r>
             <a:endParaRPr lang="en-US" sz="1800" dirty="0"/>
-          </a:p>
-        </p:txBody>
-      </p:sp>
-      <p:sp>
-        <p:nvSpPr>
-          <p:cNvPr id="5" name="Text 248: Nguồn: F1 · F2 · F6 | URL đầy đủ trong ghi chú và slide 18"/>
-          <p:cNvSpPr txBox="1"/>
-          <p:nvPr/>
-        </p:nvSpPr>
-        <p:spPr>
-          <a:xfrm>
-            <a:off x="571500" y="5886450"/>
-            <a:ext cx="11087100" cy="228600"/>
-          </a:xfrm>
-          <a:prstGeom prst="rect">
-            <a:avLst/>
-          </a:prstGeom>
-          <a:noFill/>
-          <a:ln/>
-        </p:spPr>
-        <p:txBody>
-          <a:bodyPr wrap="square" lIns="0" tIns="0" rIns="0" bIns="0" rtlCol="0" anchor="t"/>
-          <a:lstStyle/>
-          <a:p>
-            <a:pPr indent="0" marL="0">
-              <a:lnSpc>
-                <a:spcPct val="106000"/>
-              </a:lnSpc>
-              <a:buNone/>
-            </a:pPr>
-            <a:r>
-              <a:rPr lang="en-US" sz="1200" dirty="0">
-                <a:solidFill>
-                  <a:schemeClr val="tx2"/>
-                </a:solidFill>
-                <a:latin typeface="+mn-lt" pitchFamily="34" charset="0"/>
-                <a:ea typeface="+mn-lt" pitchFamily="34" charset="-122"/>
-                <a:cs typeface="+mn-lt" pitchFamily="34" charset="-120"/>
-              </a:rPr>
-              <a:t>Nguồn: F1 · F2 · F6 | URL đầy đủ trong ghi chú và slide 18</a:t>
-            </a:r>
-            <a:endParaRPr lang="en-US" sz="1200" dirty="0"/>
           </a:p>
         </p:txBody>
       </p:sp>
@@ -7798,7 +7429,7 @@
           <a:bodyPr wrap="square" lIns="0" tIns="0" rIns="0" bIns="0" rtlCol="0" anchor="t"/>
           <a:lstStyle/>
           <a:p>
-            <a:pPr indent="0" marL="0">
+            <a:pPr marL="0" indent="0">
               <a:lnSpc>
                 <a:spcPct val="106000"/>
               </a:lnSpc>
@@ -7840,7 +7471,7 @@
           <a:bodyPr wrap="square" lIns="0" tIns="0" rIns="0" bIns="0" rtlCol="0" anchor="t"/>
           <a:lstStyle/>
           <a:p>
-            <a:pPr indent="0" marL="0">
+            <a:pPr marL="0" indent="0">
               <a:lnSpc>
                 <a:spcPct val="106000"/>
               </a:lnSpc>
@@ -7860,7 +7491,7 @@
             <a:endParaRPr lang="en-US" sz="1800" dirty="0"/>
           </a:p>
           <a:p>
-            <a:pPr indent="0" marL="0">
+            <a:pPr marL="0" indent="0">
               <a:lnSpc>
                 <a:spcPct val="106000"/>
               </a:lnSpc>
@@ -7929,7 +7560,7 @@
           <a:bodyPr wrap="square" lIns="0" tIns="0" rIns="0" bIns="0" rtlCol="0" anchor="t"/>
           <a:lstStyle/>
           <a:p>
-            <a:pPr indent="0" marL="0">
+            <a:pPr marL="0" indent="0">
               <a:lnSpc>
                 <a:spcPct val="106000"/>
               </a:lnSpc>
@@ -7971,7 +7602,7 @@
           <a:bodyPr wrap="square" lIns="0" tIns="0" rIns="0" bIns="0" rtlCol="0" anchor="t"/>
           <a:lstStyle/>
           <a:p>
-            <a:pPr indent="0" marL="0">
+            <a:pPr marL="0" indent="0">
               <a:lnSpc>
                 <a:spcPct val="106000"/>
               </a:lnSpc>
@@ -7991,7 +7622,7 @@
             <a:endParaRPr lang="en-US" sz="1800" dirty="0"/>
           </a:p>
           <a:p>
-            <a:pPr indent="0" marL="0">
+            <a:pPr marL="0" indent="0">
               <a:lnSpc>
                 <a:spcPct val="106000"/>
               </a:lnSpc>
@@ -8060,7 +7691,7 @@
           <a:bodyPr wrap="square" lIns="0" tIns="0" rIns="0" bIns="0" rtlCol="0" anchor="t"/>
           <a:lstStyle/>
           <a:p>
-            <a:pPr indent="0" marL="0">
+            <a:pPr marL="0" indent="0">
               <a:lnSpc>
                 <a:spcPct val="106000"/>
               </a:lnSpc>
@@ -8102,7 +7733,7 @@
           <a:bodyPr wrap="square" lIns="0" tIns="0" rIns="0" bIns="0" rtlCol="0" anchor="t"/>
           <a:lstStyle/>
           <a:p>
-            <a:pPr indent="0" marL="0">
+            <a:pPr marL="0" indent="0">
               <a:lnSpc>
                 <a:spcPct val="106000"/>
               </a:lnSpc>
@@ -8122,7 +7753,7 @@
             <a:endParaRPr lang="en-US" sz="1800" dirty="0"/>
           </a:p>
           <a:p>
-            <a:pPr indent="0" marL="0">
+            <a:pPr marL="0" indent="0">
               <a:lnSpc>
                 <a:spcPct val="106000"/>
               </a:lnSpc>
@@ -8191,7 +7822,7 @@
           <a:bodyPr wrap="square" lIns="0" tIns="0" rIns="0" bIns="0" rtlCol="0" anchor="t"/>
           <a:lstStyle/>
           <a:p>
-            <a:pPr indent="0" marL="0">
+            <a:pPr marL="0" indent="0">
               <a:lnSpc>
                 <a:spcPct val="106000"/>
               </a:lnSpc>
@@ -8233,7 +7864,7 @@
           <a:bodyPr wrap="square" lIns="0" tIns="0" rIns="0" bIns="0" rtlCol="0" anchor="t"/>
           <a:lstStyle/>
           <a:p>
-            <a:pPr indent="0" marL="0">
+            <a:pPr marL="0" indent="0">
               <a:lnSpc>
                 <a:spcPct val="106000"/>
               </a:lnSpc>
@@ -8253,7 +7884,7 @@
             <a:endParaRPr lang="en-US" sz="1800" dirty="0"/>
           </a:p>
           <a:p>
-            <a:pPr indent="0" marL="0">
+            <a:pPr marL="0" indent="0">
               <a:lnSpc>
                 <a:spcPct val="106000"/>
               </a:lnSpc>
@@ -8322,7 +7953,7 @@
           <a:bodyPr wrap="square" lIns="0" tIns="0" rIns="0" bIns="0" rtlCol="0" anchor="t"/>
           <a:lstStyle/>
           <a:p>
-            <a:pPr indent="0" marL="0">
+            <a:pPr marL="0" indent="0">
               <a:lnSpc>
                 <a:spcPct val="106000"/>
               </a:lnSpc>
@@ -8364,7 +7995,7 @@
           <a:bodyPr wrap="square" lIns="0" tIns="0" rIns="0" bIns="0" rtlCol="0" anchor="t"/>
           <a:lstStyle/>
           <a:p>
-            <a:pPr indent="0" marL="0">
+            <a:pPr marL="0" indent="0">
               <a:lnSpc>
                 <a:spcPct val="106000"/>
               </a:lnSpc>
@@ -8384,7 +8015,7 @@
             <a:endParaRPr lang="en-US" sz="1800" dirty="0"/>
           </a:p>
           <a:p>
-            <a:pPr indent="0" marL="0">
+            <a:pPr marL="0" indent="0">
               <a:lnSpc>
                 <a:spcPct val="106000"/>
               </a:lnSpc>
@@ -8453,7 +8084,7 @@
           <a:bodyPr wrap="square" lIns="0" tIns="0" rIns="0" bIns="0" rtlCol="0" anchor="t"/>
           <a:lstStyle/>
           <a:p>
-            <a:pPr indent="0" marL="0">
+            <a:pPr marL="0" indent="0">
               <a:lnSpc>
                 <a:spcPct val="106000"/>
               </a:lnSpc>
@@ -8495,7 +8126,7 @@
           <a:bodyPr wrap="square" lIns="0" tIns="0" rIns="0" bIns="0" rtlCol="0" anchor="t"/>
           <a:lstStyle/>
           <a:p>
-            <a:pPr indent="0" marL="0">
+            <a:pPr marL="0" indent="0">
               <a:lnSpc>
                 <a:spcPct val="106000"/>
               </a:lnSpc>
@@ -8515,7 +8146,7 @@
             <a:endParaRPr lang="en-US" sz="1800" dirty="0"/>
           </a:p>
           <a:p>
-            <a:pPr indent="0" marL="0">
+            <a:pPr marL="0" indent="0">
               <a:lnSpc>
                 <a:spcPct val="106000"/>
               </a:lnSpc>
@@ -8556,7 +8187,7 @@
           </a:prstGeom>
           <a:extLst>
             <a:ext uri="{C572A759-6A51-4108-AA02-DFA0A04FC94B}">
-              <ma14:wrappingTextBoxFlag xmlns:ma14="http://schemas.microsoft.com/office/mac/drawingml/2011/main" val="0"/>
+              <ma14:wrappingTextBoxFlag xmlns:ma14="http://schemas.microsoft.com/office/mac/drawingml/2011/main" xmlns="" val="0"/>
             </a:ext>
           </a:extLst>
         </p:spPr>
@@ -8574,7 +8205,7 @@
           <a:p>
             <a:pPr algn="r"/>
             <a:fld id="{F7021451-1387-4CA6-816F-3879F97B5CBC}" type="slidenum">
-              <a:rPr b="0" lang="en-US"/>
+              <a:rPr lang="en-US" b="0"/>
               <a:t>14</a:t>
             </a:fld>
             <a:endParaRPr lang="en-US"/>
@@ -8609,9 +8240,11 @@
       <p:sp>
         <p:nvSpPr>
           <p:cNvPr id="2" name="Text 0"/>
-          <p:cNvSpPr/>
+          <p:cNvSpPr>
+            <a:spLocks noGrp="1"/>
+          </p:cNvSpPr>
           <p:nvPr>
-            <p:ph idx="100" type="title" hasCustomPrompt="1"/>
+            <p:ph type="title" idx="100" hasCustomPrompt="1"/>
           </p:nvPr>
         </p:nvSpPr>
         <p:spPr>
@@ -8629,7 +8262,7 @@
           <a:bodyPr wrap="square" lIns="0" tIns="0" rIns="0" bIns="0" rtlCol="0" anchor="ctr"/>
           <a:lstStyle/>
           <a:p>
-            <a:pPr indent="0" marL="0">
+            <a:pPr marL="0" indent="0">
               <a:buNone/>
             </a:pPr>
             <a:r>
@@ -8650,9 +8283,11 @@
       <p:sp>
         <p:nvSpPr>
           <p:cNvPr id="3" name="Text 0"/>
-          <p:cNvSpPr/>
+          <p:cNvSpPr>
+            <a:spLocks noGrp="1"/>
+          </p:cNvSpPr>
           <p:nvPr>
-            <p:ph idx="101" type="body" hasCustomPrompt="1"/>
+            <p:ph type="body" idx="101" hasCustomPrompt="1"/>
           </p:nvPr>
         </p:nvSpPr>
         <p:spPr>
@@ -8670,7 +8305,7 @@
           <a:bodyPr wrap="square" lIns="0" tIns="0" rIns="0" bIns="0" rtlCol="0" anchor="ctr"/>
           <a:lstStyle/>
           <a:p>
-            <a:pPr indent="0" marL="0">
+            <a:pPr marL="0" indent="0">
               <a:buNone/>
             </a:pPr>
             <a:r>
@@ -8688,9 +8323,11 @@
       <p:sp>
         <p:nvSpPr>
           <p:cNvPr id="4" name="Text 0"/>
-          <p:cNvSpPr/>
+          <p:cNvSpPr>
+            <a:spLocks noGrp="1"/>
+          </p:cNvSpPr>
           <p:nvPr>
-            <p:ph idx="102" type="body" hasCustomPrompt="1"/>
+            <p:ph type="body" idx="102" hasCustomPrompt="1"/>
           </p:nvPr>
         </p:nvSpPr>
         <p:spPr>
@@ -8708,7 +8345,7 @@
           <a:bodyPr wrap="square" lIns="0" tIns="0" rIns="0" bIns="0" rtlCol="0" anchor="ctr"/>
           <a:lstStyle/>
           <a:p>
-            <a:pPr indent="0" marL="0">
+            <a:pPr marL="0" indent="0">
               <a:buNone/>
             </a:pPr>
             <a:r>
@@ -8720,48 +8357,6 @@
               <a:t>Chạy từ thư mục repo; project ID và bucket phải lấy từ cấu hình thật của nhóm</a:t>
             </a:r>
             <a:endParaRPr lang="en-US" sz="1800" dirty="0"/>
-          </a:p>
-        </p:txBody>
-      </p:sp>
-      <p:sp>
-        <p:nvSpPr>
-          <p:cNvPr id="5" name="Text 267: Nguồn: F4 | URL đầy đủ trong ghi chú và slide 18"/>
-          <p:cNvSpPr txBox="1"/>
-          <p:nvPr/>
-        </p:nvSpPr>
-        <p:spPr>
-          <a:xfrm>
-            <a:off x="571500" y="5886450"/>
-            <a:ext cx="11087100" cy="228600"/>
-          </a:xfrm>
-          <a:prstGeom prst="rect">
-            <a:avLst/>
-          </a:prstGeom>
-          <a:noFill/>
-          <a:ln/>
-        </p:spPr>
-        <p:txBody>
-          <a:bodyPr wrap="square" lIns="0" tIns="0" rIns="0" bIns="0" rtlCol="0" anchor="t"/>
-          <a:lstStyle/>
-          <a:p>
-            <a:pPr indent="0" marL="0">
-              <a:lnSpc>
-                <a:spcPct val="106000"/>
-              </a:lnSpc>
-              <a:buNone/>
-            </a:pPr>
-            <a:r>
-              <a:rPr lang="en-US" sz="1200" dirty="0">
-                <a:solidFill>
-                  <a:schemeClr val="tx2"/>
-                </a:solidFill>
-                <a:latin typeface="+mn-lt" pitchFamily="34" charset="0"/>
-                <a:ea typeface="+mn-lt" pitchFamily="34" charset="-122"/>
-                <a:cs typeface="+mn-lt" pitchFamily="34" charset="-120"/>
-              </a:rPr>
-              <a:t>Nguồn: F4 | URL đầy đủ trong ghi chú và slide 18</a:t>
-            </a:r>
-            <a:endParaRPr lang="en-US" sz="1200" dirty="0"/>
           </a:p>
         </p:txBody>
       </p:sp>
@@ -8813,7 +8408,7 @@
           <a:bodyPr wrap="square" lIns="0" tIns="0" rIns="0" bIns="0" rtlCol="0" anchor="t"/>
           <a:lstStyle/>
           <a:p>
-            <a:pPr indent="0" marL="0">
+            <a:pPr marL="0" indent="0">
               <a:lnSpc>
                 <a:spcPct val="106000"/>
               </a:lnSpc>
@@ -8855,7 +8450,7 @@
           <a:bodyPr wrap="square" lIns="0" tIns="0" rIns="0" bIns="0" rtlCol="0" anchor="t"/>
           <a:lstStyle/>
           <a:p>
-            <a:pPr indent="0" marL="0">
+            <a:pPr marL="0" indent="0">
               <a:lnSpc>
                 <a:spcPct val="106000"/>
               </a:lnSpc>
@@ -8897,7 +8492,7 @@
           <a:bodyPr wrap="square" lIns="0" tIns="0" rIns="0" bIns="0" rtlCol="0" anchor="t"/>
           <a:lstStyle/>
           <a:p>
-            <a:pPr indent="0" marL="0">
+            <a:pPr marL="0" indent="0">
               <a:lnSpc>
                 <a:spcPct val="106000"/>
               </a:lnSpc>
@@ -8917,7 +8512,7 @@
             <a:endParaRPr lang="en-US" sz="1600" dirty="0"/>
           </a:p>
           <a:p>
-            <a:pPr indent="0" marL="0">
+            <a:pPr marL="0" indent="0">
               <a:lnSpc>
                 <a:spcPct val="106000"/>
               </a:lnSpc>
@@ -8986,7 +8581,7 @@
           <a:bodyPr wrap="square" lIns="0" tIns="0" rIns="0" bIns="0" rtlCol="0" anchor="t"/>
           <a:lstStyle/>
           <a:p>
-            <a:pPr indent="0" marL="0">
+            <a:pPr marL="0" indent="0">
               <a:lnSpc>
                 <a:spcPct val="106000"/>
               </a:lnSpc>
@@ -9028,7 +8623,7 @@
           <a:bodyPr wrap="square" lIns="0" tIns="0" rIns="0" bIns="0" rtlCol="0" anchor="t"/>
           <a:lstStyle/>
           <a:p>
-            <a:pPr indent="0" marL="0">
+            <a:pPr marL="0" indent="0">
               <a:lnSpc>
                 <a:spcPct val="106000"/>
               </a:lnSpc>
@@ -9070,7 +8665,7 @@
           <a:bodyPr wrap="square" lIns="0" tIns="0" rIns="0" bIns="0" rtlCol="0" anchor="t"/>
           <a:lstStyle/>
           <a:p>
-            <a:pPr indent="0" marL="0">
+            <a:pPr marL="0" indent="0">
               <a:lnSpc>
                 <a:spcPct val="106000"/>
               </a:lnSpc>
@@ -9090,7 +8685,7 @@
             <a:endParaRPr lang="en-US" sz="1600" dirty="0"/>
           </a:p>
           <a:p>
-            <a:pPr indent="0" marL="0">
+            <a:pPr marL="0" indent="0">
               <a:lnSpc>
                 <a:spcPct val="106000"/>
               </a:lnSpc>
@@ -9159,7 +8754,7 @@
           <a:bodyPr wrap="square" lIns="0" tIns="0" rIns="0" bIns="0" rtlCol="0" anchor="t"/>
           <a:lstStyle/>
           <a:p>
-            <a:pPr indent="0" marL="0">
+            <a:pPr marL="0" indent="0">
               <a:lnSpc>
                 <a:spcPct val="106000"/>
               </a:lnSpc>
@@ -9201,7 +8796,7 @@
           <a:bodyPr wrap="square" lIns="0" tIns="0" rIns="0" bIns="0" rtlCol="0" anchor="t"/>
           <a:lstStyle/>
           <a:p>
-            <a:pPr indent="0" marL="0">
+            <a:pPr marL="0" indent="0">
               <a:lnSpc>
                 <a:spcPct val="106000"/>
               </a:lnSpc>
@@ -9243,7 +8838,7 @@
           <a:bodyPr wrap="square" lIns="0" tIns="0" rIns="0" bIns="0" rtlCol="0" anchor="t"/>
           <a:lstStyle/>
           <a:p>
-            <a:pPr indent="0" marL="0">
+            <a:pPr marL="0" indent="0">
               <a:lnSpc>
                 <a:spcPct val="106000"/>
               </a:lnSpc>
@@ -9263,7 +8858,7 @@
             <a:endParaRPr lang="en-US" sz="1600" dirty="0"/>
           </a:p>
           <a:p>
-            <a:pPr indent="0" marL="0">
+            <a:pPr marL="0" indent="0">
               <a:lnSpc>
                 <a:spcPct val="106000"/>
               </a:lnSpc>
@@ -9332,7 +8927,7 @@
           <a:bodyPr wrap="square" lIns="0" tIns="0" rIns="0" bIns="0" rtlCol="0" anchor="t"/>
           <a:lstStyle/>
           <a:p>
-            <a:pPr indent="0" marL="0">
+            <a:pPr marL="0" indent="0">
               <a:lnSpc>
                 <a:spcPct val="106000"/>
               </a:lnSpc>
@@ -9374,7 +8969,7 @@
           <a:bodyPr wrap="square" lIns="0" tIns="0" rIns="0" bIns="0" rtlCol="0" anchor="t"/>
           <a:lstStyle/>
           <a:p>
-            <a:pPr indent="0" marL="0">
+            <a:pPr marL="0" indent="0">
               <a:lnSpc>
                 <a:spcPct val="106000"/>
               </a:lnSpc>
@@ -9416,7 +9011,7 @@
           <a:bodyPr wrap="square" lIns="0" tIns="0" rIns="0" bIns="0" rtlCol="0" anchor="t"/>
           <a:lstStyle/>
           <a:p>
-            <a:pPr indent="0" marL="0">
+            <a:pPr marL="0" indent="0">
               <a:lnSpc>
                 <a:spcPct val="106000"/>
               </a:lnSpc>
@@ -9436,7 +9031,7 @@
             <a:endParaRPr lang="en-US" sz="1600" dirty="0"/>
           </a:p>
           <a:p>
-            <a:pPr indent="0" marL="0">
+            <a:pPr marL="0" indent="0">
               <a:lnSpc>
                 <a:spcPct val="106000"/>
               </a:lnSpc>
@@ -9477,7 +9072,7 @@
           </a:prstGeom>
           <a:extLst>
             <a:ext uri="{C572A759-6A51-4108-AA02-DFA0A04FC94B}">
-              <ma14:wrappingTextBoxFlag xmlns:ma14="http://schemas.microsoft.com/office/mac/drawingml/2011/main" val="0"/>
+              <ma14:wrappingTextBoxFlag xmlns:ma14="http://schemas.microsoft.com/office/mac/drawingml/2011/main" xmlns="" val="0"/>
             </a:ext>
           </a:extLst>
         </p:spPr>
@@ -9495,7 +9090,7 @@
           <a:p>
             <a:pPr algn="r"/>
             <a:fld id="{F7021451-1387-4CA6-816F-3879F97B5CBC}" type="slidenum">
-              <a:rPr b="0" lang="en-US"/>
+              <a:rPr lang="en-US" b="0"/>
               <a:t>15</a:t>
             </a:fld>
             <a:endParaRPr lang="en-US"/>
@@ -9530,9 +9125,11 @@
       <p:sp>
         <p:nvSpPr>
           <p:cNvPr id="2" name="Text 0"/>
-          <p:cNvSpPr/>
+          <p:cNvSpPr>
+            <a:spLocks noGrp="1"/>
+          </p:cNvSpPr>
           <p:nvPr>
-            <p:ph idx="100" type="title" hasCustomPrompt="1"/>
+            <p:ph type="title" idx="100" hasCustomPrompt="1"/>
           </p:nvPr>
         </p:nvSpPr>
         <p:spPr>
@@ -9550,7 +9147,7 @@
           <a:bodyPr wrap="square" lIns="0" tIns="0" rIns="0" bIns="0" rtlCol="0" anchor="ctr"/>
           <a:lstStyle/>
           <a:p>
-            <a:pPr indent="0" marL="0">
+            <a:pPr marL="0" indent="0">
               <a:buNone/>
             </a:pPr>
             <a:r>
@@ -9571,9 +9168,11 @@
       <p:sp>
         <p:nvSpPr>
           <p:cNvPr id="3" name="Text 0"/>
-          <p:cNvSpPr/>
+          <p:cNvSpPr>
+            <a:spLocks noGrp="1"/>
+          </p:cNvSpPr>
           <p:nvPr>
-            <p:ph idx="101" type="body" hasCustomPrompt="1"/>
+            <p:ph type="body" idx="101" hasCustomPrompt="1"/>
           </p:nvPr>
         </p:nvSpPr>
         <p:spPr>
@@ -9591,7 +9190,7 @@
           <a:bodyPr wrap="square" lIns="0" tIns="0" rIns="0" bIns="0" rtlCol="0" anchor="ctr"/>
           <a:lstStyle/>
           <a:p>
-            <a:pPr indent="0" marL="0">
+            <a:pPr marL="0" indent="0">
               <a:buNone/>
             </a:pPr>
             <a:r>
@@ -9609,9 +9208,11 @@
       <p:sp>
         <p:nvSpPr>
           <p:cNvPr id="4" name="Text 0"/>
-          <p:cNvSpPr/>
+          <p:cNvSpPr>
+            <a:spLocks noGrp="1"/>
+          </p:cNvSpPr>
           <p:nvPr>
-            <p:ph idx="102" type="body" hasCustomPrompt="1"/>
+            <p:ph type="body" idx="102" hasCustomPrompt="1"/>
           </p:nvPr>
         </p:nvSpPr>
         <p:spPr>
@@ -9629,7 +9230,7 @@
           <a:bodyPr wrap="square" lIns="0" tIns="0" rIns="0" bIns="0" rtlCol="0" anchor="ctr"/>
           <a:lstStyle/>
           <a:p>
-            <a:pPr indent="0" marL="0">
+            <a:pPr marL="0" indent="0">
               <a:buNone/>
             </a:pPr>
             <a:r>
@@ -9692,7 +9293,7 @@
           <a:bodyPr wrap="square" lIns="0" tIns="0" rIns="0" bIns="0" rtlCol="0" anchor="t"/>
           <a:lstStyle/>
           <a:p>
-            <a:pPr indent="0" marL="0">
+            <a:pPr marL="0" indent="0">
               <a:lnSpc>
                 <a:spcPct val="106000"/>
               </a:lnSpc>
@@ -9734,7 +9335,7 @@
           <a:bodyPr wrap="square" lIns="0" tIns="0" rIns="0" bIns="0" rtlCol="0" anchor="t"/>
           <a:lstStyle/>
           <a:p>
-            <a:pPr indent="0" marL="0">
+            <a:pPr marL="0" indent="0">
               <a:lnSpc>
                 <a:spcPct val="106000"/>
               </a:lnSpc>
@@ -9754,7 +9355,7 @@
             <a:endParaRPr lang="en-US" sz="1800" dirty="0"/>
           </a:p>
           <a:p>
-            <a:pPr indent="0" marL="0">
+            <a:pPr marL="0" indent="0">
               <a:lnSpc>
                 <a:spcPct val="106000"/>
               </a:lnSpc>
@@ -9823,7 +9424,7 @@
           <a:bodyPr wrap="square" lIns="0" tIns="0" rIns="0" bIns="0" rtlCol="0" anchor="t"/>
           <a:lstStyle/>
           <a:p>
-            <a:pPr indent="0" marL="0">
+            <a:pPr marL="0" indent="0">
               <a:lnSpc>
                 <a:spcPct val="106000"/>
               </a:lnSpc>
@@ -9865,7 +9466,7 @@
           <a:bodyPr wrap="square" lIns="0" tIns="0" rIns="0" bIns="0" rtlCol="0" anchor="t"/>
           <a:lstStyle/>
           <a:p>
-            <a:pPr indent="0" marL="0">
+            <a:pPr marL="0" indent="0">
               <a:lnSpc>
                 <a:spcPct val="106000"/>
               </a:lnSpc>
@@ -9885,7 +9486,7 @@
             <a:endParaRPr lang="en-US" sz="1800" dirty="0"/>
           </a:p>
           <a:p>
-            <a:pPr indent="0" marL="0">
+            <a:pPr marL="0" indent="0">
               <a:lnSpc>
                 <a:spcPct val="106000"/>
               </a:lnSpc>
@@ -9954,7 +9555,7 @@
           <a:bodyPr wrap="square" lIns="0" tIns="0" rIns="0" bIns="0" rtlCol="0" anchor="t"/>
           <a:lstStyle/>
           <a:p>
-            <a:pPr indent="0" marL="0">
+            <a:pPr marL="0" indent="0">
               <a:lnSpc>
                 <a:spcPct val="106000"/>
               </a:lnSpc>
@@ -9996,7 +9597,7 @@
           <a:bodyPr wrap="square" lIns="0" tIns="0" rIns="0" bIns="0" rtlCol="0" anchor="t"/>
           <a:lstStyle/>
           <a:p>
-            <a:pPr indent="0" marL="0">
+            <a:pPr marL="0" indent="0">
               <a:lnSpc>
                 <a:spcPct val="106000"/>
               </a:lnSpc>
@@ -10016,7 +9617,7 @@
             <a:endParaRPr lang="en-US" sz="1800" dirty="0"/>
           </a:p>
           <a:p>
-            <a:pPr indent="0" marL="0">
+            <a:pPr marL="0" indent="0">
               <a:lnSpc>
                 <a:spcPct val="106000"/>
               </a:lnSpc>
@@ -10085,7 +9686,7 @@
           <a:bodyPr wrap="square" lIns="0" tIns="0" rIns="0" bIns="0" rtlCol="0" anchor="t"/>
           <a:lstStyle/>
           <a:p>
-            <a:pPr indent="0" marL="0">
+            <a:pPr marL="0" indent="0">
               <a:lnSpc>
                 <a:spcPct val="106000"/>
               </a:lnSpc>
@@ -10127,7 +9728,7 @@
           <a:bodyPr wrap="square" lIns="0" tIns="0" rIns="0" bIns="0" rtlCol="0" anchor="t"/>
           <a:lstStyle/>
           <a:p>
-            <a:pPr indent="0" marL="0">
+            <a:pPr marL="0" indent="0">
               <a:lnSpc>
                 <a:spcPct val="106000"/>
               </a:lnSpc>
@@ -10147,7 +9748,7 @@
             <a:endParaRPr lang="en-US" sz="1800" dirty="0"/>
           </a:p>
           <a:p>
-            <a:pPr indent="0" marL="0">
+            <a:pPr marL="0" indent="0">
               <a:lnSpc>
                 <a:spcPct val="106000"/>
               </a:lnSpc>
@@ -10216,7 +9817,7 @@
           <a:bodyPr wrap="square" lIns="0" tIns="0" rIns="0" bIns="0" rtlCol="0" anchor="t"/>
           <a:lstStyle/>
           <a:p>
-            <a:pPr indent="0" marL="0">
+            <a:pPr marL="0" indent="0">
               <a:lnSpc>
                 <a:spcPct val="106000"/>
               </a:lnSpc>
@@ -10258,7 +9859,7 @@
           <a:bodyPr wrap="square" lIns="0" tIns="0" rIns="0" bIns="0" rtlCol="0" anchor="t"/>
           <a:lstStyle/>
           <a:p>
-            <a:pPr indent="0" marL="0">
+            <a:pPr marL="0" indent="0">
               <a:lnSpc>
                 <a:spcPct val="106000"/>
               </a:lnSpc>
@@ -10278,7 +9879,7 @@
             <a:endParaRPr lang="en-US" sz="1800" dirty="0"/>
           </a:p>
           <a:p>
-            <a:pPr indent="0" marL="0">
+            <a:pPr marL="0" indent="0">
               <a:lnSpc>
                 <a:spcPct val="106000"/>
               </a:lnSpc>
@@ -10347,7 +9948,7 @@
           <a:bodyPr wrap="square" lIns="0" tIns="0" rIns="0" bIns="0" rtlCol="0" anchor="t"/>
           <a:lstStyle/>
           <a:p>
-            <a:pPr indent="0" marL="0">
+            <a:pPr marL="0" indent="0">
               <a:lnSpc>
                 <a:spcPct val="106000"/>
               </a:lnSpc>
@@ -10389,7 +9990,7 @@
           <a:bodyPr wrap="square" lIns="0" tIns="0" rIns="0" bIns="0" rtlCol="0" anchor="t"/>
           <a:lstStyle/>
           <a:p>
-            <a:pPr indent="0" marL="0">
+            <a:pPr marL="0" indent="0">
               <a:lnSpc>
                 <a:spcPct val="106000"/>
               </a:lnSpc>
@@ -10409,7 +10010,7 @@
             <a:endParaRPr lang="en-US" sz="1800" dirty="0"/>
           </a:p>
           <a:p>
-            <a:pPr indent="0" marL="0">
+            <a:pPr marL="0" indent="0">
               <a:lnSpc>
                 <a:spcPct val="106000"/>
               </a:lnSpc>
@@ -10451,7 +10052,7 @@
           <a:bodyPr wrap="square" lIns="0" tIns="0" rIns="0" bIns="0" rtlCol="0" anchor="t"/>
           <a:lstStyle/>
           <a:p>
-            <a:pPr indent="0" marL="0">
+            <a:pPr marL="0" indent="0">
               <a:lnSpc>
                 <a:spcPct val="106000"/>
               </a:lnSpc>
@@ -10492,7 +10093,7 @@
           </a:prstGeom>
           <a:extLst>
             <a:ext uri="{C572A759-6A51-4108-AA02-DFA0A04FC94B}">
-              <ma14:wrappingTextBoxFlag xmlns:ma14="http://schemas.microsoft.com/office/mac/drawingml/2011/main" val="0"/>
+              <ma14:wrappingTextBoxFlag xmlns:ma14="http://schemas.microsoft.com/office/mac/drawingml/2011/main" xmlns="" val="0"/>
             </a:ext>
           </a:extLst>
         </p:spPr>
@@ -10510,7 +10111,7 @@
           <a:p>
             <a:pPr algn="r"/>
             <a:fld id="{F7021451-1387-4CA6-816F-3879F97B5CBC}" type="slidenum">
-              <a:rPr b="0" lang="en-US"/>
+              <a:rPr lang="en-US" b="0"/>
               <a:t>16</a:t>
             </a:fld>
             <a:endParaRPr lang="en-US"/>
@@ -10545,9 +10146,11 @@
       <p:sp>
         <p:nvSpPr>
           <p:cNvPr id="2" name="Text 0"/>
-          <p:cNvSpPr/>
+          <p:cNvSpPr>
+            <a:spLocks noGrp="1"/>
+          </p:cNvSpPr>
           <p:nvPr>
-            <p:ph idx="100" type="title" hasCustomPrompt="1"/>
+            <p:ph type="title" idx="100" hasCustomPrompt="1"/>
           </p:nvPr>
         </p:nvSpPr>
         <p:spPr>
@@ -10565,7 +10168,7 @@
           <a:bodyPr wrap="square" lIns="0" tIns="0" rIns="0" bIns="0" rtlCol="0" anchor="ctr"/>
           <a:lstStyle/>
           <a:p>
-            <a:pPr indent="0" marL="0">
+            <a:pPr marL="0" indent="0">
               <a:buNone/>
             </a:pPr>
             <a:r>
@@ -10586,9 +10189,11 @@
       <p:sp>
         <p:nvSpPr>
           <p:cNvPr id="3" name="Text 0"/>
-          <p:cNvSpPr/>
+          <p:cNvSpPr>
+            <a:spLocks noGrp="1"/>
+          </p:cNvSpPr>
           <p:nvPr>
-            <p:ph idx="101" type="body" hasCustomPrompt="1"/>
+            <p:ph type="body" idx="101" hasCustomPrompt="1"/>
           </p:nvPr>
         </p:nvSpPr>
         <p:spPr>
@@ -10606,7 +10211,7 @@
           <a:bodyPr wrap="square" lIns="0" tIns="0" rIns="0" bIns="0" rtlCol="0" anchor="ctr"/>
           <a:lstStyle/>
           <a:p>
-            <a:pPr indent="0" marL="0">
+            <a:pPr marL="0" indent="0">
               <a:buNone/>
             </a:pPr>
             <a:r>
@@ -10624,9 +10229,11 @@
       <p:sp>
         <p:nvSpPr>
           <p:cNvPr id="4" name="Text 0"/>
-          <p:cNvSpPr/>
+          <p:cNvSpPr>
+            <a:spLocks noGrp="1"/>
+          </p:cNvSpPr>
           <p:nvPr>
-            <p:ph idx="102" type="body" hasCustomPrompt="1"/>
+            <p:ph type="body" idx="102" hasCustomPrompt="1"/>
           </p:nvPr>
         </p:nvSpPr>
         <p:spPr>
@@ -10644,7 +10251,7 @@
           <a:bodyPr wrap="square" lIns="0" tIns="0" rIns="0" bIns="0" rtlCol="0" anchor="ctr"/>
           <a:lstStyle/>
           <a:p>
-            <a:pPr indent="0" marL="0">
+            <a:pPr marL="0" indent="0">
               <a:buNone/>
             </a:pPr>
             <a:r>
@@ -10734,7 +10341,7 @@
           <a:bodyPr wrap="square" lIns="0" tIns="0" rIns="0" bIns="0" rtlCol="0" anchor="t"/>
           <a:lstStyle/>
           <a:p>
-            <a:pPr indent="0" marL="0">
+            <a:pPr marL="0" indent="0">
               <a:lnSpc>
                 <a:spcPct val="106000"/>
               </a:lnSpc>
@@ -10776,7 +10383,7 @@
           <a:bodyPr wrap="square" lIns="0" tIns="0" rIns="0" bIns="0" rtlCol="0" anchor="t"/>
           <a:lstStyle/>
           <a:p>
-            <a:pPr indent="0" marL="0">
+            <a:pPr marL="0" indent="0">
               <a:lnSpc>
                 <a:spcPct val="106000"/>
               </a:lnSpc>
@@ -10796,7 +10403,7 @@
             <a:endParaRPr lang="en-US" sz="2000" dirty="0"/>
           </a:p>
           <a:p>
-            <a:pPr indent="0" marL="0">
+            <a:pPr marL="0" indent="0">
               <a:lnSpc>
                 <a:spcPct val="106000"/>
               </a:lnSpc>
@@ -10816,7 +10423,7 @@
             <a:endParaRPr lang="en-US" sz="2000" dirty="0"/>
           </a:p>
           <a:p>
-            <a:pPr indent="0" marL="0">
+            <a:pPr marL="0" indent="0">
               <a:lnSpc>
                 <a:spcPct val="106000"/>
               </a:lnSpc>
@@ -10836,7 +10443,7 @@
             <a:endParaRPr lang="en-US" sz="2000" dirty="0"/>
           </a:p>
           <a:p>
-            <a:pPr indent="0" marL="0">
+            <a:pPr marL="0" indent="0">
               <a:lnSpc>
                 <a:spcPct val="106000"/>
               </a:lnSpc>
@@ -10878,7 +10485,7 @@
           <a:bodyPr wrap="square" lIns="0" tIns="0" rIns="0" bIns="0" rtlCol="0" anchor="t"/>
           <a:lstStyle/>
           <a:p>
-            <a:pPr indent="0" marL="0">
+            <a:pPr marL="0" indent="0">
               <a:lnSpc>
                 <a:spcPct val="106000"/>
               </a:lnSpc>
@@ -10920,7 +10527,7 @@
           <a:bodyPr wrap="square" lIns="0" tIns="0" rIns="0" bIns="0" rtlCol="0" anchor="t"/>
           <a:lstStyle/>
           <a:p>
-            <a:pPr indent="0" marL="0">
+            <a:pPr marL="0" indent="0">
               <a:lnSpc>
                 <a:spcPct val="106000"/>
               </a:lnSpc>
@@ -10940,7 +10547,7 @@
             <a:endParaRPr lang="en-US" sz="2000" dirty="0"/>
           </a:p>
           <a:p>
-            <a:pPr indent="0" marL="0">
+            <a:pPr marL="0" indent="0">
               <a:lnSpc>
                 <a:spcPct val="106000"/>
               </a:lnSpc>
@@ -10960,7 +10567,7 @@
             <a:endParaRPr lang="en-US" sz="2000" dirty="0"/>
           </a:p>
           <a:p>
-            <a:pPr indent="0" marL="0">
+            <a:pPr marL="0" indent="0">
               <a:lnSpc>
                 <a:spcPct val="106000"/>
               </a:lnSpc>
@@ -10980,7 +10587,7 @@
             <a:endParaRPr lang="en-US" sz="2000" dirty="0"/>
           </a:p>
           <a:p>
-            <a:pPr indent="0" marL="0">
+            <a:pPr marL="0" indent="0">
               <a:lnSpc>
                 <a:spcPct val="106000"/>
               </a:lnSpc>
@@ -11049,7 +10656,7 @@
           <a:bodyPr wrap="square" lIns="0" tIns="0" rIns="0" bIns="0" rtlCol="0" anchor="ctr"/>
           <a:lstStyle/>
           <a:p>
-            <a:pPr indent="0" marL="0">
+            <a:pPr marL="0" indent="0">
               <a:lnSpc>
                 <a:spcPct val="106000"/>
               </a:lnSpc>
@@ -11090,7 +10697,7 @@
           </a:prstGeom>
           <a:extLst>
             <a:ext uri="{C572A759-6A51-4108-AA02-DFA0A04FC94B}">
-              <ma14:wrappingTextBoxFlag xmlns:ma14="http://schemas.microsoft.com/office/mac/drawingml/2011/main" val="0"/>
+              <ma14:wrappingTextBoxFlag xmlns:ma14="http://schemas.microsoft.com/office/mac/drawingml/2011/main" xmlns="" val="0"/>
             </a:ext>
           </a:extLst>
         </p:spPr>
@@ -11108,7 +10715,7 @@
           <a:p>
             <a:pPr algn="r"/>
             <a:fld id="{F7021451-1387-4CA6-816F-3879F97B5CBC}" type="slidenum">
-              <a:rPr b="0" lang="en-US"/>
+              <a:rPr lang="en-US" b="0"/>
               <a:t>17</a:t>
             </a:fld>
             <a:endParaRPr lang="en-US"/>
@@ -11143,9 +10750,11 @@
       <p:sp>
         <p:nvSpPr>
           <p:cNvPr id="2" name="Text 0"/>
-          <p:cNvSpPr/>
+          <p:cNvSpPr>
+            <a:spLocks noGrp="1"/>
+          </p:cNvSpPr>
           <p:nvPr>
-            <p:ph idx="100" type="title" hasCustomPrompt="1"/>
+            <p:ph type="title" idx="100" hasCustomPrompt="1"/>
           </p:nvPr>
         </p:nvSpPr>
         <p:spPr>
@@ -11163,7 +10772,7 @@
           <a:bodyPr wrap="square" lIns="0" tIns="0" rIns="0" bIns="0" rtlCol="0" anchor="ctr"/>
           <a:lstStyle/>
           <a:p>
-            <a:pPr indent="0" marL="0">
+            <a:pPr marL="0" indent="0">
               <a:buNone/>
             </a:pPr>
             <a:r>
@@ -11184,9 +10793,11 @@
       <p:sp>
         <p:nvSpPr>
           <p:cNvPr id="3" name="Text 0"/>
-          <p:cNvSpPr/>
+          <p:cNvSpPr>
+            <a:spLocks noGrp="1"/>
+          </p:cNvSpPr>
           <p:nvPr>
-            <p:ph idx="101" type="body" hasCustomPrompt="1"/>
+            <p:ph type="body" idx="101" hasCustomPrompt="1"/>
           </p:nvPr>
         </p:nvSpPr>
         <p:spPr>
@@ -11204,7 +10815,7 @@
           <a:bodyPr wrap="square" lIns="0" tIns="0" rIns="0" bIns="0" rtlCol="0" anchor="ctr"/>
           <a:lstStyle/>
           <a:p>
-            <a:pPr indent="0" marL="0">
+            <a:pPr marL="0" indent="0">
               <a:buNone/>
             </a:pPr>
             <a:r>
@@ -11222,9 +10833,11 @@
       <p:sp>
         <p:nvSpPr>
           <p:cNvPr id="4" name="Text 0"/>
-          <p:cNvSpPr/>
+          <p:cNvSpPr>
+            <a:spLocks noGrp="1"/>
+          </p:cNvSpPr>
           <p:nvPr>
-            <p:ph idx="102" type="body" hasCustomPrompt="1"/>
+            <p:ph type="body" idx="102" hasCustomPrompt="1"/>
           </p:nvPr>
         </p:nvSpPr>
         <p:spPr>
@@ -11242,7 +10855,7 @@
           <a:bodyPr wrap="square" lIns="0" tIns="0" rIns="0" bIns="0" rtlCol="0" anchor="ctr"/>
           <a:lstStyle/>
           <a:p>
-            <a:pPr indent="0" marL="0">
+            <a:pPr marL="0" indent="0">
               <a:buNone/>
             </a:pPr>
             <a:r>
@@ -11357,7 +10970,7 @@
           <a:bodyPr wrap="square" lIns="0" tIns="0" rIns="0" bIns="0" rtlCol="0" anchor="ctr"/>
           <a:lstStyle/>
           <a:p>
-            <a:pPr algn="ctr" indent="0" marL="0">
+            <a:pPr marL="0" indent="0" algn="ctr">
               <a:lnSpc>
                 <a:spcPct val="106000"/>
               </a:lnSpc>
@@ -11381,7 +10994,7 @@
       <p:sp>
         <p:nvSpPr>
           <p:cNvPr id="10" name="Text 314: Firebase / BaaS">
-            <a:hlinkClick r:id="rId1" tooltip=""/>
+            <a:hlinkClick r:id="rId3"/>
           </p:cNvPr>
           <p:cNvSpPr txBox="1"/>
           <p:nvPr/>
@@ -11401,7 +11014,7 @@
           <a:bodyPr wrap="square" lIns="0" tIns="0" rIns="0" bIns="0" rtlCol="0" anchor="t"/>
           <a:lstStyle/>
           <a:p>
-            <a:pPr indent="0" marL="0">
+            <a:pPr marL="0" indent="0">
               <a:lnSpc>
                 <a:spcPct val="106000"/>
               </a:lnSpc>
@@ -11415,7 +11028,7 @@
                 <a:latin typeface="+mn-lt" pitchFamily="34" charset="0"/>
                 <a:ea typeface="+mn-lt" pitchFamily="34" charset="-122"/>
                 <a:cs typeface="+mn-lt" pitchFamily="34" charset="-120"/>
-                <a:hlinkClick r:id="rId1" invalidUrl="" action="" tgtFrame="" tooltip="" history="1" highlightClick="0" endSnd="0">
+                <a:hlinkClick r:id="rId3">
                   <a:extLst>
                     <a:ext uri="{A12FA001-AC4F-418D-AE19-62706E023703}">
                       <ahyp:hlinkClr xmlns:ahyp="http://schemas.microsoft.com/office/drawing/2018/hyperlinkcolor" val="tx"/>
@@ -11432,7 +11045,7 @@
       <p:sp>
         <p:nvSpPr>
           <p:cNvPr id="11" name="Text 315: firebase.google.com">
-            <a:hlinkClick r:id="rId2" tooltip=""/>
+            <a:hlinkClick r:id="rId3"/>
           </p:cNvPr>
           <p:cNvSpPr txBox="1"/>
           <p:nvPr/>
@@ -11452,7 +11065,7 @@
           <a:bodyPr wrap="square" lIns="0" tIns="0" rIns="0" bIns="0" rtlCol="0" anchor="t"/>
           <a:lstStyle/>
           <a:p>
-            <a:pPr indent="0" marL="0">
+            <a:pPr marL="0" indent="0">
               <a:lnSpc>
                 <a:spcPct val="106000"/>
               </a:lnSpc>
@@ -11466,7 +11079,7 @@
                 <a:latin typeface="+mn-lt" pitchFamily="34" charset="0"/>
                 <a:ea typeface="+mn-lt" pitchFamily="34" charset="-122"/>
                 <a:cs typeface="+mn-lt" pitchFamily="34" charset="-120"/>
-                <a:hlinkClick r:id="rId2" invalidUrl="" action="" tgtFrame="" tooltip="" history="1" highlightClick="0" endSnd="0">
+                <a:hlinkClick r:id="rId3">
                   <a:extLst>
                     <a:ext uri="{A12FA001-AC4F-418D-AE19-62706E023703}">
                       <ahyp:hlinkClr xmlns:ahyp="http://schemas.microsoft.com/office/drawing/2018/hyperlinkcolor" val="tx"/>
@@ -11526,7 +11139,7 @@
           <a:bodyPr wrap="square" lIns="0" tIns="0" rIns="0" bIns="0" rtlCol="0" anchor="ctr"/>
           <a:lstStyle/>
           <a:p>
-            <a:pPr algn="ctr" indent="0" marL="0">
+            <a:pPr marL="0" indent="0" algn="ctr">
               <a:lnSpc>
                 <a:spcPct val="106000"/>
               </a:lnSpc>
@@ -11550,7 +11163,7 @@
       <p:sp>
         <p:nvSpPr>
           <p:cNvPr id="14" name="Text 317: Google Auth cho Flutter">
-            <a:hlinkClick r:id="rId3" tooltip=""/>
+            <a:hlinkClick r:id="rId4"/>
           </p:cNvPr>
           <p:cNvSpPr txBox="1"/>
           <p:nvPr/>
@@ -11570,7 +11183,7 @@
           <a:bodyPr wrap="square" lIns="0" tIns="0" rIns="0" bIns="0" rtlCol="0" anchor="t"/>
           <a:lstStyle/>
           <a:p>
-            <a:pPr indent="0" marL="0">
+            <a:pPr marL="0" indent="0">
               <a:lnSpc>
                 <a:spcPct val="106000"/>
               </a:lnSpc>
@@ -11584,7 +11197,7 @@
                 <a:latin typeface="+mn-lt" pitchFamily="34" charset="0"/>
                 <a:ea typeface="+mn-lt" pitchFamily="34" charset="-122"/>
                 <a:cs typeface="+mn-lt" pitchFamily="34" charset="-120"/>
-                <a:hlinkClick r:id="rId3" invalidUrl="" action="" tgtFrame="" tooltip="" history="1" highlightClick="0" endSnd="0">
+                <a:hlinkClick r:id="rId4">
                   <a:extLst>
                     <a:ext uri="{A12FA001-AC4F-418D-AE19-62706E023703}">
                       <ahyp:hlinkClr xmlns:ahyp="http://schemas.microsoft.com/office/drawing/2018/hyperlinkcolor" val="tx"/>
@@ -11601,7 +11214,7 @@
       <p:sp>
         <p:nvSpPr>
           <p:cNvPr id="15" name="Text 318: firebase.google.com">
-            <a:hlinkClick r:id="rId4" tooltip=""/>
+            <a:hlinkClick r:id="rId4"/>
           </p:cNvPr>
           <p:cNvSpPr txBox="1"/>
           <p:nvPr/>
@@ -11621,7 +11234,7 @@
           <a:bodyPr wrap="square" lIns="0" tIns="0" rIns="0" bIns="0" rtlCol="0" anchor="t"/>
           <a:lstStyle/>
           <a:p>
-            <a:pPr indent="0" marL="0">
+            <a:pPr marL="0" indent="0">
               <a:lnSpc>
                 <a:spcPct val="106000"/>
               </a:lnSpc>
@@ -11635,7 +11248,7 @@
                 <a:latin typeface="+mn-lt" pitchFamily="34" charset="0"/>
                 <a:ea typeface="+mn-lt" pitchFamily="34" charset="-122"/>
                 <a:cs typeface="+mn-lt" pitchFamily="34" charset="-120"/>
-                <a:hlinkClick r:id="rId4" invalidUrl="" action="" tgtFrame="" tooltip="" history="1" highlightClick="0" endSnd="0">
+                <a:hlinkClick r:id="rId4">
                   <a:extLst>
                     <a:ext uri="{A12FA001-AC4F-418D-AE19-62706E023703}">
                       <ahyp:hlinkClr xmlns:ahyp="http://schemas.microsoft.com/office/drawing/2018/hyperlinkcolor" val="tx"/>
@@ -11695,7 +11308,7 @@
           <a:bodyPr wrap="square" lIns="0" tIns="0" rIns="0" bIns="0" rtlCol="0" anchor="ctr"/>
           <a:lstStyle/>
           <a:p>
-            <a:pPr algn="ctr" indent="0" marL="0">
+            <a:pPr marL="0" indent="0" algn="ctr">
               <a:lnSpc>
                 <a:spcPct val="106000"/>
               </a:lnSpc>
@@ -11719,7 +11332,7 @@
       <p:sp>
         <p:nvSpPr>
           <p:cNvPr id="18" name="Text 320: Firestore Security Rules">
-            <a:hlinkClick r:id="rId5" tooltip=""/>
+            <a:hlinkClick r:id="rId5"/>
           </p:cNvPr>
           <p:cNvSpPr txBox="1"/>
           <p:nvPr/>
@@ -11739,7 +11352,7 @@
           <a:bodyPr wrap="square" lIns="0" tIns="0" rIns="0" bIns="0" rtlCol="0" anchor="t"/>
           <a:lstStyle/>
           <a:p>
-            <a:pPr indent="0" marL="0">
+            <a:pPr marL="0" indent="0">
               <a:lnSpc>
                 <a:spcPct val="106000"/>
               </a:lnSpc>
@@ -11753,7 +11366,7 @@
                 <a:latin typeface="+mn-lt" pitchFamily="34" charset="0"/>
                 <a:ea typeface="+mn-lt" pitchFamily="34" charset="-122"/>
                 <a:cs typeface="+mn-lt" pitchFamily="34" charset="-120"/>
-                <a:hlinkClick r:id="rId5" invalidUrl="" action="" tgtFrame="" tooltip="" history="1" highlightClick="0" endSnd="0">
+                <a:hlinkClick r:id="rId5">
                   <a:extLst>
                     <a:ext uri="{A12FA001-AC4F-418D-AE19-62706E023703}">
                       <ahyp:hlinkClr xmlns:ahyp="http://schemas.microsoft.com/office/drawing/2018/hyperlinkcolor" val="tx"/>
@@ -11770,7 +11383,7 @@
       <p:sp>
         <p:nvSpPr>
           <p:cNvPr id="19" name="Text 321: firebase.google.com">
-            <a:hlinkClick r:id="rId6" tooltip=""/>
+            <a:hlinkClick r:id="rId5"/>
           </p:cNvPr>
           <p:cNvSpPr txBox="1"/>
           <p:nvPr/>
@@ -11790,7 +11403,7 @@
           <a:bodyPr wrap="square" lIns="0" tIns="0" rIns="0" bIns="0" rtlCol="0" anchor="t"/>
           <a:lstStyle/>
           <a:p>
-            <a:pPr indent="0" marL="0">
+            <a:pPr marL="0" indent="0">
               <a:lnSpc>
                 <a:spcPct val="106000"/>
               </a:lnSpc>
@@ -11804,7 +11417,7 @@
                 <a:latin typeface="+mn-lt" pitchFamily="34" charset="0"/>
                 <a:ea typeface="+mn-lt" pitchFamily="34" charset="-122"/>
                 <a:cs typeface="+mn-lt" pitchFamily="34" charset="-120"/>
-                <a:hlinkClick r:id="rId6" invalidUrl="" action="" tgtFrame="" tooltip="" history="1" highlightClick="0" endSnd="0">
+                <a:hlinkClick r:id="rId5">
                   <a:extLst>
                     <a:ext uri="{A12FA001-AC4F-418D-AE19-62706E023703}">
                       <ahyp:hlinkClr xmlns:ahyp="http://schemas.microsoft.com/office/drawing/2018/hyperlinkcolor" val="tx"/>
@@ -11864,7 +11477,7 @@
           <a:bodyPr wrap="square" lIns="0" tIns="0" rIns="0" bIns="0" rtlCol="0" anchor="ctr"/>
           <a:lstStyle/>
           <a:p>
-            <a:pPr algn="ctr" indent="0" marL="0">
+            <a:pPr marL="0" indent="0" algn="ctr">
               <a:lnSpc>
                 <a:spcPct val="106000"/>
               </a:lnSpc>
@@ -11888,7 +11501,7 @@
       <p:sp>
         <p:nvSpPr>
           <p:cNvPr id="22" name="Text 323: Storage: tải bằng SDK">
-            <a:hlinkClick r:id="rId7" tooltip=""/>
+            <a:hlinkClick r:id="rId6"/>
           </p:cNvPr>
           <p:cNvSpPr txBox="1"/>
           <p:nvPr/>
@@ -11908,7 +11521,7 @@
           <a:bodyPr wrap="square" lIns="0" tIns="0" rIns="0" bIns="0" rtlCol="0" anchor="t"/>
           <a:lstStyle/>
           <a:p>
-            <a:pPr indent="0" marL="0">
+            <a:pPr marL="0" indent="0">
               <a:lnSpc>
                 <a:spcPct val="106000"/>
               </a:lnSpc>
@@ -11922,7 +11535,7 @@
                 <a:latin typeface="+mn-lt" pitchFamily="34" charset="0"/>
                 <a:ea typeface="+mn-lt" pitchFamily="34" charset="-122"/>
                 <a:cs typeface="+mn-lt" pitchFamily="34" charset="-120"/>
-                <a:hlinkClick r:id="rId7" invalidUrl="" action="" tgtFrame="" tooltip="" history="1" highlightClick="0" endSnd="0">
+                <a:hlinkClick r:id="rId6">
                   <a:extLst>
                     <a:ext uri="{A12FA001-AC4F-418D-AE19-62706E023703}">
                       <ahyp:hlinkClr xmlns:ahyp="http://schemas.microsoft.com/office/drawing/2018/hyperlinkcolor" val="tx"/>
@@ -11939,7 +11552,7 @@
       <p:sp>
         <p:nvSpPr>
           <p:cNvPr id="23" name="Text 324: firebase.google.com">
-            <a:hlinkClick r:id="rId8" tooltip=""/>
+            <a:hlinkClick r:id="rId6"/>
           </p:cNvPr>
           <p:cNvSpPr txBox="1"/>
           <p:nvPr/>
@@ -11959,7 +11572,7 @@
           <a:bodyPr wrap="square" lIns="0" tIns="0" rIns="0" bIns="0" rtlCol="0" anchor="t"/>
           <a:lstStyle/>
           <a:p>
-            <a:pPr indent="0" marL="0">
+            <a:pPr marL="0" indent="0">
               <a:lnSpc>
                 <a:spcPct val="106000"/>
               </a:lnSpc>
@@ -11973,7 +11586,7 @@
                 <a:latin typeface="+mn-lt" pitchFamily="34" charset="0"/>
                 <a:ea typeface="+mn-lt" pitchFamily="34" charset="-122"/>
                 <a:cs typeface="+mn-lt" pitchFamily="34" charset="-120"/>
-                <a:hlinkClick r:id="rId8" invalidUrl="" action="" tgtFrame="" tooltip="" history="1" highlightClick="0" endSnd="0">
+                <a:hlinkClick r:id="rId6">
                   <a:extLst>
                     <a:ext uri="{A12FA001-AC4F-418D-AE19-62706E023703}">
                       <ahyp:hlinkClr xmlns:ahyp="http://schemas.microsoft.com/office/drawing/2018/hyperlinkcolor" val="tx"/>
@@ -12033,7 +11646,7 @@
           <a:bodyPr wrap="square" lIns="0" tIns="0" rIns="0" bIns="0" rtlCol="0" anchor="ctr"/>
           <a:lstStyle/>
           <a:p>
-            <a:pPr algn="ctr" indent="0" marL="0">
+            <a:pPr marL="0" indent="0" algn="ctr">
               <a:lnSpc>
                 <a:spcPct val="106000"/>
               </a:lnSpc>
@@ -12057,7 +11670,7 @@
       <p:sp>
         <p:nvSpPr>
           <p:cNvPr id="26" name="Text 326: Storage Security Rules">
-            <a:hlinkClick r:id="rId9" tooltip=""/>
+            <a:hlinkClick r:id="rId7"/>
           </p:cNvPr>
           <p:cNvSpPr txBox="1"/>
           <p:nvPr/>
@@ -12077,7 +11690,7 @@
           <a:bodyPr wrap="square" lIns="0" tIns="0" rIns="0" bIns="0" rtlCol="0" anchor="t"/>
           <a:lstStyle/>
           <a:p>
-            <a:pPr indent="0" marL="0">
+            <a:pPr marL="0" indent="0">
               <a:lnSpc>
                 <a:spcPct val="106000"/>
               </a:lnSpc>
@@ -12091,7 +11704,7 @@
                 <a:latin typeface="+mn-lt" pitchFamily="34" charset="0"/>
                 <a:ea typeface="+mn-lt" pitchFamily="34" charset="-122"/>
                 <a:cs typeface="+mn-lt" pitchFamily="34" charset="-120"/>
-                <a:hlinkClick r:id="rId9" invalidUrl="" action="" tgtFrame="" tooltip="" history="1" highlightClick="0" endSnd="0">
+                <a:hlinkClick r:id="rId7">
                   <a:extLst>
                     <a:ext uri="{A12FA001-AC4F-418D-AE19-62706E023703}">
                       <ahyp:hlinkClr xmlns:ahyp="http://schemas.microsoft.com/office/drawing/2018/hyperlinkcolor" val="tx"/>
@@ -12108,7 +11721,7 @@
       <p:sp>
         <p:nvSpPr>
           <p:cNvPr id="27" name="Text 327: firebase.google.com">
-            <a:hlinkClick r:id="rId10" tooltip=""/>
+            <a:hlinkClick r:id="rId7"/>
           </p:cNvPr>
           <p:cNvSpPr txBox="1"/>
           <p:nvPr/>
@@ -12128,7 +11741,7 @@
           <a:bodyPr wrap="square" lIns="0" tIns="0" rIns="0" bIns="0" rtlCol="0" anchor="t"/>
           <a:lstStyle/>
           <a:p>
-            <a:pPr indent="0" marL="0">
+            <a:pPr marL="0" indent="0">
               <a:lnSpc>
                 <a:spcPct val="106000"/>
               </a:lnSpc>
@@ -12142,7 +11755,7 @@
                 <a:latin typeface="+mn-lt" pitchFamily="34" charset="0"/>
                 <a:ea typeface="+mn-lt" pitchFamily="34" charset="-122"/>
                 <a:cs typeface="+mn-lt" pitchFamily="34" charset="-120"/>
-                <a:hlinkClick r:id="rId10" invalidUrl="" action="" tgtFrame="" tooltip="" history="1" highlightClick="0" endSnd="0">
+                <a:hlinkClick r:id="rId7">
                   <a:extLst>
                     <a:ext uri="{A12FA001-AC4F-418D-AE19-62706E023703}">
                       <ahyp:hlinkClr xmlns:ahyp="http://schemas.microsoft.com/office/drawing/2018/hyperlinkcolor" val="tx"/>
@@ -12202,7 +11815,7 @@
           <a:bodyPr wrap="square" lIns="0" tIns="0" rIns="0" bIns="0" rtlCol="0" anchor="ctr"/>
           <a:lstStyle/>
           <a:p>
-            <a:pPr algn="ctr" indent="0" marL="0">
+            <a:pPr marL="0" indent="0" algn="ctr">
               <a:lnSpc>
                 <a:spcPct val="106000"/>
               </a:lnSpc>
@@ -12226,7 +11839,7 @@
       <p:sp>
         <p:nvSpPr>
           <p:cNvPr id="30" name="Text 329: Storage yêu cầu Blaze">
-            <a:hlinkClick r:id="rId11" tooltip=""/>
+            <a:hlinkClick r:id="rId8"/>
           </p:cNvPr>
           <p:cNvSpPr txBox="1"/>
           <p:nvPr/>
@@ -12246,7 +11859,7 @@
           <a:bodyPr wrap="square" lIns="0" tIns="0" rIns="0" bIns="0" rtlCol="0" anchor="t"/>
           <a:lstStyle/>
           <a:p>
-            <a:pPr indent="0" marL="0">
+            <a:pPr marL="0" indent="0">
               <a:lnSpc>
                 <a:spcPct val="106000"/>
               </a:lnSpc>
@@ -12260,7 +11873,7 @@
                 <a:latin typeface="+mn-lt" pitchFamily="34" charset="0"/>
                 <a:ea typeface="+mn-lt" pitchFamily="34" charset="-122"/>
                 <a:cs typeface="+mn-lt" pitchFamily="34" charset="-120"/>
-                <a:hlinkClick r:id="rId11" invalidUrl="" action="" tgtFrame="" tooltip="" history="1" highlightClick="0" endSnd="0">
+                <a:hlinkClick r:id="rId8">
                   <a:extLst>
                     <a:ext uri="{A12FA001-AC4F-418D-AE19-62706E023703}">
                       <ahyp:hlinkClr xmlns:ahyp="http://schemas.microsoft.com/office/drawing/2018/hyperlinkcolor" val="tx"/>
@@ -12277,7 +11890,7 @@
       <p:sp>
         <p:nvSpPr>
           <p:cNvPr id="31" name="Text 330: firebase.google.com">
-            <a:hlinkClick r:id="rId12" tooltip=""/>
+            <a:hlinkClick r:id="rId8"/>
           </p:cNvPr>
           <p:cNvSpPr txBox="1"/>
           <p:nvPr/>
@@ -12297,7 +11910,7 @@
           <a:bodyPr wrap="square" lIns="0" tIns="0" rIns="0" bIns="0" rtlCol="0" anchor="t"/>
           <a:lstStyle/>
           <a:p>
-            <a:pPr indent="0" marL="0">
+            <a:pPr marL="0" indent="0">
               <a:lnSpc>
                 <a:spcPct val="106000"/>
               </a:lnSpc>
@@ -12311,7 +11924,7 @@
                 <a:latin typeface="+mn-lt" pitchFamily="34" charset="0"/>
                 <a:ea typeface="+mn-lt" pitchFamily="34" charset="-122"/>
                 <a:cs typeface="+mn-lt" pitchFamily="34" charset="-120"/>
-                <a:hlinkClick r:id="rId12" invalidUrl="" action="" tgtFrame="" tooltip="" history="1" highlightClick="0" endSnd="0">
+                <a:hlinkClick r:id="rId8">
                   <a:extLst>
                     <a:ext uri="{A12FA001-AC4F-418D-AE19-62706E023703}">
                       <ahyp:hlinkClr xmlns:ahyp="http://schemas.microsoft.com/office/drawing/2018/hyperlinkcolor" val="tx"/>
@@ -12371,7 +11984,7 @@
           <a:bodyPr wrap="square" lIns="0" tIns="0" rIns="0" bIns="0" rtlCol="0" anchor="ctr"/>
           <a:lstStyle/>
           <a:p>
-            <a:pPr algn="ctr" indent="0" marL="0">
+            <a:pPr marL="0" indent="0" algn="ctr">
               <a:lnSpc>
                 <a:spcPct val="106000"/>
               </a:lnSpc>
@@ -12395,7 +12008,7 @@
       <p:sp>
         <p:nvSpPr>
           <p:cNvPr id="34" name="Text 332: Giá và budget alerts">
-            <a:hlinkClick r:id="rId13" tooltip=""/>
+            <a:hlinkClick r:id="rId9"/>
           </p:cNvPr>
           <p:cNvSpPr txBox="1"/>
           <p:nvPr/>
@@ -12415,7 +12028,7 @@
           <a:bodyPr wrap="square" lIns="0" tIns="0" rIns="0" bIns="0" rtlCol="0" anchor="t"/>
           <a:lstStyle/>
           <a:p>
-            <a:pPr indent="0" marL="0">
+            <a:pPr marL="0" indent="0">
               <a:lnSpc>
                 <a:spcPct val="106000"/>
               </a:lnSpc>
@@ -12429,7 +12042,7 @@
                 <a:latin typeface="+mn-lt" pitchFamily="34" charset="0"/>
                 <a:ea typeface="+mn-lt" pitchFamily="34" charset="-122"/>
                 <a:cs typeface="+mn-lt" pitchFamily="34" charset="-120"/>
-                <a:hlinkClick r:id="rId13" invalidUrl="" action="" tgtFrame="" tooltip="" history="1" highlightClick="0" endSnd="0">
+                <a:hlinkClick r:id="rId9">
                   <a:extLst>
                     <a:ext uri="{A12FA001-AC4F-418D-AE19-62706E023703}">
                       <ahyp:hlinkClr xmlns:ahyp="http://schemas.microsoft.com/office/drawing/2018/hyperlinkcolor" val="tx"/>
@@ -12446,7 +12059,7 @@
       <p:sp>
         <p:nvSpPr>
           <p:cNvPr id="35" name="Text 333: firebase.google.com">
-            <a:hlinkClick r:id="rId14" tooltip=""/>
+            <a:hlinkClick r:id="rId9"/>
           </p:cNvPr>
           <p:cNvSpPr txBox="1"/>
           <p:nvPr/>
@@ -12466,7 +12079,7 @@
           <a:bodyPr wrap="square" lIns="0" tIns="0" rIns="0" bIns="0" rtlCol="0" anchor="t"/>
           <a:lstStyle/>
           <a:p>
-            <a:pPr indent="0" marL="0">
+            <a:pPr marL="0" indent="0">
               <a:lnSpc>
                 <a:spcPct val="106000"/>
               </a:lnSpc>
@@ -12480,7 +12093,7 @@
                 <a:latin typeface="+mn-lt" pitchFamily="34" charset="0"/>
                 <a:ea typeface="+mn-lt" pitchFamily="34" charset="-122"/>
                 <a:cs typeface="+mn-lt" pitchFamily="34" charset="-120"/>
-                <a:hlinkClick r:id="rId14" invalidUrl="" action="" tgtFrame="" tooltip="" history="1" highlightClick="0" endSnd="0">
+                <a:hlinkClick r:id="rId9">
                   <a:extLst>
                     <a:ext uri="{A12FA001-AC4F-418D-AE19-62706E023703}">
                       <ahyp:hlinkClr xmlns:ahyp="http://schemas.microsoft.com/office/drawing/2018/hyperlinkcolor" val="tx"/>
@@ -12540,7 +12153,7 @@
           <a:bodyPr wrap="square" lIns="0" tIns="0" rIns="0" bIns="0" rtlCol="0" anchor="ctr"/>
           <a:lstStyle/>
           <a:p>
-            <a:pPr algn="ctr" indent="0" marL="0">
+            <a:pPr marL="0" indent="0" algn="ctr">
               <a:lnSpc>
                 <a:spcPct val="106000"/>
               </a:lnSpc>
@@ -12564,7 +12177,7 @@
       <p:sp>
         <p:nvSpPr>
           <p:cNvPr id="38" name="Text 335: NIST: Hybrid Cloud">
-            <a:hlinkClick r:id="rId15" tooltip=""/>
+            <a:hlinkClick r:id="rId10"/>
           </p:cNvPr>
           <p:cNvSpPr txBox="1"/>
           <p:nvPr/>
@@ -12584,7 +12197,7 @@
           <a:bodyPr wrap="square" lIns="0" tIns="0" rIns="0" bIns="0" rtlCol="0" anchor="t"/>
           <a:lstStyle/>
           <a:p>
-            <a:pPr indent="0" marL="0">
+            <a:pPr marL="0" indent="0">
               <a:lnSpc>
                 <a:spcPct val="106000"/>
               </a:lnSpc>
@@ -12598,7 +12211,7 @@
                 <a:latin typeface="+mn-lt" pitchFamily="34" charset="0"/>
                 <a:ea typeface="+mn-lt" pitchFamily="34" charset="-122"/>
                 <a:cs typeface="+mn-lt" pitchFamily="34" charset="-120"/>
-                <a:hlinkClick r:id="rId15" invalidUrl="" action="" tgtFrame="" tooltip="" history="1" highlightClick="0" endSnd="0">
+                <a:hlinkClick r:id="rId10">
                   <a:extLst>
                     <a:ext uri="{A12FA001-AC4F-418D-AE19-62706E023703}">
                       <ahyp:hlinkClr xmlns:ahyp="http://schemas.microsoft.com/office/drawing/2018/hyperlinkcolor" val="tx"/>
@@ -12615,7 +12228,7 @@
       <p:sp>
         <p:nvSpPr>
           <p:cNvPr id="39" name="Text 336: csrc.nist.gov">
-            <a:hlinkClick r:id="rId16" tooltip=""/>
+            <a:hlinkClick r:id="rId10"/>
           </p:cNvPr>
           <p:cNvSpPr txBox="1"/>
           <p:nvPr/>
@@ -12635,7 +12248,7 @@
           <a:bodyPr wrap="square" lIns="0" tIns="0" rIns="0" bIns="0" rtlCol="0" anchor="t"/>
           <a:lstStyle/>
           <a:p>
-            <a:pPr indent="0" marL="0">
+            <a:pPr marL="0" indent="0">
               <a:lnSpc>
                 <a:spcPct val="106000"/>
               </a:lnSpc>
@@ -12649,7 +12262,7 @@
                 <a:latin typeface="+mn-lt" pitchFamily="34" charset="0"/>
                 <a:ea typeface="+mn-lt" pitchFamily="34" charset="-122"/>
                 <a:cs typeface="+mn-lt" pitchFamily="34" charset="-120"/>
-                <a:hlinkClick r:id="rId16" invalidUrl="" action="" tgtFrame="" tooltip="" history="1" highlightClick="0" endSnd="0">
+                <a:hlinkClick r:id="rId10">
                   <a:extLst>
                     <a:ext uri="{A12FA001-AC4F-418D-AE19-62706E023703}">
                       <ahyp:hlinkClr xmlns:ahyp="http://schemas.microsoft.com/office/drawing/2018/hyperlinkcolor" val="tx"/>
@@ -12665,49 +12278,7 @@
       </p:sp>
       <p:sp>
         <p:nvSpPr>
-          <p:cNvPr id="40" name="Text 337: Mã nguồn: lib/cloud/* · firestore.rules · storage.rules · scripts"/>
-          <p:cNvSpPr txBox="1"/>
-          <p:nvPr/>
-        </p:nvSpPr>
-        <p:spPr>
-          <a:xfrm>
-            <a:off x="571500" y="5829300"/>
-            <a:ext cx="11087100" cy="342900"/>
-          </a:xfrm>
-          <a:prstGeom prst="rect">
-            <a:avLst/>
-          </a:prstGeom>
-          <a:noFill/>
-          <a:ln/>
-        </p:spPr>
-        <p:txBody>
-          <a:bodyPr wrap="square" lIns="0" tIns="0" rIns="0" bIns="0" rtlCol="0" anchor="t"/>
-          <a:lstStyle/>
-          <a:p>
-            <a:pPr indent="0" marL="0">
-              <a:lnSpc>
-                <a:spcPct val="106000"/>
-              </a:lnSpc>
-              <a:buNone/>
-            </a:pPr>
-            <a:r>
-              <a:rPr lang="en-US" sz="1200" dirty="0">
-                <a:solidFill>
-                  <a:schemeClr val="tx2"/>
-                </a:solidFill>
-                <a:latin typeface="+mn-lt" pitchFamily="34" charset="0"/>
-                <a:ea typeface="+mn-lt" pitchFamily="34" charset="-122"/>
-                <a:cs typeface="+mn-lt" pitchFamily="34" charset="-120"/>
-              </a:rPr>
-              <a:t>Mã nguồn: lib/cloud/* · firestore.rules · storage.rules · scripts/configure_firebase.ps1</a:t>
-            </a:r>
-            <a:endParaRPr lang="en-US" sz="1200" dirty="0"/>
-          </a:p>
-        </p:txBody>
-      </p:sp>
-      <p:sp>
-        <p:nvSpPr>
-          <p:cNvPr id="25" name="Slide Number Placeholder 0"/>
+          <p:cNvPr id="5" name="Slide Number Placeholder 0"/>
           <p:cNvSpPr>
             <a:spLocks noGrp="1"/>
           </p:cNvSpPr>
@@ -12725,7 +12296,7 @@
           </a:prstGeom>
           <a:extLst>
             <a:ext uri="{C572A759-6A51-4108-AA02-DFA0A04FC94B}">
-              <ma14:wrappingTextBoxFlag xmlns:ma14="http://schemas.microsoft.com/office/mac/drawingml/2011/main" val="0"/>
+              <ma14:wrappingTextBoxFlag xmlns:ma14="http://schemas.microsoft.com/office/mac/drawingml/2011/main" xmlns="" val="0"/>
             </a:ext>
           </a:extLst>
         </p:spPr>
@@ -12743,7 +12314,7 @@
           <a:p>
             <a:pPr algn="r"/>
             <a:fld id="{F7021451-1387-4CA6-816F-3879F97B5CBC}" type="slidenum">
-              <a:rPr b="0" lang="en-US"/>
+              <a:rPr lang="en-US" b="0"/>
               <a:t>18</a:t>
             </a:fld>
             <a:endParaRPr lang="en-US"/>
@@ -12778,9 +12349,11 @@
       <p:sp>
         <p:nvSpPr>
           <p:cNvPr id="2" name="Text 0"/>
-          <p:cNvSpPr/>
+          <p:cNvSpPr>
+            <a:spLocks noGrp="1"/>
+          </p:cNvSpPr>
           <p:nvPr>
-            <p:ph idx="100" type="title" hasCustomPrompt="1"/>
+            <p:ph type="title" idx="100" hasCustomPrompt="1"/>
           </p:nvPr>
         </p:nvSpPr>
         <p:spPr>
@@ -12798,7 +12371,7 @@
           <a:bodyPr wrap="square" lIns="0" tIns="0" rIns="0" bIns="0" rtlCol="0" anchor="ctr"/>
           <a:lstStyle/>
           <a:p>
-            <a:pPr indent="0" marL="0">
+            <a:pPr marL="0" indent="0">
               <a:buNone/>
             </a:pPr>
             <a:r>
@@ -12819,9 +12392,11 @@
       <p:sp>
         <p:nvSpPr>
           <p:cNvPr id="3" name="Text 0"/>
-          <p:cNvSpPr/>
+          <p:cNvSpPr>
+            <a:spLocks noGrp="1"/>
+          </p:cNvSpPr>
           <p:nvPr>
-            <p:ph idx="101" type="body" hasCustomPrompt="1"/>
+            <p:ph type="body" idx="101" hasCustomPrompt="1"/>
           </p:nvPr>
         </p:nvSpPr>
         <p:spPr>
@@ -12839,7 +12414,7 @@
           <a:bodyPr wrap="square" lIns="0" tIns="0" rIns="0" bIns="0" rtlCol="0" anchor="ctr"/>
           <a:lstStyle/>
           <a:p>
-            <a:pPr indent="0" marL="0">
+            <a:pPr marL="0" indent="0">
               <a:buNone/>
             </a:pPr>
             <a:r>
@@ -12857,9 +12432,11 @@
       <p:sp>
         <p:nvSpPr>
           <p:cNvPr id="4" name="Text 0"/>
-          <p:cNvSpPr/>
+          <p:cNvSpPr>
+            <a:spLocks noGrp="1"/>
+          </p:cNvSpPr>
           <p:nvPr>
-            <p:ph idx="102" type="body" hasCustomPrompt="1"/>
+            <p:ph type="body" idx="102" hasCustomPrompt="1"/>
           </p:nvPr>
         </p:nvSpPr>
         <p:spPr>
@@ -12877,7 +12454,7 @@
           <a:bodyPr wrap="square" lIns="0" tIns="0" rIns="0" bIns="0" rtlCol="0" anchor="ctr"/>
           <a:lstStyle/>
           <a:p>
-            <a:pPr indent="0" marL="0">
+            <a:pPr marL="0" indent="0">
               <a:buNone/>
             </a:pPr>
             <a:r>
@@ -12940,7 +12517,7 @@
           <a:bodyPr wrap="square" lIns="0" tIns="0" rIns="0" bIns="0" rtlCol="0" anchor="t"/>
           <a:lstStyle/>
           <a:p>
-            <a:pPr indent="0" marL="0">
+            <a:pPr marL="0" indent="0">
               <a:lnSpc>
                 <a:spcPct val="106000"/>
               </a:lnSpc>
@@ -12982,7 +12559,7 @@
           <a:bodyPr wrap="square" lIns="0" tIns="0" rIns="0" bIns="0" rtlCol="0" anchor="t"/>
           <a:lstStyle/>
           <a:p>
-            <a:pPr indent="0" marL="0">
+            <a:pPr marL="0" indent="0">
               <a:lnSpc>
                 <a:spcPct val="106000"/>
               </a:lnSpc>
@@ -13002,7 +12579,7 @@
             <a:endParaRPr lang="en-US" sz="1800" dirty="0"/>
           </a:p>
           <a:p>
-            <a:pPr indent="0" marL="0">
+            <a:pPr marL="0" indent="0">
               <a:lnSpc>
                 <a:spcPct val="106000"/>
               </a:lnSpc>
@@ -13071,7 +12648,7 @@
           <a:bodyPr wrap="square" lIns="0" tIns="0" rIns="0" bIns="0" rtlCol="0" anchor="t"/>
           <a:lstStyle/>
           <a:p>
-            <a:pPr indent="0" marL="0">
+            <a:pPr marL="0" indent="0">
               <a:lnSpc>
                 <a:spcPct val="106000"/>
               </a:lnSpc>
@@ -13113,7 +12690,7 @@
           <a:bodyPr wrap="square" lIns="0" tIns="0" rIns="0" bIns="0" rtlCol="0" anchor="t"/>
           <a:lstStyle/>
           <a:p>
-            <a:pPr indent="0" marL="0">
+            <a:pPr marL="0" indent="0">
               <a:lnSpc>
                 <a:spcPct val="106000"/>
               </a:lnSpc>
@@ -13133,7 +12710,7 @@
             <a:endParaRPr lang="en-US" sz="1800" dirty="0"/>
           </a:p>
           <a:p>
-            <a:pPr indent="0" marL="0">
+            <a:pPr marL="0" indent="0">
               <a:lnSpc>
                 <a:spcPct val="106000"/>
               </a:lnSpc>
@@ -13202,7 +12779,7 @@
           <a:bodyPr wrap="square" lIns="0" tIns="0" rIns="0" bIns="0" rtlCol="0" anchor="t"/>
           <a:lstStyle/>
           <a:p>
-            <a:pPr indent="0" marL="0">
+            <a:pPr marL="0" indent="0">
               <a:lnSpc>
                 <a:spcPct val="106000"/>
               </a:lnSpc>
@@ -13244,7 +12821,7 @@
           <a:bodyPr wrap="square" lIns="0" tIns="0" rIns="0" bIns="0" rtlCol="0" anchor="t"/>
           <a:lstStyle/>
           <a:p>
-            <a:pPr indent="0" marL="0">
+            <a:pPr marL="0" indent="0">
               <a:lnSpc>
                 <a:spcPct val="106000"/>
               </a:lnSpc>
@@ -13264,7 +12841,7 @@
             <a:endParaRPr lang="en-US" sz="1800" dirty="0"/>
           </a:p>
           <a:p>
-            <a:pPr indent="0" marL="0">
+            <a:pPr marL="0" indent="0">
               <a:lnSpc>
                 <a:spcPct val="106000"/>
               </a:lnSpc>
@@ -13333,7 +12910,7 @@
           <a:bodyPr wrap="square" lIns="0" tIns="0" rIns="0" bIns="0" rtlCol="0" anchor="t"/>
           <a:lstStyle/>
           <a:p>
-            <a:pPr indent="0" marL="0">
+            <a:pPr marL="0" indent="0">
               <a:lnSpc>
                 <a:spcPct val="106000"/>
               </a:lnSpc>
@@ -13375,7 +12952,7 @@
           <a:bodyPr wrap="square" lIns="0" tIns="0" rIns="0" bIns="0" rtlCol="0" anchor="t"/>
           <a:lstStyle/>
           <a:p>
-            <a:pPr indent="0" marL="0">
+            <a:pPr marL="0" indent="0">
               <a:lnSpc>
                 <a:spcPct val="106000"/>
               </a:lnSpc>
@@ -13395,7 +12972,7 @@
             <a:endParaRPr lang="en-US" sz="1800" dirty="0"/>
           </a:p>
           <a:p>
-            <a:pPr indent="0" marL="0">
+            <a:pPr marL="0" indent="0">
               <a:lnSpc>
                 <a:spcPct val="106000"/>
               </a:lnSpc>
@@ -13437,7 +13014,7 @@
           <a:bodyPr wrap="square" lIns="0" tIns="0" rIns="0" bIns="0" rtlCol="0" anchor="t"/>
           <a:lstStyle/>
           <a:p>
-            <a:pPr indent="0" marL="0">
+            <a:pPr marL="0" indent="0">
               <a:lnSpc>
                 <a:spcPct val="106000"/>
               </a:lnSpc>
@@ -13478,7 +13055,7 @@
           </a:prstGeom>
           <a:extLst>
             <a:ext uri="{C572A759-6A51-4108-AA02-DFA0A04FC94B}">
-              <ma14:wrappingTextBoxFlag xmlns:ma14="http://schemas.microsoft.com/office/mac/drawingml/2011/main" val="0"/>
+              <ma14:wrappingTextBoxFlag xmlns:ma14="http://schemas.microsoft.com/office/mac/drawingml/2011/main" xmlns="" val="0"/>
             </a:ext>
           </a:extLst>
         </p:spPr>
@@ -13496,7 +13073,7 @@
           <a:p>
             <a:pPr algn="r"/>
             <a:fld id="{F7021451-1387-4CA6-816F-3879F97B5CBC}" type="slidenum">
-              <a:rPr b="0" lang="en-US"/>
+              <a:rPr lang="en-US" b="0"/>
               <a:t>2</a:t>
             </a:fld>
             <a:endParaRPr lang="en-US"/>
@@ -13531,9 +13108,11 @@
       <p:sp>
         <p:nvSpPr>
           <p:cNvPr id="2" name="Text 0"/>
-          <p:cNvSpPr/>
+          <p:cNvSpPr>
+            <a:spLocks noGrp="1"/>
+          </p:cNvSpPr>
           <p:nvPr>
-            <p:ph idx="100" type="title" hasCustomPrompt="1"/>
+            <p:ph type="title" idx="100" hasCustomPrompt="1"/>
           </p:nvPr>
         </p:nvSpPr>
         <p:spPr>
@@ -13551,7 +13130,7 @@
           <a:bodyPr wrap="square" lIns="0" tIns="0" rIns="0" bIns="0" rtlCol="0" anchor="ctr"/>
           <a:lstStyle/>
           <a:p>
-            <a:pPr indent="0" marL="0">
+            <a:pPr marL="0" indent="0">
               <a:buNone/>
             </a:pPr>
             <a:r>
@@ -13572,9 +13151,11 @@
       <p:sp>
         <p:nvSpPr>
           <p:cNvPr id="3" name="Text 0"/>
-          <p:cNvSpPr/>
+          <p:cNvSpPr>
+            <a:spLocks noGrp="1"/>
+          </p:cNvSpPr>
           <p:nvPr>
-            <p:ph idx="101" type="body" hasCustomPrompt="1"/>
+            <p:ph type="body" idx="101" hasCustomPrompt="1"/>
           </p:nvPr>
         </p:nvSpPr>
         <p:spPr>
@@ -13592,7 +13173,7 @@
           <a:bodyPr wrap="square" lIns="0" tIns="0" rIns="0" bIns="0" rtlCol="0" anchor="ctr"/>
           <a:lstStyle/>
           <a:p>
-            <a:pPr indent="0" marL="0">
+            <a:pPr marL="0" indent="0">
               <a:buNone/>
             </a:pPr>
             <a:r>
@@ -13610,9 +13191,11 @@
       <p:sp>
         <p:nvSpPr>
           <p:cNvPr id="4" name="Text 0"/>
-          <p:cNvSpPr/>
+          <p:cNvSpPr>
+            <a:spLocks noGrp="1"/>
+          </p:cNvSpPr>
           <p:nvPr>
-            <p:ph idx="102" type="body" hasCustomPrompt="1"/>
+            <p:ph type="body" idx="102" hasCustomPrompt="1"/>
           </p:nvPr>
         </p:nvSpPr>
         <p:spPr>
@@ -13630,7 +13213,7 @@
           <a:bodyPr wrap="square" lIns="0" tIns="0" rIns="0" bIns="0" rtlCol="0" anchor="ctr"/>
           <a:lstStyle/>
           <a:p>
-            <a:pPr indent="0" marL="0">
+            <a:pPr marL="0" indent="0">
               <a:buNone/>
             </a:pPr>
             <a:r>
@@ -13718,7 +13301,7 @@
           <a:bodyPr wrap="square" lIns="0" tIns="0" rIns="0" bIns="0" rtlCol="0" anchor="ctr"/>
           <a:lstStyle/>
           <a:p>
-            <a:pPr algn="ctr" indent="0" marL="0">
+            <a:pPr marL="0" indent="0" algn="ctr">
               <a:lnSpc>
                 <a:spcPct val="106000"/>
               </a:lnSpc>
@@ -13760,7 +13343,7 @@
           <a:bodyPr wrap="square" lIns="0" tIns="0" rIns="0" bIns="0" rtlCol="0" anchor="t"/>
           <a:lstStyle/>
           <a:p>
-            <a:pPr indent="0" marL="0">
+            <a:pPr marL="0" indent="0">
               <a:lnSpc>
                 <a:spcPct val="106000"/>
               </a:lnSpc>
@@ -13802,7 +13385,7 @@
           <a:bodyPr wrap="square" lIns="0" tIns="0" rIns="0" bIns="0" rtlCol="0" anchor="t"/>
           <a:lstStyle/>
           <a:p>
-            <a:pPr indent="0" marL="0">
+            <a:pPr marL="0" indent="0">
               <a:lnSpc>
                 <a:spcPct val="106000"/>
               </a:lnSpc>
@@ -13896,7 +13479,7 @@
           <a:bodyPr wrap="square" lIns="0" tIns="0" rIns="0" bIns="0" rtlCol="0" anchor="ctr"/>
           <a:lstStyle/>
           <a:p>
-            <a:pPr algn="ctr" indent="0" marL="0">
+            <a:pPr marL="0" indent="0" algn="ctr">
               <a:lnSpc>
                 <a:spcPct val="106000"/>
               </a:lnSpc>
@@ -13938,7 +13521,7 @@
           <a:bodyPr wrap="square" lIns="0" tIns="0" rIns="0" bIns="0" rtlCol="0" anchor="t"/>
           <a:lstStyle/>
           <a:p>
-            <a:pPr indent="0" marL="0">
+            <a:pPr marL="0" indent="0">
               <a:lnSpc>
                 <a:spcPct val="106000"/>
               </a:lnSpc>
@@ -13980,7 +13563,7 @@
           <a:bodyPr wrap="square" lIns="0" tIns="0" rIns="0" bIns="0" rtlCol="0" anchor="t"/>
           <a:lstStyle/>
           <a:p>
-            <a:pPr indent="0" marL="0">
+            <a:pPr marL="0" indent="0">
               <a:lnSpc>
                 <a:spcPct val="106000"/>
               </a:lnSpc>
@@ -14074,7 +13657,7 @@
           <a:bodyPr wrap="square" lIns="0" tIns="0" rIns="0" bIns="0" rtlCol="0" anchor="ctr"/>
           <a:lstStyle/>
           <a:p>
-            <a:pPr algn="ctr" indent="0" marL="0">
+            <a:pPr marL="0" indent="0" algn="ctr">
               <a:lnSpc>
                 <a:spcPct val="106000"/>
               </a:lnSpc>
@@ -14116,7 +13699,7 @@
           <a:bodyPr wrap="square" lIns="0" tIns="0" rIns="0" bIns="0" rtlCol="0" anchor="t"/>
           <a:lstStyle/>
           <a:p>
-            <a:pPr indent="0" marL="0">
+            <a:pPr marL="0" indent="0">
               <a:lnSpc>
                 <a:spcPct val="106000"/>
               </a:lnSpc>
@@ -14158,7 +13741,7 @@
           <a:bodyPr wrap="square" lIns="0" tIns="0" rIns="0" bIns="0" rtlCol="0" anchor="t"/>
           <a:lstStyle/>
           <a:p>
-            <a:pPr indent="0" marL="0">
+            <a:pPr marL="0" indent="0">
               <a:lnSpc>
                 <a:spcPct val="106000"/>
               </a:lnSpc>
@@ -14254,7 +13837,7 @@
           <a:bodyPr wrap="square" lIns="0" tIns="0" rIns="0" bIns="0" rtlCol="0" anchor="ctr"/>
           <a:lstStyle/>
           <a:p>
-            <a:pPr algn="ctr" indent="0" marL="0">
+            <a:pPr marL="0" indent="0" algn="ctr">
               <a:lnSpc>
                 <a:spcPct val="106000"/>
               </a:lnSpc>
@@ -14296,7 +13879,7 @@
           <a:bodyPr wrap="square" lIns="0" tIns="0" rIns="0" bIns="0" rtlCol="0" anchor="ctr"/>
           <a:lstStyle/>
           <a:p>
-            <a:pPr algn="ctr" indent="0" marL="0">
+            <a:pPr marL="0" indent="0" algn="ctr">
               <a:lnSpc>
                 <a:spcPct val="106000"/>
               </a:lnSpc>
@@ -14338,7 +13921,7 @@
           <a:bodyPr wrap="square" lIns="0" tIns="0" rIns="0" bIns="0" rtlCol="0" anchor="ctr"/>
           <a:lstStyle/>
           <a:p>
-            <a:pPr algn="ctr" indent="0" marL="0">
+            <a:pPr marL="0" indent="0" algn="ctr">
               <a:lnSpc>
                 <a:spcPct val="106000"/>
               </a:lnSpc>
@@ -14407,7 +13990,7 @@
           <a:bodyPr wrap="square" lIns="0" tIns="0" rIns="0" bIns="0" rtlCol="0" anchor="ctr"/>
           <a:lstStyle/>
           <a:p>
-            <a:pPr algn="ctr" indent="0" marL="0">
+            <a:pPr marL="0" indent="0" algn="ctr">
               <a:lnSpc>
                 <a:spcPct val="106000"/>
               </a:lnSpc>
@@ -14449,7 +14032,7 @@
           <a:bodyPr wrap="square" lIns="0" tIns="0" rIns="0" bIns="0" rtlCol="0" anchor="ctr"/>
           <a:lstStyle/>
           <a:p>
-            <a:pPr algn="ctr" indent="0" marL="0">
+            <a:pPr marL="0" indent="0" algn="ctr">
               <a:lnSpc>
                 <a:spcPct val="106000"/>
               </a:lnSpc>
@@ -14472,7 +14055,7 @@
       </p:sp>
       <p:sp>
         <p:nvSpPr>
-          <p:cNvPr id="25" name="Slide Number Placeholder 0"/>
+          <p:cNvPr id="5" name="Slide Number Placeholder 0"/>
           <p:cNvSpPr>
             <a:spLocks noGrp="1"/>
           </p:cNvSpPr>
@@ -14490,7 +14073,7 @@
           </a:prstGeom>
           <a:extLst>
             <a:ext uri="{C572A759-6A51-4108-AA02-DFA0A04FC94B}">
-              <ma14:wrappingTextBoxFlag xmlns:ma14="http://schemas.microsoft.com/office/mac/drawingml/2011/main" val="0"/>
+              <ma14:wrappingTextBoxFlag xmlns:ma14="http://schemas.microsoft.com/office/mac/drawingml/2011/main" xmlns="" val="0"/>
             </a:ext>
           </a:extLst>
         </p:spPr>
@@ -14508,7 +14091,7 @@
           <a:p>
             <a:pPr algn="r"/>
             <a:fld id="{F7021451-1387-4CA6-816F-3879F97B5CBC}" type="slidenum">
-              <a:rPr b="0" lang="en-US"/>
+              <a:rPr lang="en-US" b="0"/>
               <a:t>3</a:t>
             </a:fld>
             <a:endParaRPr lang="en-US"/>
@@ -14543,9 +14126,11 @@
       <p:sp>
         <p:nvSpPr>
           <p:cNvPr id="2" name="Text 0"/>
-          <p:cNvSpPr/>
+          <p:cNvSpPr>
+            <a:spLocks noGrp="1"/>
+          </p:cNvSpPr>
           <p:nvPr>
-            <p:ph idx="100" type="title" hasCustomPrompt="1"/>
+            <p:ph type="title" idx="100" hasCustomPrompt="1"/>
           </p:nvPr>
         </p:nvSpPr>
         <p:spPr>
@@ -14563,7 +14148,7 @@
           <a:bodyPr wrap="square" lIns="0" tIns="0" rIns="0" bIns="0" rtlCol="0" anchor="ctr"/>
           <a:lstStyle/>
           <a:p>
-            <a:pPr indent="0" marL="0">
+            <a:pPr marL="0" indent="0">
               <a:buNone/>
             </a:pPr>
             <a:r>
@@ -14584,9 +14169,11 @@
       <p:sp>
         <p:nvSpPr>
           <p:cNvPr id="3" name="Text 0"/>
-          <p:cNvSpPr/>
+          <p:cNvSpPr>
+            <a:spLocks noGrp="1"/>
+          </p:cNvSpPr>
           <p:nvPr>
-            <p:ph idx="101" type="body" hasCustomPrompt="1"/>
+            <p:ph type="body" idx="101" hasCustomPrompt="1"/>
           </p:nvPr>
         </p:nvSpPr>
         <p:spPr>
@@ -14604,7 +14191,7 @@
           <a:bodyPr wrap="square" lIns="0" tIns="0" rIns="0" bIns="0" rtlCol="0" anchor="ctr"/>
           <a:lstStyle/>
           <a:p>
-            <a:pPr indent="0" marL="0">
+            <a:pPr marL="0" indent="0">
               <a:buNone/>
             </a:pPr>
             <a:r>
@@ -14622,9 +14209,11 @@
       <p:sp>
         <p:nvSpPr>
           <p:cNvPr id="4" name="Text 0"/>
-          <p:cNvSpPr/>
+          <p:cNvSpPr>
+            <a:spLocks noGrp="1"/>
+          </p:cNvSpPr>
           <p:nvPr>
-            <p:ph idx="102" type="body" hasCustomPrompt="1"/>
+            <p:ph type="body" idx="102" hasCustomPrompt="1"/>
           </p:nvPr>
         </p:nvSpPr>
         <p:spPr>
@@ -14642,7 +14231,7 @@
           <a:bodyPr wrap="square" lIns="0" tIns="0" rIns="0" bIns="0" rtlCol="0" anchor="ctr"/>
           <a:lstStyle/>
           <a:p>
-            <a:pPr indent="0" marL="0">
+            <a:pPr marL="0" indent="0">
               <a:buNone/>
             </a:pPr>
             <a:r>
@@ -14705,7 +14294,7 @@
           <a:bodyPr wrap="square" lIns="0" tIns="0" rIns="0" bIns="0" rtlCol="0" anchor="ctr"/>
           <a:lstStyle/>
           <a:p>
-            <a:pPr indent="0" marL="0">
+            <a:pPr marL="0" indent="0">
               <a:lnSpc>
                 <a:spcPct val="106000"/>
               </a:lnSpc>
@@ -14774,7 +14363,7 @@
           <a:bodyPr wrap="square" lIns="0" tIns="0" rIns="0" bIns="0" rtlCol="0" anchor="ctr"/>
           <a:lstStyle/>
           <a:p>
-            <a:pPr indent="0" marL="0">
+            <a:pPr marL="0" indent="0">
               <a:lnSpc>
                 <a:spcPct val="106000"/>
               </a:lnSpc>
@@ -14843,7 +14432,7 @@
           <a:bodyPr wrap="square" lIns="0" tIns="0" rIns="0" bIns="0" rtlCol="0" anchor="ctr"/>
           <a:lstStyle/>
           <a:p>
-            <a:pPr indent="0" marL="0">
+            <a:pPr marL="0" indent="0">
               <a:lnSpc>
                 <a:spcPct val="106000"/>
               </a:lnSpc>
@@ -14912,7 +14501,7 @@
           <a:bodyPr wrap="square" lIns="0" tIns="0" rIns="0" bIns="0" rtlCol="0" anchor="ctr"/>
           <a:lstStyle/>
           <a:p>
-            <a:pPr indent="0" marL="0">
+            <a:pPr marL="0" indent="0">
               <a:lnSpc>
                 <a:spcPct val="106000"/>
               </a:lnSpc>
@@ -14981,7 +14570,7 @@
           <a:bodyPr wrap="square" lIns="0" tIns="0" rIns="0" bIns="0" rtlCol="0" anchor="ctr"/>
           <a:lstStyle/>
           <a:p>
-            <a:pPr indent="0" marL="0">
+            <a:pPr marL="0" indent="0">
               <a:lnSpc>
                 <a:spcPct val="106000"/>
               </a:lnSpc>
@@ -15050,7 +14639,7 @@
           <a:bodyPr wrap="square" lIns="0" tIns="0" rIns="0" bIns="0" rtlCol="0" anchor="ctr"/>
           <a:lstStyle/>
           <a:p>
-            <a:pPr indent="0" marL="0">
+            <a:pPr marL="0" indent="0">
               <a:lnSpc>
                 <a:spcPct val="106000"/>
               </a:lnSpc>
@@ -15119,7 +14708,7 @@
           <a:bodyPr wrap="square" lIns="0" tIns="0" rIns="0" bIns="0" rtlCol="0" anchor="ctr"/>
           <a:lstStyle/>
           <a:p>
-            <a:pPr indent="0" marL="0">
+            <a:pPr marL="0" indent="0">
               <a:lnSpc>
                 <a:spcPct val="106000"/>
               </a:lnSpc>
@@ -15188,7 +14777,7 @@
           <a:bodyPr wrap="square" lIns="0" tIns="0" rIns="0" bIns="0" rtlCol="0" anchor="ctr"/>
           <a:lstStyle/>
           <a:p>
-            <a:pPr indent="0" marL="0">
+            <a:pPr marL="0" indent="0">
               <a:lnSpc>
                 <a:spcPct val="106000"/>
               </a:lnSpc>
@@ -15257,7 +14846,7 @@
           <a:bodyPr wrap="square" lIns="0" tIns="0" rIns="0" bIns="0" rtlCol="0" anchor="ctr"/>
           <a:lstStyle/>
           <a:p>
-            <a:pPr indent="0" marL="0">
+            <a:pPr marL="0" indent="0">
               <a:lnSpc>
                 <a:spcPct val="106000"/>
               </a:lnSpc>
@@ -15277,7 +14866,7 @@
             <a:endParaRPr lang="en-US" sz="1800" dirty="0"/>
           </a:p>
           <a:p>
-            <a:pPr indent="0" marL="0">
+            <a:pPr marL="0" indent="0">
               <a:lnSpc>
                 <a:spcPct val="106000"/>
               </a:lnSpc>
@@ -15346,7 +14935,7 @@
           <a:bodyPr wrap="square" lIns="0" tIns="0" rIns="0" bIns="0" rtlCol="0" anchor="ctr"/>
           <a:lstStyle/>
           <a:p>
-            <a:pPr indent="0" marL="0">
+            <a:pPr marL="0" indent="0">
               <a:lnSpc>
                 <a:spcPct val="106000"/>
               </a:lnSpc>
@@ -15415,7 +15004,7 @@
           <a:bodyPr wrap="square" lIns="0" tIns="0" rIns="0" bIns="0" rtlCol="0" anchor="ctr"/>
           <a:lstStyle/>
           <a:p>
-            <a:pPr indent="0" marL="0">
+            <a:pPr marL="0" indent="0">
               <a:lnSpc>
                 <a:spcPct val="106000"/>
               </a:lnSpc>
@@ -15484,7 +15073,7 @@
           <a:bodyPr wrap="square" lIns="0" tIns="0" rIns="0" bIns="0" rtlCol="0" anchor="ctr"/>
           <a:lstStyle/>
           <a:p>
-            <a:pPr indent="0" marL="0">
+            <a:pPr marL="0" indent="0">
               <a:lnSpc>
                 <a:spcPct val="106000"/>
               </a:lnSpc>
@@ -15504,7 +15093,7 @@
             <a:endParaRPr lang="en-US" sz="1800" dirty="0"/>
           </a:p>
           <a:p>
-            <a:pPr indent="0" marL="0">
+            <a:pPr marL="0" indent="0">
               <a:lnSpc>
                 <a:spcPct val="106000"/>
               </a:lnSpc>
@@ -15573,7 +15162,7 @@
           <a:bodyPr wrap="square" lIns="0" tIns="0" rIns="0" bIns="0" rtlCol="0" anchor="ctr"/>
           <a:lstStyle/>
           <a:p>
-            <a:pPr indent="0" marL="0">
+            <a:pPr marL="0" indent="0">
               <a:lnSpc>
                 <a:spcPct val="106000"/>
               </a:lnSpc>
@@ -15642,7 +15231,7 @@
           <a:bodyPr wrap="square" lIns="0" tIns="0" rIns="0" bIns="0" rtlCol="0" anchor="ctr"/>
           <a:lstStyle/>
           <a:p>
-            <a:pPr indent="0" marL="0">
+            <a:pPr marL="0" indent="0">
               <a:lnSpc>
                 <a:spcPct val="106000"/>
               </a:lnSpc>
@@ -15711,7 +15300,7 @@
           <a:bodyPr wrap="square" lIns="0" tIns="0" rIns="0" bIns="0" rtlCol="0" anchor="ctr"/>
           <a:lstStyle/>
           <a:p>
-            <a:pPr indent="0" marL="0">
+            <a:pPr marL="0" indent="0">
               <a:lnSpc>
                 <a:spcPct val="106000"/>
               </a:lnSpc>
@@ -15731,7 +15320,7 @@
             <a:endParaRPr lang="en-US" sz="1800" dirty="0"/>
           </a:p>
           <a:p>
-            <a:pPr indent="0" marL="0">
+            <a:pPr marL="0" indent="0">
               <a:lnSpc>
                 <a:spcPct val="106000"/>
               </a:lnSpc>
@@ -15773,7 +15362,7 @@
           <a:bodyPr wrap="square" lIns="0" tIns="0" rIns="0" bIns="0" rtlCol="0" anchor="t"/>
           <a:lstStyle/>
           <a:p>
-            <a:pPr indent="0" marL="0">
+            <a:pPr marL="0" indent="0">
               <a:lnSpc>
                 <a:spcPct val="106000"/>
               </a:lnSpc>
@@ -15796,7 +15385,7 @@
       </p:sp>
       <p:sp>
         <p:nvSpPr>
-          <p:cNvPr id="25" name="Slide Number Placeholder 0"/>
+          <p:cNvPr id="5" name="Slide Number Placeholder 0"/>
           <p:cNvSpPr>
             <a:spLocks noGrp="1"/>
           </p:cNvSpPr>
@@ -15814,7 +15403,7 @@
           </a:prstGeom>
           <a:extLst>
             <a:ext uri="{C572A759-6A51-4108-AA02-DFA0A04FC94B}">
-              <ma14:wrappingTextBoxFlag xmlns:ma14="http://schemas.microsoft.com/office/mac/drawingml/2011/main" val="0"/>
+              <ma14:wrappingTextBoxFlag xmlns:ma14="http://schemas.microsoft.com/office/mac/drawingml/2011/main" xmlns="" val="0"/>
             </a:ext>
           </a:extLst>
         </p:spPr>
@@ -15832,7 +15421,7 @@
           <a:p>
             <a:pPr algn="r"/>
             <a:fld id="{F7021451-1387-4CA6-816F-3879F97B5CBC}" type="slidenum">
-              <a:rPr b="0" lang="en-US"/>
+              <a:rPr lang="en-US" b="0"/>
               <a:t>4</a:t>
             </a:fld>
             <a:endParaRPr lang="en-US"/>
@@ -15867,9 +15456,11 @@
       <p:sp>
         <p:nvSpPr>
           <p:cNvPr id="2" name="Text 0"/>
-          <p:cNvSpPr/>
+          <p:cNvSpPr>
+            <a:spLocks noGrp="1"/>
+          </p:cNvSpPr>
           <p:nvPr>
-            <p:ph idx="100" type="title" hasCustomPrompt="1"/>
+            <p:ph type="title" idx="100" hasCustomPrompt="1"/>
           </p:nvPr>
         </p:nvSpPr>
         <p:spPr>
@@ -15887,7 +15478,7 @@
           <a:bodyPr wrap="square" lIns="0" tIns="0" rIns="0" bIns="0" rtlCol="0" anchor="ctr"/>
           <a:lstStyle/>
           <a:p>
-            <a:pPr indent="0" marL="0">
+            <a:pPr marL="0" indent="0">
               <a:buNone/>
             </a:pPr>
             <a:r>
@@ -15908,9 +15499,11 @@
       <p:sp>
         <p:nvSpPr>
           <p:cNvPr id="3" name="Text 0"/>
-          <p:cNvSpPr/>
+          <p:cNvSpPr>
+            <a:spLocks noGrp="1"/>
+          </p:cNvSpPr>
           <p:nvPr>
-            <p:ph idx="101" type="body" hasCustomPrompt="1"/>
+            <p:ph type="body" idx="101" hasCustomPrompt="1"/>
           </p:nvPr>
         </p:nvSpPr>
         <p:spPr>
@@ -15928,7 +15521,7 @@
           <a:bodyPr wrap="square" lIns="0" tIns="0" rIns="0" bIns="0" rtlCol="0" anchor="ctr"/>
           <a:lstStyle/>
           <a:p>
-            <a:pPr indent="0" marL="0">
+            <a:pPr marL="0" indent="0">
               <a:buNone/>
             </a:pPr>
             <a:r>
@@ -15946,9 +15539,11 @@
       <p:sp>
         <p:nvSpPr>
           <p:cNvPr id="4" name="Text 0"/>
-          <p:cNvSpPr/>
+          <p:cNvSpPr>
+            <a:spLocks noGrp="1"/>
+          </p:cNvSpPr>
           <p:nvPr>
-            <p:ph idx="102" type="body" hasCustomPrompt="1"/>
+            <p:ph type="body" idx="102" hasCustomPrompt="1"/>
           </p:nvPr>
         </p:nvSpPr>
         <p:spPr>
@@ -15966,7 +15561,7 @@
           <a:bodyPr wrap="square" lIns="0" tIns="0" rIns="0" bIns="0" rtlCol="0" anchor="ctr"/>
           <a:lstStyle/>
           <a:p>
-            <a:pPr indent="0" marL="0">
+            <a:pPr marL="0" indent="0">
               <a:buNone/>
             </a:pPr>
             <a:r>
@@ -15978,48 +15573,6 @@
               <a:t>“Thư viện riêng tư” là quyền truy cập ứng dụng, không phải mô hình Private Cloud</a:t>
             </a:r>
             <a:endParaRPr lang="en-US" sz="1800" dirty="0"/>
-          </a:p>
-        </p:txBody>
-      </p:sp>
-      <p:sp>
-        <p:nvSpPr>
-          <p:cNvPr id="5" name="Text 82: Nguồn: F8 | URL đầy đủ trong ghi chú và slide 18"/>
-          <p:cNvSpPr txBox="1"/>
-          <p:nvPr/>
-        </p:nvSpPr>
-        <p:spPr>
-          <a:xfrm>
-            <a:off x="571500" y="5886450"/>
-            <a:ext cx="11087100" cy="228600"/>
-          </a:xfrm>
-          <a:prstGeom prst="rect">
-            <a:avLst/>
-          </a:prstGeom>
-          <a:noFill/>
-          <a:ln/>
-        </p:spPr>
-        <p:txBody>
-          <a:bodyPr wrap="square" lIns="0" tIns="0" rIns="0" bIns="0" rtlCol="0" anchor="t"/>
-          <a:lstStyle/>
-          <a:p>
-            <a:pPr indent="0" marL="0">
-              <a:lnSpc>
-                <a:spcPct val="106000"/>
-              </a:lnSpc>
-              <a:buNone/>
-            </a:pPr>
-            <a:r>
-              <a:rPr lang="en-US" sz="1200" dirty="0">
-                <a:solidFill>
-                  <a:schemeClr val="tx2"/>
-                </a:solidFill>
-                <a:latin typeface="+mn-lt" pitchFamily="34" charset="0"/>
-                <a:ea typeface="+mn-lt" pitchFamily="34" charset="-122"/>
-                <a:cs typeface="+mn-lt" pitchFamily="34" charset="-120"/>
-              </a:rPr>
-              <a:t>Nguồn: F8 | URL đầy đủ trong ghi chú và slide 18</a:t>
-            </a:r>
-            <a:endParaRPr lang="en-US" sz="1200" dirty="0"/>
           </a:p>
         </p:txBody>
       </p:sp>
@@ -16071,7 +15624,7 @@
           <a:bodyPr wrap="square" lIns="0" tIns="0" rIns="0" bIns="0" rtlCol="0" anchor="t"/>
           <a:lstStyle/>
           <a:p>
-            <a:pPr indent="0" marL="0">
+            <a:pPr marL="0" indent="0">
               <a:lnSpc>
                 <a:spcPct val="106000"/>
               </a:lnSpc>
@@ -16113,7 +15666,7 @@
           <a:bodyPr wrap="square" lIns="0" tIns="0" rIns="0" bIns="0" rtlCol="0" anchor="t"/>
           <a:lstStyle/>
           <a:p>
-            <a:pPr indent="0" marL="0">
+            <a:pPr marL="0" indent="0">
               <a:lnSpc>
                 <a:spcPct val="106000"/>
               </a:lnSpc>
@@ -16133,7 +15686,7 @@
             <a:endParaRPr lang="en-US" sz="2000" dirty="0"/>
           </a:p>
           <a:p>
-            <a:pPr indent="0" marL="0">
+            <a:pPr marL="0" indent="0">
               <a:lnSpc>
                 <a:spcPct val="106000"/>
               </a:lnSpc>
@@ -16142,7 +15695,7 @@
             <a:endParaRPr lang="en-US" sz="2000" dirty="0"/>
           </a:p>
           <a:p>
-            <a:pPr indent="0" marL="0">
+            <a:pPr marL="0" indent="0">
               <a:lnSpc>
                 <a:spcPct val="106000"/>
               </a:lnSpc>
@@ -16162,7 +15715,7 @@
             <a:endParaRPr lang="en-US" sz="2000" dirty="0"/>
           </a:p>
           <a:p>
-            <a:pPr indent="0" marL="0">
+            <a:pPr marL="0" indent="0">
               <a:lnSpc>
                 <a:spcPct val="106000"/>
               </a:lnSpc>
@@ -16231,7 +15784,7 @@
           <a:bodyPr wrap="square" lIns="0" tIns="0" rIns="0" bIns="0" rtlCol="0" anchor="t"/>
           <a:lstStyle/>
           <a:p>
-            <a:pPr indent="0" marL="0">
+            <a:pPr marL="0" indent="0">
               <a:lnSpc>
                 <a:spcPct val="106000"/>
               </a:lnSpc>
@@ -16273,7 +15826,7 @@
           <a:bodyPr wrap="square" lIns="0" tIns="0" rIns="0" bIns="0" rtlCol="0" anchor="t"/>
           <a:lstStyle/>
           <a:p>
-            <a:pPr indent="0" marL="0">
+            <a:pPr marL="0" indent="0">
               <a:lnSpc>
                 <a:spcPct val="106000"/>
               </a:lnSpc>
@@ -16293,7 +15846,7 @@
             <a:endParaRPr lang="en-US" sz="2000" dirty="0"/>
           </a:p>
           <a:p>
-            <a:pPr indent="0" marL="0">
+            <a:pPr marL="0" indent="0">
               <a:lnSpc>
                 <a:spcPct val="106000"/>
               </a:lnSpc>
@@ -16313,7 +15866,7 @@
             <a:endParaRPr lang="en-US" sz="2000" dirty="0"/>
           </a:p>
           <a:p>
-            <a:pPr indent="0" marL="0">
+            <a:pPr marL="0" indent="0">
               <a:lnSpc>
                 <a:spcPct val="106000"/>
               </a:lnSpc>
@@ -16322,7 +15875,7 @@
             <a:endParaRPr lang="en-US" sz="2000" dirty="0"/>
           </a:p>
           <a:p>
-            <a:pPr indent="0" marL="0">
+            <a:pPr marL="0" indent="0">
               <a:lnSpc>
                 <a:spcPct val="106000"/>
               </a:lnSpc>
@@ -16342,7 +15895,7 @@
             <a:endParaRPr lang="en-US" sz="2000" dirty="0"/>
           </a:p>
           <a:p>
-            <a:pPr indent="0" marL="0">
+            <a:pPr marL="0" indent="0">
               <a:lnSpc>
                 <a:spcPct val="106000"/>
               </a:lnSpc>
@@ -16411,7 +15964,7 @@
           <a:bodyPr wrap="square" lIns="0" tIns="0" rIns="0" bIns="0" rtlCol="0" anchor="t"/>
           <a:lstStyle/>
           <a:p>
-            <a:pPr indent="0" marL="0">
+            <a:pPr marL="0" indent="0">
               <a:lnSpc>
                 <a:spcPct val="106000"/>
               </a:lnSpc>
@@ -16453,7 +16006,7 @@
           <a:bodyPr wrap="square" lIns="0" tIns="0" rIns="0" bIns="0" rtlCol="0" anchor="t"/>
           <a:lstStyle/>
           <a:p>
-            <a:pPr indent="0" marL="0">
+            <a:pPr marL="0" indent="0">
               <a:lnSpc>
                 <a:spcPct val="106000"/>
               </a:lnSpc>
@@ -16473,7 +16026,7 @@
             <a:endParaRPr lang="en-US" sz="2000" dirty="0"/>
           </a:p>
           <a:p>
-            <a:pPr indent="0" marL="0">
+            <a:pPr marL="0" indent="0">
               <a:lnSpc>
                 <a:spcPct val="106000"/>
               </a:lnSpc>
@@ -16493,7 +16046,7 @@
             <a:endParaRPr lang="en-US" sz="2000" dirty="0"/>
           </a:p>
           <a:p>
-            <a:pPr indent="0" marL="0">
+            <a:pPr marL="0" indent="0">
               <a:lnSpc>
                 <a:spcPct val="106000"/>
               </a:lnSpc>
@@ -16502,7 +16055,7 @@
             <a:endParaRPr lang="en-US" sz="2000" dirty="0"/>
           </a:p>
           <a:p>
-            <a:pPr indent="0" marL="0">
+            <a:pPr marL="0" indent="0">
               <a:lnSpc>
                 <a:spcPct val="106000"/>
               </a:lnSpc>
@@ -16522,7 +16075,7 @@
             <a:endParaRPr lang="en-US" sz="2000" dirty="0"/>
           </a:p>
           <a:p>
-            <a:pPr indent="0" marL="0">
+            <a:pPr marL="0" indent="0">
               <a:lnSpc>
                 <a:spcPct val="106000"/>
               </a:lnSpc>
@@ -16591,7 +16144,7 @@
           <a:bodyPr wrap="square" lIns="0" tIns="0" rIns="0" bIns="0" rtlCol="0" anchor="ctr"/>
           <a:lstStyle/>
           <a:p>
-            <a:pPr algn="ctr" indent="0" marL="0">
+            <a:pPr marL="0" indent="0" algn="ctr">
               <a:lnSpc>
                 <a:spcPct val="106000"/>
               </a:lnSpc>
@@ -16660,7 +16213,7 @@
           <a:bodyPr wrap="square" lIns="0" tIns="0" rIns="0" bIns="0" rtlCol="0" anchor="ctr"/>
           <a:lstStyle/>
           <a:p>
-            <a:pPr indent="0" marL="0">
+            <a:pPr marL="0" indent="0">
               <a:lnSpc>
                 <a:spcPct val="106000"/>
               </a:lnSpc>
@@ -16701,7 +16254,7 @@
           </a:prstGeom>
           <a:extLst>
             <a:ext uri="{C572A759-6A51-4108-AA02-DFA0A04FC94B}">
-              <ma14:wrappingTextBoxFlag xmlns:ma14="http://schemas.microsoft.com/office/mac/drawingml/2011/main" val="0"/>
+              <ma14:wrappingTextBoxFlag xmlns:ma14="http://schemas.microsoft.com/office/mac/drawingml/2011/main" xmlns="" val="0"/>
             </a:ext>
           </a:extLst>
         </p:spPr>
@@ -16719,7 +16272,7 @@
           <a:p>
             <a:pPr algn="r"/>
             <a:fld id="{F7021451-1387-4CA6-816F-3879F97B5CBC}" type="slidenum">
-              <a:rPr b="0" lang="en-US"/>
+              <a:rPr lang="en-US" b="0"/>
               <a:t>5</a:t>
             </a:fld>
             <a:endParaRPr lang="en-US"/>
@@ -16754,9 +16307,11 @@
       <p:sp>
         <p:nvSpPr>
           <p:cNvPr id="2" name="Text 0"/>
-          <p:cNvSpPr/>
+          <p:cNvSpPr>
+            <a:spLocks noGrp="1"/>
+          </p:cNvSpPr>
           <p:nvPr>
-            <p:ph idx="100" type="title" hasCustomPrompt="1"/>
+            <p:ph type="title" idx="100" hasCustomPrompt="1"/>
           </p:nvPr>
         </p:nvSpPr>
         <p:spPr>
@@ -16774,7 +16329,7 @@
           <a:bodyPr wrap="square" lIns="0" tIns="0" rIns="0" bIns="0" rtlCol="0" anchor="ctr"/>
           <a:lstStyle/>
           <a:p>
-            <a:pPr indent="0" marL="0">
+            <a:pPr marL="0" indent="0">
               <a:buNone/>
             </a:pPr>
             <a:r>
@@ -16795,9 +16350,11 @@
       <p:sp>
         <p:nvSpPr>
           <p:cNvPr id="3" name="Text 0"/>
-          <p:cNvSpPr/>
+          <p:cNvSpPr>
+            <a:spLocks noGrp="1"/>
+          </p:cNvSpPr>
           <p:nvPr>
-            <p:ph idx="101" type="body" hasCustomPrompt="1"/>
+            <p:ph type="body" idx="101" hasCustomPrompt="1"/>
           </p:nvPr>
         </p:nvSpPr>
         <p:spPr>
@@ -16815,7 +16372,7 @@
           <a:bodyPr wrap="square" lIns="0" tIns="0" rIns="0" bIns="0" rtlCol="0" anchor="ctr"/>
           <a:lstStyle/>
           <a:p>
-            <a:pPr indent="0" marL="0">
+            <a:pPr marL="0" indent="0">
               <a:buNone/>
             </a:pPr>
             <a:r>
@@ -16833,9 +16390,11 @@
       <p:sp>
         <p:nvSpPr>
           <p:cNvPr id="4" name="Text 0"/>
-          <p:cNvSpPr/>
+          <p:cNvSpPr>
+            <a:spLocks noGrp="1"/>
+          </p:cNvSpPr>
           <p:nvPr>
-            <p:ph idx="102" type="body" hasCustomPrompt="1"/>
+            <p:ph type="body" idx="102" hasCustomPrompt="1"/>
           </p:nvPr>
         </p:nvSpPr>
         <p:spPr>
@@ -16853,7 +16412,7 @@
           <a:bodyPr wrap="square" lIns="0" tIns="0" rIns="0" bIns="0" rtlCol="0" anchor="ctr"/>
           <a:lstStyle/>
           <a:p>
-            <a:pPr indent="0" marL="0">
+            <a:pPr marL="0" indent="0">
               <a:buNone/>
             </a:pPr>
             <a:r>
@@ -16865,48 +16424,6 @@
               <a:t>Ứng dụng gọi Firebase SDK; nhóm vẫn chịu trách nhiệm Rules, cấu hình, chi phí và kiểm thử</a:t>
             </a:r>
             <a:endParaRPr lang="en-US" sz="1800" dirty="0"/>
-          </a:p>
-        </p:txBody>
-      </p:sp>
-      <p:sp>
-        <p:nvSpPr>
-          <p:cNvPr id="5" name="Text 96: Nguồn: F1 · F2 · F3 · F5 | URL đầy đủ trong ghi chú và slide 18"/>
-          <p:cNvSpPr txBox="1"/>
-          <p:nvPr/>
-        </p:nvSpPr>
-        <p:spPr>
-          <a:xfrm>
-            <a:off x="571500" y="5886450"/>
-            <a:ext cx="11087100" cy="228600"/>
-          </a:xfrm>
-          <a:prstGeom prst="rect">
-            <a:avLst/>
-          </a:prstGeom>
-          <a:noFill/>
-          <a:ln/>
-        </p:spPr>
-        <p:txBody>
-          <a:bodyPr wrap="square" lIns="0" tIns="0" rIns="0" bIns="0" rtlCol="0" anchor="t"/>
-          <a:lstStyle/>
-          <a:p>
-            <a:pPr indent="0" marL="0">
-              <a:lnSpc>
-                <a:spcPct val="106000"/>
-              </a:lnSpc>
-              <a:buNone/>
-            </a:pPr>
-            <a:r>
-              <a:rPr lang="en-US" sz="1200" dirty="0">
-                <a:solidFill>
-                  <a:schemeClr val="tx2"/>
-                </a:solidFill>
-                <a:latin typeface="+mn-lt" pitchFamily="34" charset="0"/>
-                <a:ea typeface="+mn-lt" pitchFamily="34" charset="-122"/>
-                <a:cs typeface="+mn-lt" pitchFamily="34" charset="-120"/>
-              </a:rPr>
-              <a:t>Nguồn: F1 · F2 · F3 · F5 | URL đầy đủ trong ghi chú và slide 18</a:t>
-            </a:r>
-            <a:endParaRPr lang="en-US" sz="1200" dirty="0"/>
           </a:p>
         </p:txBody>
       </p:sp>
@@ -16958,7 +16475,7 @@
           <a:bodyPr wrap="square" lIns="0" tIns="0" rIns="0" bIns="0" rtlCol="0" anchor="t"/>
           <a:lstStyle/>
           <a:p>
-            <a:pPr indent="0" marL="0">
+            <a:pPr marL="0" indent="0">
               <a:lnSpc>
                 <a:spcPct val="106000"/>
               </a:lnSpc>
@@ -17000,7 +16517,7 @@
           <a:bodyPr wrap="square" lIns="0" tIns="0" rIns="0" bIns="0" rtlCol="0" anchor="t"/>
           <a:lstStyle/>
           <a:p>
-            <a:pPr indent="0" marL="0">
+            <a:pPr marL="0" indent="0">
               <a:lnSpc>
                 <a:spcPct val="106000"/>
               </a:lnSpc>
@@ -17042,7 +16559,7 @@
           <a:bodyPr wrap="square" lIns="0" tIns="0" rIns="0" bIns="0" rtlCol="0" anchor="t"/>
           <a:lstStyle/>
           <a:p>
-            <a:pPr indent="0" marL="0">
+            <a:pPr marL="0" indent="0">
               <a:lnSpc>
                 <a:spcPct val="106000"/>
               </a:lnSpc>
@@ -17062,7 +16579,7 @@
             <a:endParaRPr lang="en-US" sz="2200" dirty="0"/>
           </a:p>
           <a:p>
-            <a:pPr indent="0" marL="0">
+            <a:pPr marL="0" indent="0">
               <a:lnSpc>
                 <a:spcPct val="106000"/>
               </a:lnSpc>
@@ -17082,7 +16599,7 @@
             <a:endParaRPr lang="en-US" sz="2200" dirty="0"/>
           </a:p>
           <a:p>
-            <a:pPr indent="0" marL="0">
+            <a:pPr marL="0" indent="0">
               <a:lnSpc>
                 <a:spcPct val="106000"/>
               </a:lnSpc>
@@ -17151,7 +16668,7 @@
           <a:bodyPr wrap="square" lIns="0" tIns="0" rIns="0" bIns="0" rtlCol="0" anchor="t"/>
           <a:lstStyle/>
           <a:p>
-            <a:pPr indent="0" marL="0">
+            <a:pPr marL="0" indent="0">
               <a:lnSpc>
                 <a:spcPct val="106000"/>
               </a:lnSpc>
@@ -17193,7 +16710,7 @@
           <a:bodyPr wrap="square" lIns="0" tIns="0" rIns="0" bIns="0" rtlCol="0" anchor="t"/>
           <a:lstStyle/>
           <a:p>
-            <a:pPr indent="0" marL="0">
+            <a:pPr marL="0" indent="0">
               <a:lnSpc>
                 <a:spcPct val="106000"/>
               </a:lnSpc>
@@ -17213,7 +16730,7 @@
             <a:endParaRPr lang="en-US" sz="1800" dirty="0"/>
           </a:p>
           <a:p>
-            <a:pPr indent="0" marL="0">
+            <a:pPr marL="0" indent="0">
               <a:lnSpc>
                 <a:spcPct val="106000"/>
               </a:lnSpc>
@@ -17282,7 +16799,7 @@
           <a:bodyPr wrap="square" lIns="0" tIns="0" rIns="0" bIns="0" rtlCol="0" anchor="t"/>
           <a:lstStyle/>
           <a:p>
-            <a:pPr indent="0" marL="0">
+            <a:pPr marL="0" indent="0">
               <a:lnSpc>
                 <a:spcPct val="106000"/>
               </a:lnSpc>
@@ -17324,7 +16841,7 @@
           <a:bodyPr wrap="square" lIns="0" tIns="0" rIns="0" bIns="0" rtlCol="0" anchor="t"/>
           <a:lstStyle/>
           <a:p>
-            <a:pPr indent="0" marL="0">
+            <a:pPr marL="0" indent="0">
               <a:lnSpc>
                 <a:spcPct val="106000"/>
               </a:lnSpc>
@@ -17344,7 +16861,7 @@
             <a:endParaRPr lang="en-US" sz="1800" dirty="0"/>
           </a:p>
           <a:p>
-            <a:pPr indent="0" marL="0">
+            <a:pPr marL="0" indent="0">
               <a:lnSpc>
                 <a:spcPct val="106000"/>
               </a:lnSpc>
@@ -17413,7 +16930,7 @@
           <a:bodyPr wrap="square" lIns="0" tIns="0" rIns="0" bIns="0" rtlCol="0" anchor="t"/>
           <a:lstStyle/>
           <a:p>
-            <a:pPr indent="0" marL="0">
+            <a:pPr marL="0" indent="0">
               <a:lnSpc>
                 <a:spcPct val="106000"/>
               </a:lnSpc>
@@ -17455,7 +16972,7 @@
           <a:bodyPr wrap="square" lIns="0" tIns="0" rIns="0" bIns="0" rtlCol="0" anchor="t"/>
           <a:lstStyle/>
           <a:p>
-            <a:pPr indent="0" marL="0">
+            <a:pPr marL="0" indent="0">
               <a:lnSpc>
                 <a:spcPct val="106000"/>
               </a:lnSpc>
@@ -17475,7 +16992,7 @@
             <a:endParaRPr lang="en-US" sz="1800" dirty="0"/>
           </a:p>
           <a:p>
-            <a:pPr indent="0" marL="0">
+            <a:pPr marL="0" indent="0">
               <a:lnSpc>
                 <a:spcPct val="106000"/>
               </a:lnSpc>
@@ -17544,7 +17061,7 @@
           <a:bodyPr wrap="square" lIns="0" tIns="0" rIns="0" bIns="0" rtlCol="0" anchor="t"/>
           <a:lstStyle/>
           <a:p>
-            <a:pPr indent="0" marL="0">
+            <a:pPr marL="0" indent="0">
               <a:lnSpc>
                 <a:spcPct val="106000"/>
               </a:lnSpc>
@@ -17586,7 +17103,7 @@
           <a:bodyPr wrap="square" lIns="0" tIns="0" rIns="0" bIns="0" rtlCol="0" anchor="t"/>
           <a:lstStyle/>
           <a:p>
-            <a:pPr indent="0" marL="0">
+            <a:pPr marL="0" indent="0">
               <a:lnSpc>
                 <a:spcPct val="106000"/>
               </a:lnSpc>
@@ -17606,7 +17123,7 @@
             <a:endParaRPr lang="en-US" sz="1800" dirty="0"/>
           </a:p>
           <a:p>
-            <a:pPr indent="0" marL="0">
+            <a:pPr marL="0" indent="0">
               <a:lnSpc>
                 <a:spcPct val="106000"/>
               </a:lnSpc>
@@ -17647,7 +17164,7 @@
           </a:prstGeom>
           <a:extLst>
             <a:ext uri="{C572A759-6A51-4108-AA02-DFA0A04FC94B}">
-              <ma14:wrappingTextBoxFlag xmlns:ma14="http://schemas.microsoft.com/office/mac/drawingml/2011/main" val="0"/>
+              <ma14:wrappingTextBoxFlag xmlns:ma14="http://schemas.microsoft.com/office/mac/drawingml/2011/main" xmlns="" val="0"/>
             </a:ext>
           </a:extLst>
         </p:spPr>
@@ -17665,7 +17182,7 @@
           <a:p>
             <a:pPr algn="r"/>
             <a:fld id="{F7021451-1387-4CA6-816F-3879F97B5CBC}" type="slidenum">
-              <a:rPr b="0" lang="en-US"/>
+              <a:rPr lang="en-US" b="0"/>
               <a:t>6</a:t>
             </a:fld>
             <a:endParaRPr lang="en-US"/>
@@ -17700,9 +17217,11 @@
       <p:sp>
         <p:nvSpPr>
           <p:cNvPr id="2" name="Text 0"/>
-          <p:cNvSpPr/>
+          <p:cNvSpPr>
+            <a:spLocks noGrp="1"/>
+          </p:cNvSpPr>
           <p:nvPr>
-            <p:ph idx="100" type="title" hasCustomPrompt="1"/>
+            <p:ph type="title" idx="100" hasCustomPrompt="1"/>
           </p:nvPr>
         </p:nvSpPr>
         <p:spPr>
@@ -17720,7 +17239,7 @@
           <a:bodyPr wrap="square" lIns="0" tIns="0" rIns="0" bIns="0" rtlCol="0" anchor="ctr"/>
           <a:lstStyle/>
           <a:p>
-            <a:pPr indent="0" marL="0">
+            <a:pPr marL="0" indent="0">
               <a:buNone/>
             </a:pPr>
             <a:r>
@@ -17741,9 +17260,11 @@
       <p:sp>
         <p:nvSpPr>
           <p:cNvPr id="3" name="Text 0"/>
-          <p:cNvSpPr/>
+          <p:cNvSpPr>
+            <a:spLocks noGrp="1"/>
+          </p:cNvSpPr>
           <p:nvPr>
-            <p:ph idx="101" type="body" hasCustomPrompt="1"/>
+            <p:ph type="body" idx="101" hasCustomPrompt="1"/>
           </p:nvPr>
         </p:nvSpPr>
         <p:spPr>
@@ -17761,7 +17282,7 @@
           <a:bodyPr wrap="square" lIns="0" tIns="0" rIns="0" bIns="0" rtlCol="0" anchor="ctr"/>
           <a:lstStyle/>
           <a:p>
-            <a:pPr indent="0" marL="0">
+            <a:pPr marL="0" indent="0">
               <a:buNone/>
             </a:pPr>
             <a:r>
@@ -17779,9 +17300,11 @@
       <p:sp>
         <p:nvSpPr>
           <p:cNvPr id="4" name="Text 0"/>
-          <p:cNvSpPr/>
+          <p:cNvSpPr>
+            <a:spLocks noGrp="1"/>
+          </p:cNvSpPr>
           <p:nvPr>
-            <p:ph idx="102" type="body" hasCustomPrompt="1"/>
+            <p:ph type="body" idx="102" hasCustomPrompt="1"/>
           </p:nvPr>
         </p:nvSpPr>
         <p:spPr>
@@ -17799,7 +17322,7 @@
           <a:bodyPr wrap="square" lIns="0" tIns="0" rIns="0" bIns="0" rtlCol="0" anchor="ctr"/>
           <a:lstStyle/>
           <a:p>
-            <a:pPr indent="0" marL="0">
+            <a:pPr marL="0" indent="0">
               <a:buNone/>
             </a:pPr>
             <a:r>
@@ -17811,48 +17334,6 @@
               <a:t>Sơ đồ native PowerPoint: tất cả khối và mũi tên có thể chỉnh sửa</a:t>
             </a:r>
             <a:endParaRPr lang="en-US" sz="1800" dirty="0"/>
-          </a:p>
-        </p:txBody>
-      </p:sp>
-      <p:sp>
-        <p:nvSpPr>
-          <p:cNvPr id="5" name="Text 113: Nguồn: F1 · F2 · F3 · F5 | URL đầy đủ trong ghi chú và slide 18"/>
-          <p:cNvSpPr txBox="1"/>
-          <p:nvPr/>
-        </p:nvSpPr>
-        <p:spPr>
-          <a:xfrm>
-            <a:off x="571500" y="5886450"/>
-            <a:ext cx="11087100" cy="228600"/>
-          </a:xfrm>
-          <a:prstGeom prst="rect">
-            <a:avLst/>
-          </a:prstGeom>
-          <a:noFill/>
-          <a:ln/>
-        </p:spPr>
-        <p:txBody>
-          <a:bodyPr wrap="square" lIns="0" tIns="0" rIns="0" bIns="0" rtlCol="0" anchor="t"/>
-          <a:lstStyle/>
-          <a:p>
-            <a:pPr indent="0" marL="0">
-              <a:lnSpc>
-                <a:spcPct val="106000"/>
-              </a:lnSpc>
-              <a:buNone/>
-            </a:pPr>
-            <a:r>
-              <a:rPr lang="en-US" sz="1200" dirty="0">
-                <a:solidFill>
-                  <a:schemeClr val="tx2"/>
-                </a:solidFill>
-                <a:latin typeface="+mn-lt" pitchFamily="34" charset="0"/>
-                <a:ea typeface="+mn-lt" pitchFamily="34" charset="-122"/>
-                <a:cs typeface="+mn-lt" pitchFamily="34" charset="-120"/>
-              </a:rPr>
-              <a:t>Nguồn: F1 · F2 · F3 · F5 | URL đầy đủ trong ghi chú và slide 18</a:t>
-            </a:r>
-            <a:endParaRPr lang="en-US" sz="1200" dirty="0"/>
           </a:p>
         </p:txBody>
       </p:sp>
@@ -17931,7 +17412,7 @@
           <a:bodyPr wrap="square" lIns="0" tIns="0" rIns="0" bIns="0" rtlCol="0" anchor="t"/>
           <a:lstStyle/>
           <a:p>
-            <a:pPr indent="0" marL="0">
+            <a:pPr marL="0" indent="0">
               <a:lnSpc>
                 <a:spcPct val="106000"/>
               </a:lnSpc>
@@ -17973,7 +17454,7 @@
           <a:bodyPr wrap="square" lIns="0" tIns="0" rIns="0" bIns="0" rtlCol="0" anchor="t"/>
           <a:lstStyle/>
           <a:p>
-            <a:pPr indent="0" marL="0">
+            <a:pPr marL="0" indent="0">
               <a:lnSpc>
                 <a:spcPct val="106000"/>
               </a:lnSpc>
@@ -18042,7 +17523,7 @@
           <a:bodyPr wrap="square" lIns="0" tIns="0" rIns="0" bIns="0" rtlCol="0" anchor="ctr"/>
           <a:lstStyle/>
           <a:p>
-            <a:pPr algn="ctr" indent="0" marL="0">
+            <a:pPr marL="0" indent="0" algn="ctr">
               <a:lnSpc>
                 <a:spcPct val="106000"/>
               </a:lnSpc>
@@ -18084,7 +17565,7 @@
           <a:bodyPr wrap="square" lIns="0" tIns="0" rIns="0" bIns="0" rtlCol="0" anchor="ctr"/>
           <a:lstStyle/>
           <a:p>
-            <a:pPr algn="ctr" indent="0" marL="0">
+            <a:pPr marL="0" indent="0" algn="ctr">
               <a:lnSpc>
                 <a:spcPct val="106000"/>
               </a:lnSpc>
@@ -18153,7 +17634,7 @@
           <a:bodyPr wrap="square" lIns="0" tIns="0" rIns="0" bIns="0" rtlCol="0" anchor="ctr"/>
           <a:lstStyle/>
           <a:p>
-            <a:pPr algn="ctr" indent="0" marL="0">
+            <a:pPr marL="0" indent="0" algn="ctr">
               <a:lnSpc>
                 <a:spcPct val="106000"/>
               </a:lnSpc>
@@ -18195,7 +17676,7 @@
           <a:bodyPr wrap="square" lIns="0" tIns="0" rIns="0" bIns="0" rtlCol="0" anchor="ctr"/>
           <a:lstStyle/>
           <a:p>
-            <a:pPr algn="ctr" indent="0" marL="0">
+            <a:pPr marL="0" indent="0" algn="ctr">
               <a:lnSpc>
                 <a:spcPct val="106000"/>
               </a:lnSpc>
@@ -18264,7 +17745,7 @@
           <a:bodyPr wrap="square" lIns="0" tIns="0" rIns="0" bIns="0" rtlCol="0" anchor="ctr"/>
           <a:lstStyle/>
           <a:p>
-            <a:pPr algn="ctr" indent="0" marL="0">
+            <a:pPr marL="0" indent="0" algn="ctr">
               <a:lnSpc>
                 <a:spcPct val="106000"/>
               </a:lnSpc>
@@ -18306,7 +17787,7 @@
           <a:bodyPr wrap="square" lIns="0" tIns="0" rIns="0" bIns="0" rtlCol="0" anchor="ctr"/>
           <a:lstStyle/>
           <a:p>
-            <a:pPr algn="ctr" indent="0" marL="0">
+            <a:pPr marL="0" indent="0" algn="ctr">
               <a:lnSpc>
                 <a:spcPct val="106000"/>
               </a:lnSpc>
@@ -18375,7 +17856,7 @@
           <a:bodyPr wrap="square" lIns="0" tIns="0" rIns="0" bIns="0" rtlCol="0" anchor="ctr"/>
           <a:lstStyle/>
           <a:p>
-            <a:pPr algn="ctr" indent="0" marL="0">
+            <a:pPr marL="0" indent="0" algn="ctr">
               <a:lnSpc>
                 <a:spcPct val="106000"/>
               </a:lnSpc>
@@ -18417,7 +17898,7 @@
           <a:bodyPr wrap="square" lIns="0" tIns="0" rIns="0" bIns="0" rtlCol="0" anchor="ctr"/>
           <a:lstStyle/>
           <a:p>
-            <a:pPr algn="ctr" indent="0" marL="0">
+            <a:pPr marL="0" indent="0" algn="ctr">
               <a:lnSpc>
                 <a:spcPct val="106000"/>
               </a:lnSpc>
@@ -18437,7 +17918,7 @@
             <a:endParaRPr lang="en-US" sz="1800" dirty="0"/>
           </a:p>
           <a:p>
-            <a:pPr algn="ctr" indent="0" marL="0">
+            <a:pPr marL="0" indent="0" algn="ctr">
               <a:lnSpc>
                 <a:spcPct val="106000"/>
               </a:lnSpc>
@@ -18506,7 +17987,7 @@
           <a:bodyPr wrap="square" lIns="0" tIns="0" rIns="0" bIns="0" rtlCol="0" anchor="ctr"/>
           <a:lstStyle/>
           <a:p>
-            <a:pPr algn="ctr" indent="0" marL="0">
+            <a:pPr marL="0" indent="0" algn="ctr">
               <a:lnSpc>
                 <a:spcPct val="106000"/>
               </a:lnSpc>
@@ -18548,7 +18029,7 @@
           <a:bodyPr wrap="square" lIns="0" tIns="0" rIns="0" bIns="0" rtlCol="0" anchor="ctr"/>
           <a:lstStyle/>
           <a:p>
-            <a:pPr algn="ctr" indent="0" marL="0">
+            <a:pPr marL="0" indent="0" algn="ctr">
               <a:lnSpc>
                 <a:spcPct val="106000"/>
               </a:lnSpc>
@@ -18568,7 +18049,7 @@
             <a:endParaRPr lang="en-US" sz="1800" dirty="0"/>
           </a:p>
           <a:p>
-            <a:pPr algn="ctr" indent="0" marL="0">
+            <a:pPr marL="0" indent="0" algn="ctr">
               <a:lnSpc>
                 <a:spcPct val="106000"/>
               </a:lnSpc>
@@ -18754,7 +18235,7 @@
           <a:bodyPr wrap="square" lIns="0" tIns="0" rIns="0" bIns="0" rtlCol="0" anchor="t"/>
           <a:lstStyle/>
           <a:p>
-            <a:pPr algn="ctr" indent="0" marL="0">
+            <a:pPr marL="0" indent="0" algn="ctr">
               <a:lnSpc>
                 <a:spcPct val="106000"/>
               </a:lnSpc>
@@ -18796,7 +18277,7 @@
           <a:bodyPr wrap="square" lIns="0" tIns="0" rIns="0" bIns="0" rtlCol="0" anchor="t"/>
           <a:lstStyle/>
           <a:p>
-            <a:pPr indent="0" marL="0">
+            <a:pPr marL="0" indent="0">
               <a:lnSpc>
                 <a:spcPct val="106000"/>
               </a:lnSpc>
@@ -18819,7 +18300,7 @@
       </p:sp>
       <p:sp>
         <p:nvSpPr>
-          <p:cNvPr id="25" name="Slide Number Placeholder 0"/>
+          <p:cNvPr id="6" name="Slide Number Placeholder 0"/>
           <p:cNvSpPr>
             <a:spLocks noGrp="1"/>
           </p:cNvSpPr>
@@ -18837,7 +18318,7 @@
           </a:prstGeom>
           <a:extLst>
             <a:ext uri="{C572A759-6A51-4108-AA02-DFA0A04FC94B}">
-              <ma14:wrappingTextBoxFlag xmlns:ma14="http://schemas.microsoft.com/office/mac/drawingml/2011/main" val="0"/>
+              <ma14:wrappingTextBoxFlag xmlns:ma14="http://schemas.microsoft.com/office/mac/drawingml/2011/main" xmlns="" val="0"/>
             </a:ext>
           </a:extLst>
         </p:spPr>
@@ -18855,7 +18336,7 @@
           <a:p>
             <a:pPr algn="r"/>
             <a:fld id="{F7021451-1387-4CA6-816F-3879F97B5CBC}" type="slidenum">
-              <a:rPr b="0" lang="en-US"/>
+              <a:rPr lang="en-US" b="0"/>
               <a:t>7</a:t>
             </a:fld>
             <a:endParaRPr lang="en-US"/>
@@ -18890,9 +18371,11 @@
       <p:sp>
         <p:nvSpPr>
           <p:cNvPr id="2" name="Text 0"/>
-          <p:cNvSpPr/>
+          <p:cNvSpPr>
+            <a:spLocks noGrp="1"/>
+          </p:cNvSpPr>
           <p:nvPr>
-            <p:ph idx="100" type="title" hasCustomPrompt="1"/>
+            <p:ph type="title" idx="100" hasCustomPrompt="1"/>
           </p:nvPr>
         </p:nvSpPr>
         <p:spPr>
@@ -18910,7 +18393,7 @@
           <a:bodyPr wrap="square" lIns="0" tIns="0" rIns="0" bIns="0" rtlCol="0" anchor="ctr"/>
           <a:lstStyle/>
           <a:p>
-            <a:pPr indent="0" marL="0">
+            <a:pPr marL="0" indent="0">
               <a:buNone/>
             </a:pPr>
             <a:r>
@@ -18931,9 +18414,11 @@
       <p:sp>
         <p:nvSpPr>
           <p:cNvPr id="3" name="Text 0"/>
-          <p:cNvSpPr/>
+          <p:cNvSpPr>
+            <a:spLocks noGrp="1"/>
+          </p:cNvSpPr>
           <p:nvPr>
-            <p:ph idx="101" type="body" hasCustomPrompt="1"/>
+            <p:ph type="body" idx="101" hasCustomPrompt="1"/>
           </p:nvPr>
         </p:nvSpPr>
         <p:spPr>
@@ -18951,7 +18436,7 @@
           <a:bodyPr wrap="square" lIns="0" tIns="0" rIns="0" bIns="0" rtlCol="0" anchor="ctr"/>
           <a:lstStyle/>
           <a:p>
-            <a:pPr indent="0" marL="0">
+            <a:pPr marL="0" indent="0">
               <a:buNone/>
             </a:pPr>
             <a:r>
@@ -18969,9 +18454,11 @@
       <p:sp>
         <p:nvSpPr>
           <p:cNvPr id="4" name="Text 0"/>
-          <p:cNvSpPr/>
+          <p:cNvSpPr>
+            <a:spLocks noGrp="1"/>
+          </p:cNvSpPr>
           <p:nvPr>
-            <p:ph idx="102" type="body" hasCustomPrompt="1"/>
+            <p:ph type="body" idx="102" hasCustomPrompt="1"/>
           </p:nvPr>
         </p:nvSpPr>
         <p:spPr>
@@ -18989,7 +18476,7 @@
           <a:bodyPr wrap="square" lIns="0" tIns="0" rIns="0" bIns="0" rtlCol="0" anchor="ctr"/>
           <a:lstStyle/>
           <a:p>
-            <a:pPr indent="0" marL="0">
+            <a:pPr marL="0" indent="0">
               <a:buNone/>
             </a:pPr>
             <a:r>
@@ -19001,48 +18488,6 @@
               <a:t>Đăng nhập → danh tính; upload → binary + metadata; download → byte được xác thực</a:t>
             </a:r>
             <a:endParaRPr lang="en-US" sz="1800" dirty="0"/>
-          </a:p>
-        </p:txBody>
-      </p:sp>
-      <p:sp>
-        <p:nvSpPr>
-          <p:cNvPr id="5" name="Text 141: Nguồn: F2 · F4 | URL đầy đủ trong ghi chú và slide 18"/>
-          <p:cNvSpPr txBox="1"/>
-          <p:nvPr/>
-        </p:nvSpPr>
-        <p:spPr>
-          <a:xfrm>
-            <a:off x="571500" y="5886450"/>
-            <a:ext cx="11087100" cy="228600"/>
-          </a:xfrm>
-          <a:prstGeom prst="rect">
-            <a:avLst/>
-          </a:prstGeom>
-          <a:noFill/>
-          <a:ln/>
-        </p:spPr>
-        <p:txBody>
-          <a:bodyPr wrap="square" lIns="0" tIns="0" rIns="0" bIns="0" rtlCol="0" anchor="t"/>
-          <a:lstStyle/>
-          <a:p>
-            <a:pPr indent="0" marL="0">
-              <a:lnSpc>
-                <a:spcPct val="106000"/>
-              </a:lnSpc>
-              <a:buNone/>
-            </a:pPr>
-            <a:r>
-              <a:rPr lang="en-US" sz="1200" dirty="0">
-                <a:solidFill>
-                  <a:schemeClr val="tx2"/>
-                </a:solidFill>
-                <a:latin typeface="+mn-lt" pitchFamily="34" charset="0"/>
-                <a:ea typeface="+mn-lt" pitchFamily="34" charset="-122"/>
-                <a:cs typeface="+mn-lt" pitchFamily="34" charset="-120"/>
-              </a:rPr>
-              <a:t>Nguồn: F2 · F4 | URL đầy đủ trong ghi chú và slide 18</a:t>
-            </a:r>
-            <a:endParaRPr lang="en-US" sz="1200" dirty="0"/>
           </a:p>
         </p:txBody>
       </p:sp>
@@ -19094,7 +18539,7 @@
           <a:bodyPr wrap="square" lIns="0" tIns="0" rIns="0" bIns="0" rtlCol="0" anchor="ctr"/>
           <a:lstStyle/>
           <a:p>
-            <a:pPr indent="0" marL="0">
+            <a:pPr marL="0" indent="0">
               <a:lnSpc>
                 <a:spcPct val="106000"/>
               </a:lnSpc>
@@ -19163,7 +18608,7 @@
           <a:bodyPr wrap="square" lIns="0" tIns="0" rIns="0" bIns="0" rtlCol="0" anchor="ctr"/>
           <a:lstStyle/>
           <a:p>
-            <a:pPr algn="ctr" indent="0" marL="0">
+            <a:pPr marL="0" indent="0" algn="ctr">
               <a:lnSpc>
                 <a:spcPct val="106000"/>
               </a:lnSpc>
@@ -19256,7 +18701,7 @@
           <a:bodyPr wrap="square" lIns="0" tIns="0" rIns="0" bIns="0" rtlCol="0" anchor="ctr"/>
           <a:lstStyle/>
           <a:p>
-            <a:pPr algn="ctr" indent="0" marL="0">
+            <a:pPr marL="0" indent="0" algn="ctr">
               <a:lnSpc>
                 <a:spcPct val="106000"/>
               </a:lnSpc>
@@ -19349,7 +18794,7 @@
           <a:bodyPr wrap="square" lIns="0" tIns="0" rIns="0" bIns="0" rtlCol="0" anchor="ctr"/>
           <a:lstStyle/>
           <a:p>
-            <a:pPr algn="ctr" indent="0" marL="0">
+            <a:pPr marL="0" indent="0" algn="ctr">
               <a:lnSpc>
                 <a:spcPct val="106000"/>
               </a:lnSpc>
@@ -19442,7 +18887,7 @@
           <a:bodyPr wrap="square" lIns="0" tIns="0" rIns="0" bIns="0" rtlCol="0" anchor="ctr"/>
           <a:lstStyle/>
           <a:p>
-            <a:pPr algn="ctr" indent="0" marL="0">
+            <a:pPr marL="0" indent="0" algn="ctr">
               <a:lnSpc>
                 <a:spcPct val="106000"/>
               </a:lnSpc>
@@ -19511,7 +18956,7 @@
           <a:bodyPr wrap="square" lIns="0" tIns="0" rIns="0" bIns="0" rtlCol="0" anchor="ctr"/>
           <a:lstStyle/>
           <a:p>
-            <a:pPr indent="0" marL="0">
+            <a:pPr marL="0" indent="0">
               <a:lnSpc>
                 <a:spcPct val="106000"/>
               </a:lnSpc>
@@ -19580,7 +19025,7 @@
           <a:bodyPr wrap="square" lIns="0" tIns="0" rIns="0" bIns="0" rtlCol="0" anchor="ctr"/>
           <a:lstStyle/>
           <a:p>
-            <a:pPr algn="ctr" indent="0" marL="0">
+            <a:pPr marL="0" indent="0" algn="ctr">
               <a:lnSpc>
                 <a:spcPct val="106000"/>
               </a:lnSpc>
@@ -19673,7 +19118,7 @@
           <a:bodyPr wrap="square" lIns="0" tIns="0" rIns="0" bIns="0" rtlCol="0" anchor="ctr"/>
           <a:lstStyle/>
           <a:p>
-            <a:pPr algn="ctr" indent="0" marL="0">
+            <a:pPr marL="0" indent="0" algn="ctr">
               <a:lnSpc>
                 <a:spcPct val="106000"/>
               </a:lnSpc>
@@ -19766,7 +19211,7 @@
           <a:bodyPr wrap="square" lIns="0" tIns="0" rIns="0" bIns="0" rtlCol="0" anchor="ctr"/>
           <a:lstStyle/>
           <a:p>
-            <a:pPr algn="ctr" indent="0" marL="0">
+            <a:pPr marL="0" indent="0" algn="ctr">
               <a:lnSpc>
                 <a:spcPct val="106000"/>
               </a:lnSpc>
@@ -19859,7 +19304,7 @@
           <a:bodyPr wrap="square" lIns="0" tIns="0" rIns="0" bIns="0" rtlCol="0" anchor="ctr"/>
           <a:lstStyle/>
           <a:p>
-            <a:pPr algn="ctr" indent="0" marL="0">
+            <a:pPr marL="0" indent="0" algn="ctr">
               <a:lnSpc>
                 <a:spcPct val="106000"/>
               </a:lnSpc>
@@ -19928,7 +19373,7 @@
           <a:bodyPr wrap="square" lIns="0" tIns="0" rIns="0" bIns="0" rtlCol="0" anchor="ctr"/>
           <a:lstStyle/>
           <a:p>
-            <a:pPr indent="0" marL="0">
+            <a:pPr marL="0" indent="0">
               <a:lnSpc>
                 <a:spcPct val="106000"/>
               </a:lnSpc>
@@ -19997,7 +19442,7 @@
           <a:bodyPr wrap="square" lIns="0" tIns="0" rIns="0" bIns="0" rtlCol="0" anchor="ctr"/>
           <a:lstStyle/>
           <a:p>
-            <a:pPr algn="ctr" indent="0" marL="0">
+            <a:pPr marL="0" indent="0" algn="ctr">
               <a:lnSpc>
                 <a:spcPct val="106000"/>
               </a:lnSpc>
@@ -20090,7 +19535,7 @@
           <a:bodyPr wrap="square" lIns="0" tIns="0" rIns="0" bIns="0" rtlCol="0" anchor="ctr"/>
           <a:lstStyle/>
           <a:p>
-            <a:pPr algn="ctr" indent="0" marL="0">
+            <a:pPr marL="0" indent="0" algn="ctr">
               <a:lnSpc>
                 <a:spcPct val="106000"/>
               </a:lnSpc>
@@ -20183,7 +19628,7 @@
           <a:bodyPr wrap="square" lIns="0" tIns="0" rIns="0" bIns="0" rtlCol="0" anchor="ctr"/>
           <a:lstStyle/>
           <a:p>
-            <a:pPr algn="ctr" indent="0" marL="0">
+            <a:pPr marL="0" indent="0" algn="ctr">
               <a:lnSpc>
                 <a:spcPct val="106000"/>
               </a:lnSpc>
@@ -20276,7 +19721,7 @@
           <a:bodyPr wrap="square" lIns="0" tIns="0" rIns="0" bIns="0" rtlCol="0" anchor="ctr"/>
           <a:lstStyle/>
           <a:p>
-            <a:pPr algn="ctr" indent="0" marL="0">
+            <a:pPr marL="0" indent="0" algn="ctr">
               <a:lnSpc>
                 <a:spcPct val="106000"/>
               </a:lnSpc>
@@ -20345,7 +19790,7 @@
           <a:bodyPr wrap="square" lIns="0" tIns="0" rIns="0" bIns="0" rtlCol="0" anchor="ctr"/>
           <a:lstStyle/>
           <a:p>
-            <a:pPr indent="0" marL="0">
+            <a:pPr marL="0" indent="0">
               <a:lnSpc>
                 <a:spcPct val="106000"/>
               </a:lnSpc>
@@ -20368,7 +19813,7 @@
       </p:sp>
       <p:sp>
         <p:nvSpPr>
-          <p:cNvPr id="25" name="Slide Number Placeholder 0"/>
+          <p:cNvPr id="6" name="Slide Number Placeholder 0"/>
           <p:cNvSpPr>
             <a:spLocks noGrp="1"/>
           </p:cNvSpPr>
@@ -20386,7 +19831,7 @@
           </a:prstGeom>
           <a:extLst>
             <a:ext uri="{C572A759-6A51-4108-AA02-DFA0A04FC94B}">
-              <ma14:wrappingTextBoxFlag xmlns:ma14="http://schemas.microsoft.com/office/mac/drawingml/2011/main" val="0"/>
+              <ma14:wrappingTextBoxFlag xmlns:ma14="http://schemas.microsoft.com/office/mac/drawingml/2011/main" xmlns="" val="0"/>
             </a:ext>
           </a:extLst>
         </p:spPr>
@@ -20404,7 +19849,7 @@
           <a:p>
             <a:pPr algn="r"/>
             <a:fld id="{F7021451-1387-4CA6-816F-3879F97B5CBC}" type="slidenum">
-              <a:rPr b="0" lang="en-US"/>
+              <a:rPr lang="en-US" b="0"/>
               <a:t>8</a:t>
             </a:fld>
             <a:endParaRPr lang="en-US"/>
@@ -20439,9 +19884,11 @@
       <p:sp>
         <p:nvSpPr>
           <p:cNvPr id="2" name="Text 0"/>
-          <p:cNvSpPr/>
+          <p:cNvSpPr>
+            <a:spLocks noGrp="1"/>
+          </p:cNvSpPr>
           <p:nvPr>
-            <p:ph idx="100" type="title" hasCustomPrompt="1"/>
+            <p:ph type="title" idx="100" hasCustomPrompt="1"/>
           </p:nvPr>
         </p:nvSpPr>
         <p:spPr>
@@ -20459,7 +19906,7 @@
           <a:bodyPr wrap="square" lIns="0" tIns="0" rIns="0" bIns="0" rtlCol="0" anchor="ctr"/>
           <a:lstStyle/>
           <a:p>
-            <a:pPr indent="0" marL="0">
+            <a:pPr marL="0" indent="0">
               <a:buNone/>
             </a:pPr>
             <a:r>
@@ -20480,9 +19927,11 @@
       <p:sp>
         <p:nvSpPr>
           <p:cNvPr id="3" name="Text 0"/>
-          <p:cNvSpPr/>
+          <p:cNvSpPr>
+            <a:spLocks noGrp="1"/>
+          </p:cNvSpPr>
           <p:nvPr>
-            <p:ph idx="101" type="body" hasCustomPrompt="1"/>
+            <p:ph type="body" idx="101" hasCustomPrompt="1"/>
           </p:nvPr>
         </p:nvSpPr>
         <p:spPr>
@@ -20500,7 +19949,7 @@
           <a:bodyPr wrap="square" lIns="0" tIns="0" rIns="0" bIns="0" rtlCol="0" anchor="ctr"/>
           <a:lstStyle/>
           <a:p>
-            <a:pPr indent="0" marL="0">
+            <a:pPr marL="0" indent="0">
               <a:buNone/>
             </a:pPr>
             <a:r>
@@ -20518,9 +19967,11 @@
       <p:sp>
         <p:nvSpPr>
           <p:cNvPr id="4" name="Text 0"/>
-          <p:cNvSpPr/>
+          <p:cNvSpPr>
+            <a:spLocks noGrp="1"/>
+          </p:cNvSpPr>
           <p:nvPr>
-            <p:ph idx="102" type="body" hasCustomPrompt="1"/>
+            <p:ph type="body" idx="102" hasCustomPrompt="1"/>
           </p:nvPr>
         </p:nvSpPr>
         <p:spPr>
@@ -20538,7 +19989,7 @@
           <a:bodyPr wrap="square" lIns="0" tIns="0" rIns="0" bIns="0" rtlCol="0" anchor="ctr"/>
           <a:lstStyle/>
           <a:p>
-            <a:pPr indent="0" marL="0">
+            <a:pPr marL="0" indent="0">
               <a:buNone/>
             </a:pPr>
             <a:r>
@@ -20628,7 +20079,7 @@
           <a:bodyPr wrap="square" lIns="0" tIns="0" rIns="0" bIns="0" rtlCol="0" anchor="t"/>
           <a:lstStyle/>
           <a:p>
-            <a:pPr indent="0" marL="0">
+            <a:pPr marL="0" indent="0">
               <a:lnSpc>
                 <a:spcPct val="106000"/>
               </a:lnSpc>
@@ -20670,7 +20121,7 @@
           <a:bodyPr wrap="square" lIns="0" tIns="0" rIns="0" bIns="0" rtlCol="0" anchor="t"/>
           <a:lstStyle/>
           <a:p>
-            <a:pPr indent="0" marL="0">
+            <a:pPr marL="0" indent="0">
               <a:lnSpc>
                 <a:spcPct val="106000"/>
               </a:lnSpc>
@@ -20712,7 +20163,7 @@
           <a:bodyPr wrap="square" lIns="0" tIns="0" rIns="0" bIns="0" rtlCol="0" anchor="t"/>
           <a:lstStyle/>
           <a:p>
-            <a:pPr indent="0" marL="0">
+            <a:pPr marL="0" indent="0">
               <a:lnSpc>
                 <a:spcPct val="106000"/>
               </a:lnSpc>
@@ -20754,7 +20205,7 @@
           <a:bodyPr wrap="square" lIns="0" tIns="0" rIns="0" bIns="0" rtlCol="0" anchor="t"/>
           <a:lstStyle/>
           <a:p>
-            <a:pPr indent="0" marL="0">
+            <a:pPr marL="0" indent="0">
               <a:lnSpc>
                 <a:spcPct val="106000"/>
               </a:lnSpc>
@@ -20796,7 +20247,7 @@
           <a:bodyPr wrap="square" lIns="0" tIns="0" rIns="0" bIns="0" rtlCol="0" anchor="t"/>
           <a:lstStyle/>
           <a:p>
-            <a:pPr indent="0" marL="0">
+            <a:pPr marL="0" indent="0">
               <a:lnSpc>
                 <a:spcPct val="106000"/>
               </a:lnSpc>
@@ -20838,7 +20289,7 @@
           <a:bodyPr wrap="square" lIns="0" tIns="0" rIns="0" bIns="0" rtlCol="0" anchor="t"/>
           <a:lstStyle/>
           <a:p>
-            <a:pPr indent="0" marL="0">
+            <a:pPr marL="0" indent="0">
               <a:lnSpc>
                 <a:spcPct val="106000"/>
               </a:lnSpc>
@@ -20880,7 +20331,7 @@
           <a:bodyPr wrap="square" lIns="0" tIns="0" rIns="0" bIns="0" rtlCol="0" anchor="t"/>
           <a:lstStyle/>
           <a:p>
-            <a:pPr indent="0" marL="0">
+            <a:pPr marL="0" indent="0">
               <a:lnSpc>
                 <a:spcPct val="106000"/>
               </a:lnSpc>
@@ -20922,7 +20373,7 @@
           <a:bodyPr wrap="square" lIns="0" tIns="0" rIns="0" bIns="0" rtlCol="0" anchor="t"/>
           <a:lstStyle/>
           <a:p>
-            <a:pPr indent="0" marL="0">
+            <a:pPr marL="0" indent="0">
               <a:lnSpc>
                 <a:spcPct val="106000"/>
               </a:lnSpc>
@@ -20964,7 +20415,7 @@
           <a:bodyPr wrap="square" lIns="0" tIns="0" rIns="0" bIns="0" rtlCol="0" anchor="t"/>
           <a:lstStyle/>
           <a:p>
-            <a:pPr indent="0" marL="0">
+            <a:pPr marL="0" indent="0">
               <a:lnSpc>
                 <a:spcPct val="106000"/>
               </a:lnSpc>
@@ -21006,7 +20457,7 @@
           <a:bodyPr wrap="square" lIns="0" tIns="0" rIns="0" bIns="0" rtlCol="0" anchor="t"/>
           <a:lstStyle/>
           <a:p>
-            <a:pPr indent="0" marL="0">
+            <a:pPr marL="0" indent="0">
               <a:lnSpc>
                 <a:spcPct val="106000"/>
               </a:lnSpc>
@@ -21048,7 +20499,7 @@
           <a:bodyPr wrap="square" lIns="0" tIns="0" rIns="0" bIns="0" rtlCol="0" anchor="t"/>
           <a:lstStyle/>
           <a:p>
-            <a:pPr indent="0" marL="0">
+            <a:pPr marL="0" indent="0">
               <a:lnSpc>
                 <a:spcPct val="106000"/>
               </a:lnSpc>
@@ -21090,7 +20541,7 @@
           <a:bodyPr wrap="square" lIns="0" tIns="0" rIns="0" bIns="0" rtlCol="0" anchor="t"/>
           <a:lstStyle/>
           <a:p>
-            <a:pPr indent="0" marL="0">
+            <a:pPr marL="0" indent="0">
               <a:lnSpc>
                 <a:spcPct val="106000"/>
               </a:lnSpc>
@@ -21132,7 +20583,7 @@
           <a:bodyPr wrap="square" lIns="0" tIns="0" rIns="0" bIns="0" rtlCol="0" anchor="t"/>
           <a:lstStyle/>
           <a:p>
-            <a:pPr indent="0" marL="0">
+            <a:pPr marL="0" indent="0">
               <a:lnSpc>
                 <a:spcPct val="106000"/>
               </a:lnSpc>
@@ -21174,7 +20625,7 @@
           <a:bodyPr wrap="square" lIns="0" tIns="0" rIns="0" bIns="0" rtlCol="0" anchor="t"/>
           <a:lstStyle/>
           <a:p>
-            <a:pPr indent="0" marL="0">
+            <a:pPr marL="0" indent="0">
               <a:lnSpc>
                 <a:spcPct val="106000"/>
               </a:lnSpc>
@@ -21216,7 +20667,7 @@
           <a:bodyPr wrap="square" lIns="0" tIns="0" rIns="0" bIns="0" rtlCol="0" anchor="t"/>
           <a:lstStyle/>
           <a:p>
-            <a:pPr indent="0" marL="0">
+            <a:pPr marL="0" indent="0">
               <a:lnSpc>
                 <a:spcPct val="106000"/>
               </a:lnSpc>
@@ -21257,7 +20708,7 @@
           </a:prstGeom>
           <a:extLst>
             <a:ext uri="{C572A759-6A51-4108-AA02-DFA0A04FC94B}">
-              <ma14:wrappingTextBoxFlag xmlns:ma14="http://schemas.microsoft.com/office/mac/drawingml/2011/main" val="0"/>
+              <ma14:wrappingTextBoxFlag xmlns:ma14="http://schemas.microsoft.com/office/mac/drawingml/2011/main" xmlns="" val="0"/>
             </a:ext>
           </a:extLst>
         </p:spPr>
@@ -21275,7 +20726,7 @@
           <a:p>
             <a:pPr algn="r"/>
             <a:fld id="{F7021451-1387-4CA6-816F-3879F97B5CBC}" type="slidenum">
-              <a:rPr b="0" lang="en-US"/>
+              <a:rPr lang="en-US" b="0"/>
               <a:t>9</a:t>
             </a:fld>
             <a:endParaRPr lang="en-US"/>
@@ -21583,4 +21034,319 @@
     </a:ext>
   </a:extLst>
 </a:theme>
+</file>
+
+<file path=ppt/theme/theme2.xml><?xml version="1.0" encoding="utf-8"?>
+<a:theme xmlns:a="http://schemas.openxmlformats.org/drawingml/2006/main" name="Office Theme">
+  <a:themeElements>
+    <a:clrScheme name="Office">
+      <a:dk1>
+        <a:sysClr val="windowText" lastClr="000000"/>
+      </a:dk1>
+      <a:lt1>
+        <a:sysClr val="window" lastClr="FFFFFF"/>
+      </a:lt1>
+      <a:dk2>
+        <a:srgbClr val="0E2841"/>
+      </a:dk2>
+      <a:lt2>
+        <a:srgbClr val="E8E8E8"/>
+      </a:lt2>
+      <a:accent1>
+        <a:srgbClr val="156082"/>
+      </a:accent1>
+      <a:accent2>
+        <a:srgbClr val="E97132"/>
+      </a:accent2>
+      <a:accent3>
+        <a:srgbClr val="196B24"/>
+      </a:accent3>
+      <a:accent4>
+        <a:srgbClr val="0F9ED5"/>
+      </a:accent4>
+      <a:accent5>
+        <a:srgbClr val="A02B93"/>
+      </a:accent5>
+      <a:accent6>
+        <a:srgbClr val="4EA72E"/>
+      </a:accent6>
+      <a:hlink>
+        <a:srgbClr val="467886"/>
+      </a:hlink>
+      <a:folHlink>
+        <a:srgbClr val="96607D"/>
+      </a:folHlink>
+    </a:clrScheme>
+    <a:fontScheme name="Office">
+      <a:majorFont>
+        <a:latin typeface="Aptos Display" panose="02110004020202020204"/>
+        <a:ea typeface=""/>
+        <a:cs typeface=""/>
+        <a:font script="Jpan" typeface="游ゴシック Light"/>
+        <a:font script="Hang" typeface="맑은 고딕"/>
+        <a:font script="Hans" typeface="等线 Light"/>
+        <a:font script="Hant" typeface="新細明體"/>
+        <a:font script="Arab" typeface="Times New Roman"/>
+        <a:font script="Hebr" typeface="Times New Roman"/>
+        <a:font script="Thai" typeface="Angsana New"/>
+        <a:font script="Ethi" typeface="Nyala"/>
+        <a:font script="Beng" typeface="Vrinda"/>
+        <a:font script="Gujr" typeface="Shruti"/>
+        <a:font script="Khmr" typeface="MoolBoran"/>
+        <a:font script="Knda" typeface="Tunga"/>
+        <a:font script="Guru" typeface="Raavi"/>
+        <a:font script="Cans" typeface="Euphemia"/>
+        <a:font script="Cher" typeface="Plantagenet Cherokee"/>
+        <a:font script="Yiii" typeface="Microsoft Yi Baiti"/>
+        <a:font script="Tibt" typeface="Microsoft Himalaya"/>
+        <a:font script="Thaa" typeface="MV Boli"/>
+        <a:font script="Deva" typeface="Mangal"/>
+        <a:font script="Telu" typeface="Gautami"/>
+        <a:font script="Taml" typeface="Latha"/>
+        <a:font script="Syrc" typeface="Estrangelo Edessa"/>
+        <a:font script="Orya" typeface="Kalinga"/>
+        <a:font script="Mlym" typeface="Kartika"/>
+        <a:font script="Laoo" typeface="DokChampa"/>
+        <a:font script="Sinh" typeface="Iskoola Pota"/>
+        <a:font script="Mong" typeface="Mongolian Baiti"/>
+        <a:font script="Viet" typeface="Times New Roman"/>
+        <a:font script="Uigh" typeface="Microsoft Uighur"/>
+        <a:font script="Geor" typeface="Sylfaen"/>
+        <a:font script="Armn" typeface="Arial"/>
+        <a:font script="Bugi" typeface="Leelawadee UI"/>
+        <a:font script="Bopo" typeface="Microsoft JhengHei"/>
+        <a:font script="Java" typeface="Javanese Text"/>
+        <a:font script="Lisu" typeface="Segoe UI"/>
+        <a:font script="Mymr" typeface="Myanmar Text"/>
+        <a:font script="Nkoo" typeface="Ebrima"/>
+        <a:font script="Olck" typeface="Nirmala UI"/>
+        <a:font script="Osma" typeface="Ebrima"/>
+        <a:font script="Phag" typeface="Phagspa"/>
+        <a:font script="Syrn" typeface="Estrangelo Edessa"/>
+        <a:font script="Syrj" typeface="Estrangelo Edessa"/>
+        <a:font script="Syre" typeface="Estrangelo Edessa"/>
+        <a:font script="Sora" typeface="Nirmala UI"/>
+        <a:font script="Tale" typeface="Microsoft Tai Le"/>
+        <a:font script="Talu" typeface="Microsoft New Tai Lue"/>
+        <a:font script="Tfng" typeface="Ebrima"/>
+      </a:majorFont>
+      <a:minorFont>
+        <a:latin typeface="Aptos" panose="02110004020202020204"/>
+        <a:ea typeface=""/>
+        <a:cs typeface=""/>
+        <a:font script="Jpan" typeface="游ゴシック"/>
+        <a:font script="Hang" typeface="맑은 고딕"/>
+        <a:font script="Hans" typeface="等线"/>
+        <a:font script="Hant" typeface="新細明體"/>
+        <a:font script="Arab" typeface="Arial"/>
+        <a:font script="Hebr" typeface="Arial"/>
+        <a:font script="Thai" typeface="Cordia New"/>
+        <a:font script="Ethi" typeface="Nyala"/>
+        <a:font script="Beng" typeface="Vrinda"/>
+        <a:font script="Gujr" typeface="Shruti"/>
+        <a:font script="Khmr" typeface="DaunPenh"/>
+        <a:font script="Knda" typeface="Tunga"/>
+        <a:font script="Guru" typeface="Raavi"/>
+        <a:font script="Cans" typeface="Euphemia"/>
+        <a:font script="Cher" typeface="Plantagenet Cherokee"/>
+        <a:font script="Yiii" typeface="Microsoft Yi Baiti"/>
+        <a:font script="Tibt" typeface="Microsoft Himalaya"/>
+        <a:font script="Thaa" typeface="MV Boli"/>
+        <a:font script="Deva" typeface="Mangal"/>
+        <a:font script="Telu" typeface="Gautami"/>
+        <a:font script="Taml" typeface="Latha"/>
+        <a:font script="Syrc" typeface="Estrangelo Edessa"/>
+        <a:font script="Orya" typeface="Kalinga"/>
+        <a:font script="Mlym" typeface="Kartika"/>
+        <a:font script="Laoo" typeface="DokChampa"/>
+        <a:font script="Sinh" typeface="Iskoola Pota"/>
+        <a:font script="Mong" typeface="Mongolian Baiti"/>
+        <a:font script="Viet" typeface="Arial"/>
+        <a:font script="Uigh" typeface="Microsoft Uighur"/>
+        <a:font script="Geor" typeface="Sylfaen"/>
+        <a:font script="Armn" typeface="Arial"/>
+        <a:font script="Bugi" typeface="Leelawadee UI"/>
+        <a:font script="Bopo" typeface="Microsoft JhengHei"/>
+        <a:font script="Java" typeface="Javanese Text"/>
+        <a:font script="Lisu" typeface="Segoe UI"/>
+        <a:font script="Mymr" typeface="Myanmar Text"/>
+        <a:font script="Nkoo" typeface="Ebrima"/>
+        <a:font script="Olck" typeface="Nirmala UI"/>
+        <a:font script="Osma" typeface="Ebrima"/>
+        <a:font script="Phag" typeface="Phagspa"/>
+        <a:font script="Syrn" typeface="Estrangelo Edessa"/>
+        <a:font script="Syrj" typeface="Estrangelo Edessa"/>
+        <a:font script="Syre" typeface="Estrangelo Edessa"/>
+        <a:font script="Sora" typeface="Nirmala UI"/>
+        <a:font script="Tale" typeface="Microsoft Tai Le"/>
+        <a:font script="Talu" typeface="Microsoft New Tai Lue"/>
+        <a:font script="Tfng" typeface="Ebrima"/>
+      </a:minorFont>
+    </a:fontScheme>
+    <a:fmtScheme name="Office">
+      <a:fillStyleLst>
+        <a:solidFill>
+          <a:schemeClr val="phClr"/>
+        </a:solidFill>
+        <a:gradFill rotWithShape="1">
+          <a:gsLst>
+            <a:gs pos="0">
+              <a:schemeClr val="phClr">
+                <a:lumMod val="110000"/>
+                <a:satMod val="105000"/>
+                <a:tint val="67000"/>
+              </a:schemeClr>
+            </a:gs>
+            <a:gs pos="50000">
+              <a:schemeClr val="phClr">
+                <a:lumMod val="105000"/>
+                <a:satMod val="103000"/>
+                <a:tint val="73000"/>
+              </a:schemeClr>
+            </a:gs>
+            <a:gs pos="100000">
+              <a:schemeClr val="phClr">
+                <a:lumMod val="105000"/>
+                <a:satMod val="109000"/>
+                <a:tint val="81000"/>
+              </a:schemeClr>
+            </a:gs>
+          </a:gsLst>
+          <a:lin ang="5400000" scaled="0"/>
+        </a:gradFill>
+        <a:gradFill rotWithShape="1">
+          <a:gsLst>
+            <a:gs pos="0">
+              <a:schemeClr val="phClr">
+                <a:satMod val="103000"/>
+                <a:lumMod val="102000"/>
+                <a:tint val="94000"/>
+              </a:schemeClr>
+            </a:gs>
+            <a:gs pos="50000">
+              <a:schemeClr val="phClr">
+                <a:satMod val="110000"/>
+                <a:lumMod val="100000"/>
+                <a:shade val="100000"/>
+              </a:schemeClr>
+            </a:gs>
+            <a:gs pos="100000">
+              <a:schemeClr val="phClr">
+                <a:lumMod val="99000"/>
+                <a:satMod val="120000"/>
+                <a:shade val="78000"/>
+              </a:schemeClr>
+            </a:gs>
+          </a:gsLst>
+          <a:lin ang="5400000" scaled="0"/>
+        </a:gradFill>
+      </a:fillStyleLst>
+      <a:lnStyleLst>
+        <a:ln w="12700" cap="flat" cmpd="sng" algn="ctr">
+          <a:solidFill>
+            <a:schemeClr val="phClr"/>
+          </a:solidFill>
+          <a:prstDash val="solid"/>
+          <a:miter lim="800000"/>
+        </a:ln>
+        <a:ln w="19050" cap="flat" cmpd="sng" algn="ctr">
+          <a:solidFill>
+            <a:schemeClr val="phClr"/>
+          </a:solidFill>
+          <a:prstDash val="solid"/>
+          <a:miter lim="800000"/>
+        </a:ln>
+        <a:ln w="25400" cap="flat" cmpd="sng" algn="ctr">
+          <a:solidFill>
+            <a:schemeClr val="phClr"/>
+          </a:solidFill>
+          <a:prstDash val="solid"/>
+          <a:miter lim="800000"/>
+        </a:ln>
+      </a:lnStyleLst>
+      <a:effectStyleLst>
+        <a:effectStyle>
+          <a:effectLst/>
+        </a:effectStyle>
+        <a:effectStyle>
+          <a:effectLst/>
+        </a:effectStyle>
+        <a:effectStyle>
+          <a:effectLst>
+            <a:outerShdw blurRad="57150" dist="19050" dir="5400000" algn="ctr" rotWithShape="0">
+              <a:srgbClr val="000000">
+                <a:alpha val="63000"/>
+              </a:srgbClr>
+            </a:outerShdw>
+          </a:effectLst>
+        </a:effectStyle>
+      </a:effectStyleLst>
+      <a:bgFillStyleLst>
+        <a:solidFill>
+          <a:schemeClr val="phClr"/>
+        </a:solidFill>
+        <a:solidFill>
+          <a:schemeClr val="phClr">
+            <a:tint val="95000"/>
+            <a:satMod val="170000"/>
+          </a:schemeClr>
+        </a:solidFill>
+        <a:gradFill rotWithShape="1">
+          <a:gsLst>
+            <a:gs pos="0">
+              <a:schemeClr val="phClr">
+                <a:tint val="93000"/>
+                <a:satMod val="150000"/>
+                <a:shade val="98000"/>
+                <a:lumMod val="102000"/>
+              </a:schemeClr>
+            </a:gs>
+            <a:gs pos="50000">
+              <a:schemeClr val="phClr">
+                <a:tint val="98000"/>
+                <a:satMod val="130000"/>
+                <a:shade val="90000"/>
+                <a:lumMod val="103000"/>
+              </a:schemeClr>
+            </a:gs>
+            <a:gs pos="100000">
+              <a:schemeClr val="phClr">
+                <a:shade val="63000"/>
+                <a:satMod val="120000"/>
+              </a:schemeClr>
+            </a:gs>
+          </a:gsLst>
+          <a:lin ang="5400000" scaled="0"/>
+        </a:gradFill>
+      </a:bgFillStyleLst>
+    </a:fmtScheme>
+  </a:themeElements>
+  <a:objectDefaults>
+    <a:lnDef>
+      <a:spPr/>
+      <a:bodyPr/>
+      <a:lstStyle/>
+      <a:style>
+        <a:lnRef idx="2">
+          <a:schemeClr val="accent1"/>
+        </a:lnRef>
+        <a:fillRef idx="0">
+          <a:schemeClr val="accent1"/>
+        </a:fillRef>
+        <a:effectRef idx="1">
+          <a:schemeClr val="accent1"/>
+        </a:effectRef>
+        <a:fontRef idx="minor">
+          <a:schemeClr val="tx1"/>
+        </a:fontRef>
+      </a:style>
+    </a:lnDef>
+  </a:objectDefaults>
+  <a:extraClrSchemeLst/>
+  <a:extLst>
+    <a:ext uri="{05A4C25C-085E-4340-85A3-A5531E510DB2}">
+      <thm15:themeFamily xmlns:thm15="http://schemas.microsoft.com/office/thememl/2012/main" name="Office Theme" id="{2E142A2C-CD16-42D6-873A-C26D2A0506FA}" vid="{1BDDFF52-6CD6-40A5-AB3C-68EB2F1E4D0A}"/>
+    </a:ext>
+  </a:extLst>
+</a:theme>
 </file>
--- a/SLIDE_FIREBASE_CLOUD_DMS.pptx
+++ b/SLIDE_FIREBASE_CLOUD_DMS.pptx
@@ -2167,7 +2167,7 @@
           </a:prstGeom>
           <a:extLst>
             <a:ext uri="{C572A759-6A51-4108-AA02-DFA0A04FC94B}">
-              <ma14:wrappingTextBoxFlag xmlns:ma14="http://schemas.microsoft.com/office/mac/drawingml/2011/main" xmlns="" val="0"/>
+              <ma14:wrappingTextBoxFlag xmlns="" xmlns:ma14="http://schemas.microsoft.com/office/mac/drawingml/2011/main" val="0"/>
             </a:ext>
           </a:extLst>
         </p:spPr>
@@ -2407,7 +2407,7 @@
           </a:prstGeom>
           <a:extLst>
             <a:ext uri="{C572A759-6A51-4108-AA02-DFA0A04FC94B}">
-              <ma14:wrappingTextBoxFlag xmlns:ma14="http://schemas.microsoft.com/office/mac/drawingml/2011/main" xmlns="" val="0"/>
+              <ma14:wrappingTextBoxFlag xmlns="" xmlns:ma14="http://schemas.microsoft.com/office/mac/drawingml/2011/main" val="0"/>
             </a:ext>
           </a:extLst>
         </p:spPr>
@@ -2647,7 +2647,7 @@
           </a:prstGeom>
           <a:extLst>
             <a:ext uri="{C572A759-6A51-4108-AA02-DFA0A04FC94B}">
-              <ma14:wrappingTextBoxFlag xmlns:ma14="http://schemas.microsoft.com/office/mac/drawingml/2011/main" xmlns="" val="0"/>
+              <ma14:wrappingTextBoxFlag xmlns="" xmlns:ma14="http://schemas.microsoft.com/office/mac/drawingml/2011/main" val="0"/>
             </a:ext>
           </a:extLst>
         </p:spPr>
@@ -2887,7 +2887,7 @@
           </a:prstGeom>
           <a:extLst>
             <a:ext uri="{C572A759-6A51-4108-AA02-DFA0A04FC94B}">
-              <ma14:wrappingTextBoxFlag xmlns:ma14="http://schemas.microsoft.com/office/mac/drawingml/2011/main" xmlns="" val="0"/>
+              <ma14:wrappingTextBoxFlag xmlns="" xmlns:ma14="http://schemas.microsoft.com/office/mac/drawingml/2011/main" val="0"/>
             </a:ext>
           </a:extLst>
         </p:spPr>
@@ -3127,7 +3127,7 @@
           </a:prstGeom>
           <a:extLst>
             <a:ext uri="{C572A759-6A51-4108-AA02-DFA0A04FC94B}">
-              <ma14:wrappingTextBoxFlag xmlns:ma14="http://schemas.microsoft.com/office/mac/drawingml/2011/main" xmlns="" val="0"/>
+              <ma14:wrappingTextBoxFlag xmlns="" xmlns:ma14="http://schemas.microsoft.com/office/mac/drawingml/2011/main" val="0"/>
             </a:ext>
           </a:extLst>
         </p:spPr>
@@ -3367,7 +3367,7 @@
           </a:prstGeom>
           <a:extLst>
             <a:ext uri="{C572A759-6A51-4108-AA02-DFA0A04FC94B}">
-              <ma14:wrappingTextBoxFlag xmlns:ma14="http://schemas.microsoft.com/office/mac/drawingml/2011/main" xmlns="" val="0"/>
+              <ma14:wrappingTextBoxFlag xmlns="" xmlns:ma14="http://schemas.microsoft.com/office/mac/drawingml/2011/main" val="0"/>
             </a:ext>
           </a:extLst>
         </p:spPr>
@@ -3442,7 +3442,7 @@
           </a:prstGeom>
           <a:extLst>
             <a:ext uri="{C572A759-6A51-4108-AA02-DFA0A04FC94B}">
-              <ma14:wrappingTextBoxFlag xmlns:ma14="http://schemas.microsoft.com/office/mac/drawingml/2011/main" xmlns="" val="0"/>
+              <ma14:wrappingTextBoxFlag xmlns="" xmlns:ma14="http://schemas.microsoft.com/office/mac/drawingml/2011/main" val="0"/>
             </a:ext>
           </a:extLst>
         </p:spPr>
@@ -3763,7 +3763,7 @@
         <p:spPr>
           <a:xfrm>
             <a:off x="571500" y="1371600"/>
-            <a:ext cx="7086600" cy="1485900"/>
+            <a:ext cx="7281582" cy="1485900"/>
           </a:xfrm>
           <a:prstGeom prst="rect">
             <a:avLst/>
@@ -3775,38 +3775,31 @@
           <a:bodyPr wrap="square" lIns="0" tIns="0" rIns="0" bIns="0" rtlCol="0" anchor="ctr"/>
           <a:lstStyle/>
           <a:p>
-            <a:pPr marL="0" indent="0">
-              <a:buNone/>
-            </a:pPr>
-            <a:r>
-              <a:rPr lang="en-US" sz="4200" b="1" dirty="0">
-                <a:solidFill>
-                  <a:schemeClr val="bg1"/>
-                </a:solidFill>
-                <a:latin typeface="+mj-lt" pitchFamily="34" charset="0"/>
-                <a:ea typeface="+mj-lt" pitchFamily="34" charset="-122"/>
-                <a:cs typeface="+mj-lt" pitchFamily="34" charset="-120"/>
-              </a:rPr>
-              <a:t>StudyDoc Manager |</a:t>
-            </a:r>
-            <a:endParaRPr lang="en-US" sz="4200" dirty="0"/>
-          </a:p>
-          <a:p>
-            <a:pPr marL="0" indent="0">
-              <a:buNone/>
-            </a:pPr>
-            <a:r>
-              <a:rPr lang="en-US" sz="4200" b="1" dirty="0">
-                <a:solidFill>
-                  <a:schemeClr val="bg1"/>
-                </a:solidFill>
-                <a:latin typeface="+mj-lt" pitchFamily="34" charset="0"/>
-                <a:ea typeface="+mj-lt" pitchFamily="34" charset="-122"/>
-                <a:cs typeface="+mj-lt" pitchFamily="34" charset="-120"/>
-              </a:rPr>
-              <a:t>Bài tập tích hợp Cloud</a:t>
-            </a:r>
-            <a:endParaRPr lang="en-US" sz="4200" dirty="0"/>
+            <a:pPr algn="l"/>
+            <a:r>
+              <a:rPr lang="vi-VN" i="0" dirty="0">
+                <a:effectLst/>
+                <a:latin typeface="Cambria" panose="02040503050406030204" pitchFamily="18" charset="0"/>
+                <a:ea typeface="Cambria" panose="02040503050406030204" pitchFamily="18" charset="0"/>
+              </a:rPr>
+              <a:t>Phân tích và Lập phương án tích hợp </a:t>
+            </a:r>
+            <a:r>
+              <a:rPr lang="vi-VN" i="0" dirty="0" err="1">
+                <a:effectLst/>
+                <a:latin typeface="Cambria" panose="02040503050406030204" pitchFamily="18" charset="0"/>
+                <a:ea typeface="Cambria" panose="02040503050406030204" pitchFamily="18" charset="0"/>
+              </a:rPr>
+              <a:t>Cloud</a:t>
+            </a:r>
+            <a:r>
+              <a:rPr lang="vi-VN" i="0" dirty="0">
+                <a:effectLst/>
+                <a:latin typeface="Cambria" panose="02040503050406030204" pitchFamily="18" charset="0"/>
+                <a:ea typeface="Cambria" panose="02040503050406030204" pitchFamily="18" charset="0"/>
+              </a:rPr>
+              <a:t> cho Hệ thống Quản lý Tài liệu</a:t>
+            </a:r>
           </a:p>
         </p:txBody>
       </p:sp>
@@ -4506,7 +4499,7 @@
           </a:prstGeom>
           <a:extLst>
             <a:ext uri="{C572A759-6A51-4108-AA02-DFA0A04FC94B}">
-              <ma14:wrappingTextBoxFlag xmlns:ma14="http://schemas.microsoft.com/office/mac/drawingml/2011/main" xmlns="" val="0"/>
+              <ma14:wrappingTextBoxFlag xmlns="" xmlns:ma14="http://schemas.microsoft.com/office/mac/drawingml/2011/main" val="0"/>
             </a:ext>
           </a:extLst>
         </p:spPr>
@@ -5127,7 +5120,7 @@
           </a:prstGeom>
           <a:extLst>
             <a:ext uri="{C572A759-6A51-4108-AA02-DFA0A04FC94B}">
-              <ma14:wrappingTextBoxFlag xmlns:ma14="http://schemas.microsoft.com/office/mac/drawingml/2011/main" xmlns="" val="0"/>
+              <ma14:wrappingTextBoxFlag xmlns="" xmlns:ma14="http://schemas.microsoft.com/office/mac/drawingml/2011/main" val="0"/>
             </a:ext>
           </a:extLst>
         </p:spPr>
@@ -5935,7 +5928,7 @@
           </a:prstGeom>
           <a:extLst>
             <a:ext uri="{C572A759-6A51-4108-AA02-DFA0A04FC94B}">
-              <ma14:wrappingTextBoxFlag xmlns:ma14="http://schemas.microsoft.com/office/mac/drawingml/2011/main" xmlns="" val="0"/>
+              <ma14:wrappingTextBoxFlag xmlns="" xmlns:ma14="http://schemas.microsoft.com/office/mac/drawingml/2011/main" val="0"/>
             </a:ext>
           </a:extLst>
         </p:spPr>
@@ -6578,7 +6571,7 @@
           </a:prstGeom>
           <a:extLst>
             <a:ext uri="{C572A759-6A51-4108-AA02-DFA0A04FC94B}">
-              <ma14:wrappingTextBoxFlag xmlns:ma14="http://schemas.microsoft.com/office/mac/drawingml/2011/main" xmlns="" val="0"/>
+              <ma14:wrappingTextBoxFlag xmlns="" xmlns:ma14="http://schemas.microsoft.com/office/mac/drawingml/2011/main" val="0"/>
             </a:ext>
           </a:extLst>
         </p:spPr>
@@ -7208,7 +7201,7 @@
           </a:prstGeom>
           <a:extLst>
             <a:ext uri="{C572A759-6A51-4108-AA02-DFA0A04FC94B}">
-              <ma14:wrappingTextBoxFlag xmlns:ma14="http://schemas.microsoft.com/office/mac/drawingml/2011/main" xmlns="" val="0"/>
+              <ma14:wrappingTextBoxFlag xmlns="" xmlns:ma14="http://schemas.microsoft.com/office/mac/drawingml/2011/main" val="0"/>
             </a:ext>
           </a:extLst>
         </p:spPr>
@@ -7343,46 +7336,6 @@
       </p:sp>
       <p:sp>
         <p:nvSpPr>
-          <p:cNvPr id="4" name="Text 0"/>
-          <p:cNvSpPr>
-            <a:spLocks noGrp="1"/>
-          </p:cNvSpPr>
-          <p:nvPr>
-            <p:ph type="body" idx="102" hasCustomPrompt="1"/>
-          </p:nvPr>
-        </p:nvSpPr>
-        <p:spPr>
-          <a:xfrm>
-            <a:off x="571500" y="1600200"/>
-            <a:ext cx="11087100" cy="342900"/>
-          </a:xfrm>
-          <a:prstGeom prst="rect">
-            <a:avLst/>
-          </a:prstGeom>
-          <a:noFill/>
-          <a:ln/>
-        </p:spPr>
-        <p:txBody>
-          <a:bodyPr wrap="square" lIns="0" tIns="0" rIns="0" bIns="0" rtlCol="0" anchor="ctr"/>
-          <a:lstStyle/>
-          <a:p>
-            <a:pPr marL="0" indent="0">
-              <a:buNone/>
-            </a:pPr>
-            <a:r>
-              <a:rPr lang="en-US" sz="1800" dirty="0">
-                <a:solidFill>
-                  <a:schemeClr val="tx2"/>
-                </a:solidFill>
-              </a:rPr>
-              <a:t>Dùng thông tin thật do nhóm tạo; không bịa tên nhóm, project ID hoặc ảnh Console</a:t>
-            </a:r>
-            <a:endParaRPr lang="en-US" sz="1800" dirty="0"/>
-          </a:p>
-        </p:txBody>
-      </p:sp>
-      <p:sp>
-        <p:nvSpPr>
           <p:cNvPr id="7" name="Content panel 249"/>
           <p:cNvSpPr/>
           <p:nvPr/>
@@ -8187,7 +8140,7 @@
           </a:prstGeom>
           <a:extLst>
             <a:ext uri="{C572A759-6A51-4108-AA02-DFA0A04FC94B}">
-              <ma14:wrappingTextBoxFlag xmlns:ma14="http://schemas.microsoft.com/office/mac/drawingml/2011/main" xmlns="" val="0"/>
+              <ma14:wrappingTextBoxFlag xmlns="" xmlns:ma14="http://schemas.microsoft.com/office/mac/drawingml/2011/main" val="0"/>
             </a:ext>
           </a:extLst>
         </p:spPr>
@@ -8322,46 +8275,6 @@
       </p:sp>
       <p:sp>
         <p:nvSpPr>
-          <p:cNvPr id="4" name="Text 0"/>
-          <p:cNvSpPr>
-            <a:spLocks noGrp="1"/>
-          </p:cNvSpPr>
-          <p:nvPr>
-            <p:ph type="body" idx="102" hasCustomPrompt="1"/>
-          </p:nvPr>
-        </p:nvSpPr>
-        <p:spPr>
-          <a:xfrm>
-            <a:off x="571500" y="1600200"/>
-            <a:ext cx="11087100" cy="342900"/>
-          </a:xfrm>
-          <a:prstGeom prst="rect">
-            <a:avLst/>
-          </a:prstGeom>
-          <a:noFill/>
-          <a:ln/>
-        </p:spPr>
-        <p:txBody>
-          <a:bodyPr wrap="square" lIns="0" tIns="0" rIns="0" bIns="0" rtlCol="0" anchor="ctr"/>
-          <a:lstStyle/>
-          <a:p>
-            <a:pPr marL="0" indent="0">
-              <a:buNone/>
-            </a:pPr>
-            <a:r>
-              <a:rPr lang="en-US" sz="1800" dirty="0">
-                <a:solidFill>
-                  <a:schemeClr val="tx2"/>
-                </a:solidFill>
-              </a:rPr>
-              <a:t>Chạy từ thư mục repo; project ID và bucket phải lấy từ cấu hình thật của nhóm</a:t>
-            </a:r>
-            <a:endParaRPr lang="en-US" sz="1800" dirty="0"/>
-          </a:p>
-        </p:txBody>
-      </p:sp>
-      <p:sp>
-        <p:nvSpPr>
           <p:cNvPr id="7" name="Content panel 268"/>
           <p:cNvSpPr/>
           <p:nvPr/>
@@ -9072,7 +8985,7 @@
           </a:prstGeom>
           <a:extLst>
             <a:ext uri="{C572A759-6A51-4108-AA02-DFA0A04FC94B}">
-              <ma14:wrappingTextBoxFlag xmlns:ma14="http://schemas.microsoft.com/office/mac/drawingml/2011/main" xmlns="" val="0"/>
+              <ma14:wrappingTextBoxFlag xmlns="" xmlns:ma14="http://schemas.microsoft.com/office/mac/drawingml/2011/main" val="0"/>
             </a:ext>
           </a:extLst>
         </p:spPr>
@@ -9207,46 +9120,6 @@
       </p:sp>
       <p:sp>
         <p:nvSpPr>
-          <p:cNvPr id="4" name="Text 0"/>
-          <p:cNvSpPr>
-            <a:spLocks noGrp="1"/>
-          </p:cNvSpPr>
-          <p:nvPr>
-            <p:ph type="body" idx="102" hasCustomPrompt="1"/>
-          </p:nvPr>
-        </p:nvSpPr>
-        <p:spPr>
-          <a:xfrm>
-            <a:off x="571500" y="1600200"/>
-            <a:ext cx="11087100" cy="342900"/>
-          </a:xfrm>
-          <a:prstGeom prst="rect">
-            <a:avLst/>
-          </a:prstGeom>
-          <a:noFill/>
-          <a:ln/>
-        </p:spPr>
-        <p:txBody>
-          <a:bodyPr wrap="square" lIns="0" tIns="0" rIns="0" bIns="0" rtlCol="0" anchor="ctr"/>
-          <a:lstStyle/>
-          <a:p>
-            <a:pPr marL="0" indent="0">
-              <a:buNone/>
-            </a:pPr>
-            <a:r>
-              <a:rPr lang="en-US" sz="1800" dirty="0">
-                <a:solidFill>
-                  <a:schemeClr val="tx2"/>
-                </a:solidFill>
-              </a:rPr>
-              <a:t>Checklist cần ghi nhận, không phải kết quả đã chạy hoặc ảnh tài khoản giả</a:t>
-            </a:r>
-            <a:endParaRPr lang="en-US" sz="1800" dirty="0"/>
-          </a:p>
-        </p:txBody>
-      </p:sp>
-      <p:sp>
-        <p:nvSpPr>
           <p:cNvPr id="6" name="Content panel 284"/>
           <p:cNvSpPr/>
           <p:nvPr/>
@@ -10033,48 +9906,6 @@
       </p:sp>
       <p:sp>
         <p:nvSpPr>
-          <p:cNvPr id="24" name="Text 302: Chỉ đánh dấu hoàn tất sau khi lưu bằng chứng thật của từng bước."/>
-          <p:cNvSpPr txBox="1"/>
-          <p:nvPr/>
-        </p:nvSpPr>
-        <p:spPr>
-          <a:xfrm>
-            <a:off x="571500" y="5829300"/>
-            <a:ext cx="11087100" cy="342900"/>
-          </a:xfrm>
-          <a:prstGeom prst="rect">
-            <a:avLst/>
-          </a:prstGeom>
-          <a:noFill/>
-          <a:ln/>
-        </p:spPr>
-        <p:txBody>
-          <a:bodyPr wrap="square" lIns="0" tIns="0" rIns="0" bIns="0" rtlCol="0" anchor="t"/>
-          <a:lstStyle/>
-          <a:p>
-            <a:pPr marL="0" indent="0">
-              <a:lnSpc>
-                <a:spcPct val="106000"/>
-              </a:lnSpc>
-              <a:buNone/>
-            </a:pPr>
-            <a:r>
-              <a:rPr lang="en-US" sz="1800" b="1" dirty="0">
-                <a:solidFill>
-                  <a:schemeClr val="tx1"/>
-                </a:solidFill>
-                <a:latin typeface="+mn-lt" pitchFamily="34" charset="0"/>
-                <a:ea typeface="+mn-lt" pitchFamily="34" charset="-122"/>
-                <a:cs typeface="+mn-lt" pitchFamily="34" charset="-120"/>
-              </a:rPr>
-              <a:t>Chỉ đánh dấu hoàn tất sau khi lưu bằng chứng thật của từng bước.</a:t>
-            </a:r>
-            <a:endParaRPr lang="en-US" sz="1800" dirty="0"/>
-          </a:p>
-        </p:txBody>
-      </p:sp>
-      <p:sp>
-        <p:nvSpPr>
           <p:cNvPr id="25" name="Slide Number Placeholder 0"/>
           <p:cNvSpPr>
             <a:spLocks noGrp="1"/>
@@ -10093,7 +9924,7 @@
           </a:prstGeom>
           <a:extLst>
             <a:ext uri="{C572A759-6A51-4108-AA02-DFA0A04FC94B}">
-              <ma14:wrappingTextBoxFlag xmlns:ma14="http://schemas.microsoft.com/office/mac/drawingml/2011/main" xmlns="" val="0"/>
+              <ma14:wrappingTextBoxFlag xmlns="" xmlns:ma14="http://schemas.microsoft.com/office/mac/drawingml/2011/main" val="0"/>
             </a:ext>
           </a:extLst>
         </p:spPr>
@@ -10228,46 +10059,6 @@
       </p:sp>
       <p:sp>
         <p:nvSpPr>
-          <p:cNvPr id="4" name="Text 0"/>
-          <p:cNvSpPr>
-            <a:spLocks noGrp="1"/>
-          </p:cNvSpPr>
-          <p:nvPr>
-            <p:ph type="body" idx="102" hasCustomPrompt="1"/>
-          </p:nvPr>
-        </p:nvSpPr>
-        <p:spPr>
-          <a:xfrm>
-            <a:off x="571500" y="1600200"/>
-            <a:ext cx="11087100" cy="342900"/>
-          </a:xfrm>
-          <a:prstGeom prst="rect">
-            <a:avLst/>
-          </a:prstGeom>
-          <a:noFill/>
-          <a:ln/>
-        </p:spPr>
-        <p:txBody>
-          <a:bodyPr wrap="square" lIns="0" tIns="0" rIns="0" bIns="0" rtlCol="0" anchor="ctr"/>
-          <a:lstStyle/>
-          <a:p>
-            <a:pPr marL="0" indent="0">
-              <a:buNone/>
-            </a:pPr>
-            <a:r>
-              <a:rPr lang="en-US" sz="1800" dirty="0">
-                <a:solidFill>
-                  <a:schemeClr val="accent6"/>
-                </a:solidFill>
-              </a:rPr>
-              <a:t>Không đánh đồng “có mã triển khai” với “đã nghiệm thu Google / Cloud thật”</a:t>
-            </a:r>
-            <a:endParaRPr lang="en-US" sz="1800" dirty="0"/>
-          </a:p>
-        </p:txBody>
-      </p:sp>
-      <p:sp>
-        <p:nvSpPr>
           <p:cNvPr id="6" name="Content panel 303"/>
           <p:cNvSpPr/>
           <p:nvPr/>
@@ -10697,7 +10488,7 @@
           </a:prstGeom>
           <a:extLst>
             <a:ext uri="{C572A759-6A51-4108-AA02-DFA0A04FC94B}">
-              <ma14:wrappingTextBoxFlag xmlns:ma14="http://schemas.microsoft.com/office/mac/drawingml/2011/main" xmlns="" val="0"/>
+              <ma14:wrappingTextBoxFlag xmlns="" xmlns:ma14="http://schemas.microsoft.com/office/mac/drawingml/2011/main" val="0"/>
             </a:ext>
           </a:extLst>
         </p:spPr>
@@ -12296,7 +12087,7 @@
           </a:prstGeom>
           <a:extLst>
             <a:ext uri="{C572A759-6A51-4108-AA02-DFA0A04FC94B}">
-              <ma14:wrappingTextBoxFlag xmlns:ma14="http://schemas.microsoft.com/office/mac/drawingml/2011/main" xmlns="" val="0"/>
+              <ma14:wrappingTextBoxFlag xmlns="" xmlns:ma14="http://schemas.microsoft.com/office/mac/drawingml/2011/main" val="0"/>
             </a:ext>
           </a:extLst>
         </p:spPr>
@@ -13055,7 +12846,7 @@
           </a:prstGeom>
           <a:extLst>
             <a:ext uri="{C572A759-6A51-4108-AA02-DFA0A04FC94B}">
-              <ma14:wrappingTextBoxFlag xmlns:ma14="http://schemas.microsoft.com/office/mac/drawingml/2011/main" xmlns="" val="0"/>
+              <ma14:wrappingTextBoxFlag xmlns="" xmlns:ma14="http://schemas.microsoft.com/office/mac/drawingml/2011/main" val="0"/>
             </a:ext>
           </a:extLst>
         </p:spPr>
@@ -14073,7 +13864,7 @@
           </a:prstGeom>
           <a:extLst>
             <a:ext uri="{C572A759-6A51-4108-AA02-DFA0A04FC94B}">
-              <ma14:wrappingTextBoxFlag xmlns:ma14="http://schemas.microsoft.com/office/mac/drawingml/2011/main" xmlns="" val="0"/>
+              <ma14:wrappingTextBoxFlag xmlns="" xmlns:ma14="http://schemas.microsoft.com/office/mac/drawingml/2011/main" val="0"/>
             </a:ext>
           </a:extLst>
         </p:spPr>
@@ -15403,7 +15194,7 @@
           </a:prstGeom>
           <a:extLst>
             <a:ext uri="{C572A759-6A51-4108-AA02-DFA0A04FC94B}">
-              <ma14:wrappingTextBoxFlag xmlns:ma14="http://schemas.microsoft.com/office/mac/drawingml/2011/main" xmlns="" val="0"/>
+              <ma14:wrappingTextBoxFlag xmlns="" xmlns:ma14="http://schemas.microsoft.com/office/mac/drawingml/2011/main" val="0"/>
             </a:ext>
           </a:extLst>
         </p:spPr>
@@ -16254,7 +16045,7 @@
           </a:prstGeom>
           <a:extLst>
             <a:ext uri="{C572A759-6A51-4108-AA02-DFA0A04FC94B}">
-              <ma14:wrappingTextBoxFlag xmlns:ma14="http://schemas.microsoft.com/office/mac/drawingml/2011/main" xmlns="" val="0"/>
+              <ma14:wrappingTextBoxFlag xmlns="" xmlns:ma14="http://schemas.microsoft.com/office/mac/drawingml/2011/main" val="0"/>
             </a:ext>
           </a:extLst>
         </p:spPr>
@@ -17164,7 +16955,7 @@
           </a:prstGeom>
           <a:extLst>
             <a:ext uri="{C572A759-6A51-4108-AA02-DFA0A04FC94B}">
-              <ma14:wrappingTextBoxFlag xmlns:ma14="http://schemas.microsoft.com/office/mac/drawingml/2011/main" xmlns="" val="0"/>
+              <ma14:wrappingTextBoxFlag xmlns="" xmlns:ma14="http://schemas.microsoft.com/office/mac/drawingml/2011/main" val="0"/>
             </a:ext>
           </a:extLst>
         </p:spPr>
@@ -18318,7 +18109,7 @@
           </a:prstGeom>
           <a:extLst>
             <a:ext uri="{C572A759-6A51-4108-AA02-DFA0A04FC94B}">
-              <ma14:wrappingTextBoxFlag xmlns:ma14="http://schemas.microsoft.com/office/mac/drawingml/2011/main" xmlns="" val="0"/>
+              <ma14:wrappingTextBoxFlag xmlns="" xmlns:ma14="http://schemas.microsoft.com/office/mac/drawingml/2011/main" val="0"/>
             </a:ext>
           </a:extLst>
         </p:spPr>
@@ -19831,7 +19622,7 @@
           </a:prstGeom>
           <a:extLst>
             <a:ext uri="{C572A759-6A51-4108-AA02-DFA0A04FC94B}">
-              <ma14:wrappingTextBoxFlag xmlns:ma14="http://schemas.microsoft.com/office/mac/drawingml/2011/main" xmlns="" val="0"/>
+              <ma14:wrappingTextBoxFlag xmlns="" xmlns:ma14="http://schemas.microsoft.com/office/mac/drawingml/2011/main" val="0"/>
             </a:ext>
           </a:extLst>
         </p:spPr>
@@ -20708,7 +20499,7 @@
           </a:prstGeom>
           <a:extLst>
             <a:ext uri="{C572A759-6A51-4108-AA02-DFA0A04FC94B}">
-              <ma14:wrappingTextBoxFlag xmlns:ma14="http://schemas.microsoft.com/office/mac/drawingml/2011/main" xmlns="" val="0"/>
+              <ma14:wrappingTextBoxFlag xmlns="" xmlns:ma14="http://schemas.microsoft.com/office/mac/drawingml/2011/main" val="0"/>
             </a:ext>
           </a:extLst>
         </p:spPr>
